--- a/VoteSite.pptx
+++ b/VoteSite.pptx
@@ -1,42 +1,42 @@
 
 <file path=ppt/presentation.xml><?xml version="1.0" encoding="utf-8"?>
-<p:presentation xmlns:a="http://schemas.openxmlformats.org/drawingml/2006/main" xmlns:r="http://schemas.openxmlformats.org/officeDocument/2006/relationships" xmlns:mc="http://schemas.openxmlformats.org/markup-compatibility/2006" xmlns:mv="urn:schemas-microsoft-com:mac:vml" xmlns:p="http://schemas.openxmlformats.org/presentationml/2006/main" xmlns:c="http://schemas.openxmlformats.org/drawingml/2006/chart" xmlns:dgm="http://schemas.openxmlformats.org/drawingml/2006/diagram" xmlns:o="urn:schemas-microsoft-com:office:office" xmlns:v="urn:schemas-microsoft-com:vml" xmlns:pvml="urn:schemas-microsoft-com:office:powerpoint" xmlns:com="http://schemas.openxmlformats.org/drawingml/2006/compatibility" xmlns:p14="http://schemas.microsoft.com/office/powerpoint/2010/main" xmlns:p15="http://schemas.microsoft.com/office/powerpoint/2012/main" xmlns:ahyp="http://schemas.microsoft.com/office/drawing/2018/hyperlinkcolor" autoCompressPictures="0" embedTrueTypeFonts="1" strictFirstAndLastChars="0" saveSubsetFonts="1">
+<p:presentation xmlns:a="http://schemas.openxmlformats.org/drawingml/2006/main" xmlns:r="http://schemas.openxmlformats.org/officeDocument/2006/relationships" xmlns:p="http://schemas.openxmlformats.org/presentationml/2006/main" strictFirstAndLastChars="0" embedTrueTypeFonts="1" saveSubsetFonts="1" autoCompressPictures="0">
   <p:sldMasterIdLst>
-    <p:sldMasterId id="2147483659" r:id="rId4"/>
+    <p:sldMasterId id="2147483659" r:id="rId1"/>
   </p:sldMasterIdLst>
   <p:notesMasterIdLst>
-    <p:notesMasterId r:id="rId5"/>
+    <p:notesMasterId r:id="rId10"/>
   </p:notesMasterIdLst>
   <p:sldIdLst>
-    <p:sldId id="256" r:id="rId6"/>
-    <p:sldId id="257" r:id="rId7"/>
-    <p:sldId id="258" r:id="rId8"/>
-    <p:sldId id="259" r:id="rId9"/>
-    <p:sldId id="260" r:id="rId10"/>
-    <p:sldId id="261" r:id="rId11"/>
-    <p:sldId id="262" r:id="rId12"/>
-    <p:sldId id="263" r:id="rId13"/>
+    <p:sldId id="256" r:id="rId2"/>
+    <p:sldId id="257" r:id="rId3"/>
+    <p:sldId id="258" r:id="rId4"/>
+    <p:sldId id="259" r:id="rId5"/>
+    <p:sldId id="260" r:id="rId6"/>
+    <p:sldId id="261" r:id="rId7"/>
+    <p:sldId id="262" r:id="rId8"/>
+    <p:sldId id="263" r:id="rId9"/>
   </p:sldIdLst>
-  <p:sldSz cy="5143500" cx="9144000"/>
+  <p:sldSz cx="9144000" cy="5143500" type="screen16x9"/>
   <p:notesSz cx="6858000" cy="9144000"/>
   <p:embeddedFontLst>
     <p:embeddedFont>
-      <p:font typeface="Roboto"/>
-      <p:regular r:id="rId14"/>
-      <p:bold r:id="rId15"/>
-      <p:italic r:id="rId16"/>
-      <p:boldItalic r:id="rId17"/>
+      <p:font typeface="Merriweather" panose="020B0604020202020204" charset="-52"/>
+      <p:regular r:id="rId11"/>
+      <p:bold r:id="rId12"/>
+      <p:italic r:id="rId13"/>
+      <p:boldItalic r:id="rId14"/>
     </p:embeddedFont>
     <p:embeddedFont>
-      <p:font typeface="Merriweather"/>
-      <p:regular r:id="rId18"/>
-      <p:bold r:id="rId19"/>
-      <p:italic r:id="rId20"/>
-      <p:boldItalic r:id="rId21"/>
+      <p:font typeface="Roboto" panose="020B0604020202020204" charset="0"/>
+      <p:regular r:id="rId15"/>
+      <p:bold r:id="rId16"/>
+      <p:italic r:id="rId17"/>
+      <p:boldItalic r:id="rId18"/>
     </p:embeddedFont>
   </p:embeddedFontLst>
   <p:defaultTextStyle>
-    <a:defPPr lvl="0" marR="0" rtl="0" algn="l">
+    <a:defPPr marR="0" lvl="0" algn="l" rtl="0">
       <a:lnSpc>
         <a:spcPct val="100000"/>
       </a:lnSpc>
@@ -47,7 +47,7 @@
         <a:spcPts val="0"/>
       </a:spcAft>
     </a:defPPr>
-    <a:lvl1pPr lvl="0" marR="0" rtl="0" algn="l">
+    <a:lvl1pPr marR="0" lvl="0" algn="l" rtl="0">
       <a:lnSpc>
         <a:spcPct val="100000"/>
       </a:lnSpc>
@@ -61,7 +61,7 @@
         <a:srgbClr val="000000"/>
       </a:buClr>
       <a:buFont typeface="Arial"/>
-      <a:defRPr b="0" i="0" sz="1400" u="none" cap="none" strike="noStrike">
+      <a:defRPr sz="1400" b="0" i="0" u="none" strike="noStrike" cap="none">
         <a:solidFill>
           <a:srgbClr val="000000"/>
         </a:solidFill>
@@ -71,7 +71,7 @@
         <a:sym typeface="Arial"/>
       </a:defRPr>
     </a:lvl1pPr>
-    <a:lvl2pPr lvl="1" marR="0" rtl="0" algn="l">
+    <a:lvl2pPr marR="0" lvl="1" algn="l" rtl="0">
       <a:lnSpc>
         <a:spcPct val="100000"/>
       </a:lnSpc>
@@ -85,7 +85,7 @@
         <a:srgbClr val="000000"/>
       </a:buClr>
       <a:buFont typeface="Arial"/>
-      <a:defRPr b="0" i="0" sz="1400" u="none" cap="none" strike="noStrike">
+      <a:defRPr sz="1400" b="0" i="0" u="none" strike="noStrike" cap="none">
         <a:solidFill>
           <a:srgbClr val="000000"/>
         </a:solidFill>
@@ -95,7 +95,7 @@
         <a:sym typeface="Arial"/>
       </a:defRPr>
     </a:lvl2pPr>
-    <a:lvl3pPr lvl="2" marR="0" rtl="0" algn="l">
+    <a:lvl3pPr marR="0" lvl="2" algn="l" rtl="0">
       <a:lnSpc>
         <a:spcPct val="100000"/>
       </a:lnSpc>
@@ -109,7 +109,7 @@
         <a:srgbClr val="000000"/>
       </a:buClr>
       <a:buFont typeface="Arial"/>
-      <a:defRPr b="0" i="0" sz="1400" u="none" cap="none" strike="noStrike">
+      <a:defRPr sz="1400" b="0" i="0" u="none" strike="noStrike" cap="none">
         <a:solidFill>
           <a:srgbClr val="000000"/>
         </a:solidFill>
@@ -119,7 +119,7 @@
         <a:sym typeface="Arial"/>
       </a:defRPr>
     </a:lvl3pPr>
-    <a:lvl4pPr lvl="3" marR="0" rtl="0" algn="l">
+    <a:lvl4pPr marR="0" lvl="3" algn="l" rtl="0">
       <a:lnSpc>
         <a:spcPct val="100000"/>
       </a:lnSpc>
@@ -133,7 +133,7 @@
         <a:srgbClr val="000000"/>
       </a:buClr>
       <a:buFont typeface="Arial"/>
-      <a:defRPr b="0" i="0" sz="1400" u="none" cap="none" strike="noStrike">
+      <a:defRPr sz="1400" b="0" i="0" u="none" strike="noStrike" cap="none">
         <a:solidFill>
           <a:srgbClr val="000000"/>
         </a:solidFill>
@@ -143,7 +143,7 @@
         <a:sym typeface="Arial"/>
       </a:defRPr>
     </a:lvl4pPr>
-    <a:lvl5pPr lvl="4" marR="0" rtl="0" algn="l">
+    <a:lvl5pPr marR="0" lvl="4" algn="l" rtl="0">
       <a:lnSpc>
         <a:spcPct val="100000"/>
       </a:lnSpc>
@@ -157,7 +157,7 @@
         <a:srgbClr val="000000"/>
       </a:buClr>
       <a:buFont typeface="Arial"/>
-      <a:defRPr b="0" i="0" sz="1400" u="none" cap="none" strike="noStrike">
+      <a:defRPr sz="1400" b="0" i="0" u="none" strike="noStrike" cap="none">
         <a:solidFill>
           <a:srgbClr val="000000"/>
         </a:solidFill>
@@ -167,7 +167,7 @@
         <a:sym typeface="Arial"/>
       </a:defRPr>
     </a:lvl5pPr>
-    <a:lvl6pPr lvl="5" marR="0" rtl="0" algn="l">
+    <a:lvl6pPr marR="0" lvl="5" algn="l" rtl="0">
       <a:lnSpc>
         <a:spcPct val="100000"/>
       </a:lnSpc>
@@ -181,7 +181,7 @@
         <a:srgbClr val="000000"/>
       </a:buClr>
       <a:buFont typeface="Arial"/>
-      <a:defRPr b="0" i="0" sz="1400" u="none" cap="none" strike="noStrike">
+      <a:defRPr sz="1400" b="0" i="0" u="none" strike="noStrike" cap="none">
         <a:solidFill>
           <a:srgbClr val="000000"/>
         </a:solidFill>
@@ -191,7 +191,7 @@
         <a:sym typeface="Arial"/>
       </a:defRPr>
     </a:lvl6pPr>
-    <a:lvl7pPr lvl="6" marR="0" rtl="0" algn="l">
+    <a:lvl7pPr marR="0" lvl="6" algn="l" rtl="0">
       <a:lnSpc>
         <a:spcPct val="100000"/>
       </a:lnSpc>
@@ -205,7 +205,7 @@
         <a:srgbClr val="000000"/>
       </a:buClr>
       <a:buFont typeface="Arial"/>
-      <a:defRPr b="0" i="0" sz="1400" u="none" cap="none" strike="noStrike">
+      <a:defRPr sz="1400" b="0" i="0" u="none" strike="noStrike" cap="none">
         <a:solidFill>
           <a:srgbClr val="000000"/>
         </a:solidFill>
@@ -215,7 +215,7 @@
         <a:sym typeface="Arial"/>
       </a:defRPr>
     </a:lvl7pPr>
-    <a:lvl8pPr lvl="7" marR="0" rtl="0" algn="l">
+    <a:lvl8pPr marR="0" lvl="7" algn="l" rtl="0">
       <a:lnSpc>
         <a:spcPct val="100000"/>
       </a:lnSpc>
@@ -229,7 +229,7 @@
         <a:srgbClr val="000000"/>
       </a:buClr>
       <a:buFont typeface="Arial"/>
-      <a:defRPr b="0" i="0" sz="1400" u="none" cap="none" strike="noStrike">
+      <a:defRPr sz="1400" b="0" i="0" u="none" strike="noStrike" cap="none">
         <a:solidFill>
           <a:srgbClr val="000000"/>
         </a:solidFill>
@@ -239,7 +239,7 @@
         <a:sym typeface="Arial"/>
       </a:defRPr>
     </a:lvl8pPr>
-    <a:lvl9pPr lvl="8" marR="0" rtl="0" algn="l">
+    <a:lvl9pPr marR="0" lvl="8" algn="l" rtl="0">
       <a:lnSpc>
         <a:spcPct val="100000"/>
       </a:lnSpc>
@@ -253,7 +253,7 @@
         <a:srgbClr val="000000"/>
       </a:buClr>
       <a:buFont typeface="Arial"/>
-      <a:defRPr b="0" i="0" sz="1400" u="none" cap="none" strike="noStrike">
+      <a:defRPr sz="1400" b="0" i="0" u="none" strike="noStrike" cap="none">
         <a:solidFill>
           <a:srgbClr val="000000"/>
         </a:solidFill>
@@ -266,7 +266,7 @@
   </p:defaultTextStyle>
   <p:extLst>
     <p:ext uri="{EFAFB233-063F-42B5-8137-9DF3F51BA10A}">
-      <p15:sldGuideLst>
+      <p15:sldGuideLst xmlns:p15="http://schemas.microsoft.com/office/powerpoint/2012/main">
         <p15:guide id="1" orient="horz" pos="1620">
           <p15:clr>
             <a:srgbClr val="747775"/>
@@ -284,11 +284,16 @@
 </file>
 
 <file path=ppt/notesMasters/notesMaster1.xml><?xml version="1.0" encoding="utf-8"?>
-<p:notesMaster xmlns:a="http://schemas.openxmlformats.org/drawingml/2006/main" xmlns:r="http://schemas.openxmlformats.org/officeDocument/2006/relationships" xmlns:mc="http://schemas.openxmlformats.org/markup-compatibility/2006" xmlns:mv="urn:schemas-microsoft-com:mac:vml" xmlns:p="http://schemas.openxmlformats.org/presentationml/2006/main" xmlns:c="http://schemas.openxmlformats.org/drawingml/2006/chart" xmlns:dgm="http://schemas.openxmlformats.org/drawingml/2006/diagram" xmlns:o="urn:schemas-microsoft-com:office:office" xmlns:v="urn:schemas-microsoft-com:vml" xmlns:pvml="urn:schemas-microsoft-com:office:powerpoint" xmlns:com="http://schemas.openxmlformats.org/drawingml/2006/compatibility" xmlns:p14="http://schemas.microsoft.com/office/powerpoint/2010/main" xmlns:p15="http://schemas.microsoft.com/office/powerpoint/2012/main" xmlns:ahyp="http://schemas.microsoft.com/office/drawing/2018/hyperlinkcolor">
+<p:notesMaster xmlns:a="http://schemas.openxmlformats.org/drawingml/2006/main" xmlns:r="http://schemas.openxmlformats.org/officeDocument/2006/relationships" xmlns:p="http://schemas.openxmlformats.org/presentationml/2006/main">
   <p:cSld>
+    <p:bg>
+      <p:bgRef idx="1001">
+        <a:schemeClr val="bg1"/>
+      </p:bgRef>
+    </p:bg>
     <p:spTree>
       <p:nvGrpSpPr>
-        <p:cNvPr id="2" name="Shape 2"/>
+        <p:cNvPr id="1" name="Shape 2"/>
         <p:cNvGrpSpPr/>
         <p:nvPr/>
       </p:nvGrpSpPr>
@@ -303,9 +308,11 @@
       <p:sp>
         <p:nvSpPr>
           <p:cNvPr id="3" name="Google Shape;3;n"/>
-          <p:cNvSpPr/>
+          <p:cNvSpPr>
+            <a:spLocks noGrp="1" noRot="1" noChangeAspect="1"/>
+          </p:cNvSpPr>
           <p:nvPr>
-            <p:ph idx="2" type="sldImg"/>
+            <p:ph type="sldImg" idx="2"/>
           </p:nvPr>
         </p:nvSpPr>
         <p:spPr>
@@ -314,9 +321,13 @@
             <a:ext cx="6096075" cy="3429000"/>
           </a:xfrm>
           <a:custGeom>
-            <a:rect b="b" l="l" r="r" t="t"/>
+            <a:avLst/>
+            <a:gdLst/>
+            <a:ahLst/>
+            <a:cxnLst/>
+            <a:rect l="l" t="t" r="r" b="b"/>
             <a:pathLst>
-              <a:path extrusionOk="0" h="120000" w="120000">
+              <a:path w="120000" h="120000" extrusionOk="0">
                 <a:moveTo>
                   <a:pt x="0" y="0"/>
                 </a:moveTo>
@@ -334,23 +345,25 @@
             </a:pathLst>
           </a:custGeom>
           <a:noFill/>
-          <a:ln cap="flat" cmpd="sng" w="9525">
+          <a:ln w="9525" cap="flat" cmpd="sng">
             <a:solidFill>
               <a:srgbClr val="000000"/>
             </a:solidFill>
             <a:prstDash val="solid"/>
             <a:round/>
-            <a:headEnd len="sm" w="sm" type="none"/>
-            <a:tailEnd len="sm" w="sm" type="none"/>
+            <a:headEnd type="none" w="sm" len="sm"/>
+            <a:tailEnd type="none" w="sm" len="sm"/>
           </a:ln>
         </p:spPr>
       </p:sp>
       <p:sp>
         <p:nvSpPr>
           <p:cNvPr id="4" name="Google Shape;4;n"/>
-          <p:cNvSpPr txBox="1"/>
+          <p:cNvSpPr txBox="1">
+            <a:spLocks noGrp="1"/>
+          </p:cNvSpPr>
           <p:nvPr>
-            <p:ph idx="1" type="body"/>
+            <p:ph type="body" idx="1"/>
           </p:nvPr>
         </p:nvSpPr>
         <p:spPr>
@@ -367,11 +380,11 @@
           </a:ln>
         </p:spPr>
         <p:txBody>
-          <a:bodyPr anchorCtr="0" anchor="t" bIns="91425" lIns="91425" spcFirstLastPara="1" rIns="91425" wrap="square" tIns="91425">
+          <a:bodyPr spcFirstLastPara="1" wrap="square" lIns="91425" tIns="91425" rIns="91425" bIns="91425" anchor="t" anchorCtr="0">
             <a:noAutofit/>
           </a:bodyPr>
           <a:lstStyle>
-            <a:lvl1pPr indent="-298450" lvl="0" marL="457200">
+            <a:lvl1pPr marL="457200" lvl="0" indent="-298450">
               <a:spcBef>
                 <a:spcPts val="0"/>
               </a:spcBef>
@@ -382,7 +395,7 @@
               <a:buChar char="●"/>
               <a:defRPr sz="1100"/>
             </a:lvl1pPr>
-            <a:lvl2pPr indent="-298450" lvl="1" marL="914400">
+            <a:lvl2pPr marL="914400" lvl="1" indent="-298450">
               <a:spcBef>
                 <a:spcPts val="0"/>
               </a:spcBef>
@@ -393,7 +406,7 @@
               <a:buChar char="○"/>
               <a:defRPr sz="1100"/>
             </a:lvl2pPr>
-            <a:lvl3pPr indent="-298450" lvl="2" marL="1371600">
+            <a:lvl3pPr marL="1371600" lvl="2" indent="-298450">
               <a:spcBef>
                 <a:spcPts val="0"/>
               </a:spcBef>
@@ -404,7 +417,7 @@
               <a:buChar char="■"/>
               <a:defRPr sz="1100"/>
             </a:lvl3pPr>
-            <a:lvl4pPr indent="-298450" lvl="3" marL="1828800">
+            <a:lvl4pPr marL="1828800" lvl="3" indent="-298450">
               <a:spcBef>
                 <a:spcPts val="0"/>
               </a:spcBef>
@@ -415,7 +428,7 @@
               <a:buChar char="●"/>
               <a:defRPr sz="1100"/>
             </a:lvl4pPr>
-            <a:lvl5pPr indent="-298450" lvl="4" marL="2286000">
+            <a:lvl5pPr marL="2286000" lvl="4" indent="-298450">
               <a:spcBef>
                 <a:spcPts val="0"/>
               </a:spcBef>
@@ -426,7 +439,7 @@
               <a:buChar char="○"/>
               <a:defRPr sz="1100"/>
             </a:lvl5pPr>
-            <a:lvl6pPr indent="-298450" lvl="5" marL="2743200">
+            <a:lvl6pPr marL="2743200" lvl="5" indent="-298450">
               <a:spcBef>
                 <a:spcPts val="0"/>
               </a:spcBef>
@@ -437,7 +450,7 @@
               <a:buChar char="■"/>
               <a:defRPr sz="1100"/>
             </a:lvl6pPr>
-            <a:lvl7pPr indent="-298450" lvl="6" marL="3200400">
+            <a:lvl7pPr marL="3200400" lvl="6" indent="-298450">
               <a:spcBef>
                 <a:spcPts val="0"/>
               </a:spcBef>
@@ -448,7 +461,7 @@
               <a:buChar char="●"/>
               <a:defRPr sz="1100"/>
             </a:lvl7pPr>
-            <a:lvl8pPr indent="-298450" lvl="7" marL="3657600">
+            <a:lvl8pPr marL="3657600" lvl="7" indent="-298450">
               <a:spcBef>
                 <a:spcPts val="0"/>
               </a:spcBef>
@@ -459,7 +472,7 @@
               <a:buChar char="○"/>
               <a:defRPr sz="1100"/>
             </a:lvl8pPr>
-            <a:lvl9pPr indent="-298450" lvl="8" marL="4114800">
+            <a:lvl9pPr marL="4114800" lvl="8" indent="-298450">
               <a:spcBef>
                 <a:spcPts val="0"/>
               </a:spcBef>
@@ -471,14 +484,16 @@
               <a:defRPr sz="1100"/>
             </a:lvl9pPr>
           </a:lstStyle>
-          <a:p/>
+          <a:p>
+            <a:endParaRPr/>
+          </a:p>
         </p:txBody>
       </p:sp>
     </p:spTree>
   </p:cSld>
-  <p:clrMap accent1="accent1" accent2="accent2" accent3="accent3" accent4="accent4" accent5="accent5" accent6="accent6" bg1="lt1" bg2="dk2" tx1="dk1" tx2="lt2" folHlink="folHlink" hlink="hlink"/>
+  <p:clrMap bg1="lt1" tx1="dk1" bg2="dk2" tx2="lt2" accent1="accent1" accent2="accent2" accent3="accent3" accent4="accent4" accent5="accent5" accent6="accent6" hlink="hlink" folHlink="folHlink"/>
   <p:notesStyle>
-    <a:defPPr lvl="0" marR="0" rtl="0" algn="l">
+    <a:defPPr marR="0" lvl="0" algn="l" rtl="0">
       <a:lnSpc>
         <a:spcPct val="100000"/>
       </a:lnSpc>
@@ -489,7 +504,7 @@
         <a:spcPts val="0"/>
       </a:spcAft>
     </a:defPPr>
-    <a:lvl1pPr lvl="0" marR="0" rtl="0" algn="l">
+    <a:lvl1pPr marR="0" lvl="0" algn="l" rtl="0">
       <a:lnSpc>
         <a:spcPct val="100000"/>
       </a:lnSpc>
@@ -503,7 +518,7 @@
         <a:srgbClr val="000000"/>
       </a:buClr>
       <a:buFont typeface="Arial"/>
-      <a:defRPr b="0" i="0" sz="1400" u="none" cap="none" strike="noStrike">
+      <a:defRPr sz="1400" b="0" i="0" u="none" strike="noStrike" cap="none">
         <a:solidFill>
           <a:srgbClr val="000000"/>
         </a:solidFill>
@@ -513,7 +528,7 @@
         <a:sym typeface="Arial"/>
       </a:defRPr>
     </a:lvl1pPr>
-    <a:lvl2pPr lvl="1" marR="0" rtl="0" algn="l">
+    <a:lvl2pPr marR="0" lvl="1" algn="l" rtl="0">
       <a:lnSpc>
         <a:spcPct val="100000"/>
       </a:lnSpc>
@@ -527,7 +542,7 @@
         <a:srgbClr val="000000"/>
       </a:buClr>
       <a:buFont typeface="Arial"/>
-      <a:defRPr b="0" i="0" sz="1400" u="none" cap="none" strike="noStrike">
+      <a:defRPr sz="1400" b="0" i="0" u="none" strike="noStrike" cap="none">
         <a:solidFill>
           <a:srgbClr val="000000"/>
         </a:solidFill>
@@ -537,7 +552,7 @@
         <a:sym typeface="Arial"/>
       </a:defRPr>
     </a:lvl2pPr>
-    <a:lvl3pPr lvl="2" marR="0" rtl="0" algn="l">
+    <a:lvl3pPr marR="0" lvl="2" algn="l" rtl="0">
       <a:lnSpc>
         <a:spcPct val="100000"/>
       </a:lnSpc>
@@ -551,7 +566,7 @@
         <a:srgbClr val="000000"/>
       </a:buClr>
       <a:buFont typeface="Arial"/>
-      <a:defRPr b="0" i="0" sz="1400" u="none" cap="none" strike="noStrike">
+      <a:defRPr sz="1400" b="0" i="0" u="none" strike="noStrike" cap="none">
         <a:solidFill>
           <a:srgbClr val="000000"/>
         </a:solidFill>
@@ -561,7 +576,7 @@
         <a:sym typeface="Arial"/>
       </a:defRPr>
     </a:lvl3pPr>
-    <a:lvl4pPr lvl="3" marR="0" rtl="0" algn="l">
+    <a:lvl4pPr marR="0" lvl="3" algn="l" rtl="0">
       <a:lnSpc>
         <a:spcPct val="100000"/>
       </a:lnSpc>
@@ -575,7 +590,7 @@
         <a:srgbClr val="000000"/>
       </a:buClr>
       <a:buFont typeface="Arial"/>
-      <a:defRPr b="0" i="0" sz="1400" u="none" cap="none" strike="noStrike">
+      <a:defRPr sz="1400" b="0" i="0" u="none" strike="noStrike" cap="none">
         <a:solidFill>
           <a:srgbClr val="000000"/>
         </a:solidFill>
@@ -585,7 +600,7 @@
         <a:sym typeface="Arial"/>
       </a:defRPr>
     </a:lvl4pPr>
-    <a:lvl5pPr lvl="4" marR="0" rtl="0" algn="l">
+    <a:lvl5pPr marR="0" lvl="4" algn="l" rtl="0">
       <a:lnSpc>
         <a:spcPct val="100000"/>
       </a:lnSpc>
@@ -599,7 +614,7 @@
         <a:srgbClr val="000000"/>
       </a:buClr>
       <a:buFont typeface="Arial"/>
-      <a:defRPr b="0" i="0" sz="1400" u="none" cap="none" strike="noStrike">
+      <a:defRPr sz="1400" b="0" i="0" u="none" strike="noStrike" cap="none">
         <a:solidFill>
           <a:srgbClr val="000000"/>
         </a:solidFill>
@@ -609,7 +624,7 @@
         <a:sym typeface="Arial"/>
       </a:defRPr>
     </a:lvl5pPr>
-    <a:lvl6pPr lvl="5" marR="0" rtl="0" algn="l">
+    <a:lvl6pPr marR="0" lvl="5" algn="l" rtl="0">
       <a:lnSpc>
         <a:spcPct val="100000"/>
       </a:lnSpc>
@@ -623,7 +638,7 @@
         <a:srgbClr val="000000"/>
       </a:buClr>
       <a:buFont typeface="Arial"/>
-      <a:defRPr b="0" i="0" sz="1400" u="none" cap="none" strike="noStrike">
+      <a:defRPr sz="1400" b="0" i="0" u="none" strike="noStrike" cap="none">
         <a:solidFill>
           <a:srgbClr val="000000"/>
         </a:solidFill>
@@ -633,7 +648,7 @@
         <a:sym typeface="Arial"/>
       </a:defRPr>
     </a:lvl6pPr>
-    <a:lvl7pPr lvl="6" marR="0" rtl="0" algn="l">
+    <a:lvl7pPr marR="0" lvl="6" algn="l" rtl="0">
       <a:lnSpc>
         <a:spcPct val="100000"/>
       </a:lnSpc>
@@ -647,7 +662,7 @@
         <a:srgbClr val="000000"/>
       </a:buClr>
       <a:buFont typeface="Arial"/>
-      <a:defRPr b="0" i="0" sz="1400" u="none" cap="none" strike="noStrike">
+      <a:defRPr sz="1400" b="0" i="0" u="none" strike="noStrike" cap="none">
         <a:solidFill>
           <a:srgbClr val="000000"/>
         </a:solidFill>
@@ -657,7 +672,7 @@
         <a:sym typeface="Arial"/>
       </a:defRPr>
     </a:lvl7pPr>
-    <a:lvl8pPr lvl="7" marR="0" rtl="0" algn="l">
+    <a:lvl8pPr marR="0" lvl="7" algn="l" rtl="0">
       <a:lnSpc>
         <a:spcPct val="100000"/>
       </a:lnSpc>
@@ -671,7 +686,7 @@
         <a:srgbClr val="000000"/>
       </a:buClr>
       <a:buFont typeface="Arial"/>
-      <a:defRPr b="0" i="0" sz="1400" u="none" cap="none" strike="noStrike">
+      <a:defRPr sz="1400" b="0" i="0" u="none" strike="noStrike" cap="none">
         <a:solidFill>
           <a:srgbClr val="000000"/>
         </a:solidFill>
@@ -681,7 +696,7 @@
         <a:sym typeface="Arial"/>
       </a:defRPr>
     </a:lvl8pPr>
-    <a:lvl9pPr lvl="8" marR="0" rtl="0" algn="l">
+    <a:lvl9pPr marR="0" lvl="8" algn="l" rtl="0">
       <a:lnSpc>
         <a:spcPct val="100000"/>
       </a:lnSpc>
@@ -695,7 +710,7 @@
         <a:srgbClr val="000000"/>
       </a:buClr>
       <a:buFont typeface="Arial"/>
-      <a:defRPr b="0" i="0" sz="1400" u="none" cap="none" strike="noStrike">
+      <a:defRPr sz="1400" b="0" i="0" u="none" strike="noStrike" cap="none">
         <a:solidFill>
           <a:srgbClr val="000000"/>
         </a:solidFill>
@@ -710,11 +725,11 @@
 </file>
 
 <file path=ppt/notesSlides/notesSlide1.xml><?xml version="1.0" encoding="utf-8"?>
-<p:notes xmlns:a="http://schemas.openxmlformats.org/drawingml/2006/main" xmlns:r="http://schemas.openxmlformats.org/officeDocument/2006/relationships" xmlns:mc="http://schemas.openxmlformats.org/markup-compatibility/2006" xmlns:mv="urn:schemas-microsoft-com:mac:vml" xmlns:p="http://schemas.openxmlformats.org/presentationml/2006/main" xmlns:c="http://schemas.openxmlformats.org/drawingml/2006/chart" xmlns:dgm="http://schemas.openxmlformats.org/drawingml/2006/diagram" xmlns:o="urn:schemas-microsoft-com:office:office" xmlns:v="urn:schemas-microsoft-com:vml" xmlns:pvml="urn:schemas-microsoft-com:office:powerpoint" xmlns:com="http://schemas.openxmlformats.org/drawingml/2006/compatibility" xmlns:p14="http://schemas.microsoft.com/office/powerpoint/2010/main" xmlns:p15="http://schemas.microsoft.com/office/powerpoint/2012/main" xmlns:ahyp="http://schemas.microsoft.com/office/drawing/2018/hyperlinkcolor" showMasterPhAnim="0" showMasterSp="0">
+<p:notes xmlns:a="http://schemas.openxmlformats.org/drawingml/2006/main" xmlns:r="http://schemas.openxmlformats.org/officeDocument/2006/relationships" xmlns:p="http://schemas.openxmlformats.org/presentationml/2006/main" showMasterSp="0" showMasterPhAnim="0">
   <p:cSld>
     <p:spTree>
       <p:nvGrpSpPr>
-        <p:cNvPr id="60" name="Shape 60"/>
+        <p:cNvPr id="1" name="Shape 60"/>
         <p:cNvGrpSpPr/>
         <p:nvPr/>
       </p:nvGrpSpPr>
@@ -729,9 +744,11 @@
       <p:sp>
         <p:nvSpPr>
           <p:cNvPr id="61" name="Google Shape;61;p:notes"/>
-          <p:cNvSpPr/>
+          <p:cNvSpPr>
+            <a:spLocks noGrp="1" noRot="1" noChangeAspect="1"/>
+          </p:cNvSpPr>
           <p:nvPr>
-            <p:ph idx="2" type="sldImg"/>
+            <p:ph type="sldImg" idx="2"/>
           </p:nvPr>
         </p:nvSpPr>
         <p:spPr>
@@ -740,9 +757,13 @@
             <a:ext cx="6096075" cy="3429000"/>
           </a:xfrm>
           <a:custGeom>
-            <a:rect b="b" l="l" r="r" t="t"/>
+            <a:avLst/>
+            <a:gdLst/>
+            <a:ahLst/>
+            <a:cxnLst/>
+            <a:rect l="l" t="t" r="r" b="b"/>
             <a:pathLst>
-              <a:path extrusionOk="0" h="120000" w="120000">
+              <a:path w="120000" h="120000" extrusionOk="0">
                 <a:moveTo>
                   <a:pt x="0" y="0"/>
                 </a:moveTo>
@@ -764,9 +785,11 @@
       <p:sp>
         <p:nvSpPr>
           <p:cNvPr id="62" name="Google Shape;62;p:notes"/>
-          <p:cNvSpPr txBox="1"/>
+          <p:cNvSpPr txBox="1">
+            <a:spLocks noGrp="1"/>
+          </p:cNvSpPr>
           <p:nvPr>
-            <p:ph idx="1" type="body"/>
+            <p:ph type="body" idx="1"/>
           </p:nvPr>
         </p:nvSpPr>
         <p:spPr>
@@ -779,12 +802,12 @@
           </a:prstGeom>
         </p:spPr>
         <p:txBody>
-          <a:bodyPr anchorCtr="0" anchor="t" bIns="91425" lIns="91425" spcFirstLastPara="1" rIns="91425" wrap="square" tIns="91425">
+          <a:bodyPr spcFirstLastPara="1" wrap="square" lIns="91425" tIns="91425" rIns="91425" bIns="91425" anchor="t" anchorCtr="0">
             <a:noAutofit/>
           </a:bodyPr>
           <a:lstStyle/>
           <a:p>
-            <a:pPr indent="0" lvl="0" marL="0" rtl="0" algn="l">
+            <a:pPr marL="0" lvl="0" indent="0" algn="l" rtl="0">
               <a:spcBef>
                 <a:spcPts val="0"/>
               </a:spcBef>
@@ -793,9 +816,6 @@
               </a:spcAft>
               <a:buNone/>
             </a:pPr>
-            <a:r>
-              <a:t/>
-            </a:r>
             <a:endParaRPr/>
           </a:p>
         </p:txBody>
@@ -809,11 +829,11 @@
 </file>
 
 <file path=ppt/notesSlides/notesSlide2.xml><?xml version="1.0" encoding="utf-8"?>
-<p:notes xmlns:a="http://schemas.openxmlformats.org/drawingml/2006/main" xmlns:r="http://schemas.openxmlformats.org/officeDocument/2006/relationships" xmlns:mc="http://schemas.openxmlformats.org/markup-compatibility/2006" xmlns:mv="urn:schemas-microsoft-com:mac:vml" xmlns:p="http://schemas.openxmlformats.org/presentationml/2006/main" xmlns:c="http://schemas.openxmlformats.org/drawingml/2006/chart" xmlns:dgm="http://schemas.openxmlformats.org/drawingml/2006/diagram" xmlns:o="urn:schemas-microsoft-com:office:office" xmlns:v="urn:schemas-microsoft-com:vml" xmlns:pvml="urn:schemas-microsoft-com:office:powerpoint" xmlns:com="http://schemas.openxmlformats.org/drawingml/2006/compatibility" xmlns:p14="http://schemas.microsoft.com/office/powerpoint/2010/main" xmlns:p15="http://schemas.microsoft.com/office/powerpoint/2012/main" xmlns:ahyp="http://schemas.microsoft.com/office/drawing/2018/hyperlinkcolor" showMasterPhAnim="0" showMasterSp="0">
+<p:notes xmlns:a="http://schemas.openxmlformats.org/drawingml/2006/main" xmlns:r="http://schemas.openxmlformats.org/officeDocument/2006/relationships" xmlns:p="http://schemas.openxmlformats.org/presentationml/2006/main" showMasterSp="0" showMasterPhAnim="0">
   <p:cSld>
     <p:spTree>
       <p:nvGrpSpPr>
-        <p:cNvPr id="66" name="Shape 66"/>
+        <p:cNvPr id="1" name="Shape 66"/>
         <p:cNvGrpSpPr/>
         <p:nvPr/>
       </p:nvGrpSpPr>
@@ -828,9 +848,11 @@
       <p:sp>
         <p:nvSpPr>
           <p:cNvPr id="67" name="Google Shape;67;g3e1cdc3e3b6_1_0:notes"/>
-          <p:cNvSpPr/>
+          <p:cNvSpPr>
+            <a:spLocks noGrp="1" noRot="1" noChangeAspect="1"/>
+          </p:cNvSpPr>
           <p:nvPr>
-            <p:ph idx="2" type="sldImg"/>
+            <p:ph type="sldImg" idx="2"/>
           </p:nvPr>
         </p:nvSpPr>
         <p:spPr>
@@ -839,9 +861,13 @@
             <a:ext cx="6096000" cy="3429000"/>
           </a:xfrm>
           <a:custGeom>
-            <a:rect b="b" l="l" r="r" t="t"/>
+            <a:avLst/>
+            <a:gdLst/>
+            <a:ahLst/>
+            <a:cxnLst/>
+            <a:rect l="l" t="t" r="r" b="b"/>
             <a:pathLst>
-              <a:path extrusionOk="0" h="120000" w="120000">
+              <a:path w="120000" h="120000" extrusionOk="0">
                 <a:moveTo>
                   <a:pt x="0" y="0"/>
                 </a:moveTo>
@@ -863,9 +889,11 @@
       <p:sp>
         <p:nvSpPr>
           <p:cNvPr id="68" name="Google Shape;68;g3e1cdc3e3b6_1_0:notes"/>
-          <p:cNvSpPr txBox="1"/>
+          <p:cNvSpPr txBox="1">
+            <a:spLocks noGrp="1"/>
+          </p:cNvSpPr>
           <p:nvPr>
-            <p:ph idx="1" type="body"/>
+            <p:ph type="body" idx="1"/>
           </p:nvPr>
         </p:nvSpPr>
         <p:spPr>
@@ -878,12 +906,12 @@
           </a:prstGeom>
         </p:spPr>
         <p:txBody>
-          <a:bodyPr anchorCtr="0" anchor="t" bIns="91425" lIns="91425" spcFirstLastPara="1" rIns="91425" wrap="square" tIns="91425">
+          <a:bodyPr spcFirstLastPara="1" wrap="square" lIns="91425" tIns="91425" rIns="91425" bIns="91425" anchor="t" anchorCtr="0">
             <a:noAutofit/>
           </a:bodyPr>
           <a:lstStyle/>
           <a:p>
-            <a:pPr indent="0" lvl="0" marL="0" rtl="0" algn="l">
+            <a:pPr marL="0" lvl="0" indent="0" algn="l" rtl="0">
               <a:spcBef>
                 <a:spcPts val="0"/>
               </a:spcBef>
@@ -892,9 +920,6 @@
               </a:spcAft>
               <a:buNone/>
             </a:pPr>
-            <a:r>
-              <a:t/>
-            </a:r>
             <a:endParaRPr/>
           </a:p>
         </p:txBody>
@@ -908,11 +933,11 @@
 </file>
 
 <file path=ppt/notesSlides/notesSlide3.xml><?xml version="1.0" encoding="utf-8"?>
-<p:notes xmlns:a="http://schemas.openxmlformats.org/drawingml/2006/main" xmlns:r="http://schemas.openxmlformats.org/officeDocument/2006/relationships" xmlns:mc="http://schemas.openxmlformats.org/markup-compatibility/2006" xmlns:mv="urn:schemas-microsoft-com:mac:vml" xmlns:p="http://schemas.openxmlformats.org/presentationml/2006/main" xmlns:c="http://schemas.openxmlformats.org/drawingml/2006/chart" xmlns:dgm="http://schemas.openxmlformats.org/drawingml/2006/diagram" xmlns:o="urn:schemas-microsoft-com:office:office" xmlns:v="urn:schemas-microsoft-com:vml" xmlns:pvml="urn:schemas-microsoft-com:office:powerpoint" xmlns:com="http://schemas.openxmlformats.org/drawingml/2006/compatibility" xmlns:p14="http://schemas.microsoft.com/office/powerpoint/2010/main" xmlns:p15="http://schemas.microsoft.com/office/powerpoint/2012/main" xmlns:ahyp="http://schemas.microsoft.com/office/drawing/2018/hyperlinkcolor" showMasterPhAnim="0" showMasterSp="0">
+<p:notes xmlns:a="http://schemas.openxmlformats.org/drawingml/2006/main" xmlns:r="http://schemas.openxmlformats.org/officeDocument/2006/relationships" xmlns:p="http://schemas.openxmlformats.org/presentationml/2006/main" showMasterSp="0" showMasterPhAnim="0">
   <p:cSld>
     <p:spTree>
       <p:nvGrpSpPr>
-        <p:cNvPr id="72" name="Shape 72"/>
+        <p:cNvPr id="1" name="Shape 72"/>
         <p:cNvGrpSpPr/>
         <p:nvPr/>
       </p:nvGrpSpPr>
@@ -927,9 +952,11 @@
       <p:sp>
         <p:nvSpPr>
           <p:cNvPr id="73" name="Google Shape;73;g3e1cdc3e3b6_1_9:notes"/>
-          <p:cNvSpPr/>
+          <p:cNvSpPr>
+            <a:spLocks noGrp="1" noRot="1" noChangeAspect="1"/>
+          </p:cNvSpPr>
           <p:nvPr>
-            <p:ph idx="2" type="sldImg"/>
+            <p:ph type="sldImg" idx="2"/>
           </p:nvPr>
         </p:nvSpPr>
         <p:spPr>
@@ -938,9 +965,13 @@
             <a:ext cx="6096000" cy="3429000"/>
           </a:xfrm>
           <a:custGeom>
-            <a:rect b="b" l="l" r="r" t="t"/>
+            <a:avLst/>
+            <a:gdLst/>
+            <a:ahLst/>
+            <a:cxnLst/>
+            <a:rect l="l" t="t" r="r" b="b"/>
             <a:pathLst>
-              <a:path extrusionOk="0" h="120000" w="120000">
+              <a:path w="120000" h="120000" extrusionOk="0">
                 <a:moveTo>
                   <a:pt x="0" y="0"/>
                 </a:moveTo>
@@ -962,9 +993,11 @@
       <p:sp>
         <p:nvSpPr>
           <p:cNvPr id="74" name="Google Shape;74;g3e1cdc3e3b6_1_9:notes"/>
-          <p:cNvSpPr txBox="1"/>
+          <p:cNvSpPr txBox="1">
+            <a:spLocks noGrp="1"/>
+          </p:cNvSpPr>
           <p:nvPr>
-            <p:ph idx="1" type="body"/>
+            <p:ph type="body" idx="1"/>
           </p:nvPr>
         </p:nvSpPr>
         <p:spPr>
@@ -977,12 +1010,12 @@
           </a:prstGeom>
         </p:spPr>
         <p:txBody>
-          <a:bodyPr anchorCtr="0" anchor="t" bIns="91425" lIns="91425" spcFirstLastPara="1" rIns="91425" wrap="square" tIns="91425">
+          <a:bodyPr spcFirstLastPara="1" wrap="square" lIns="91425" tIns="91425" rIns="91425" bIns="91425" anchor="t" anchorCtr="0">
             <a:noAutofit/>
           </a:bodyPr>
           <a:lstStyle/>
           <a:p>
-            <a:pPr indent="0" lvl="0" marL="0" rtl="0" algn="l">
+            <a:pPr marL="0" lvl="0" indent="0" algn="l" rtl="0">
               <a:spcBef>
                 <a:spcPts val="0"/>
               </a:spcBef>
@@ -991,9 +1024,6 @@
               </a:spcAft>
               <a:buNone/>
             </a:pPr>
-            <a:r>
-              <a:t/>
-            </a:r>
             <a:endParaRPr/>
           </a:p>
         </p:txBody>
@@ -1007,11 +1037,11 @@
 </file>
 
 <file path=ppt/notesSlides/notesSlide4.xml><?xml version="1.0" encoding="utf-8"?>
-<p:notes xmlns:a="http://schemas.openxmlformats.org/drawingml/2006/main" xmlns:r="http://schemas.openxmlformats.org/officeDocument/2006/relationships" xmlns:mc="http://schemas.openxmlformats.org/markup-compatibility/2006" xmlns:mv="urn:schemas-microsoft-com:mac:vml" xmlns:p="http://schemas.openxmlformats.org/presentationml/2006/main" xmlns:c="http://schemas.openxmlformats.org/drawingml/2006/chart" xmlns:dgm="http://schemas.openxmlformats.org/drawingml/2006/diagram" xmlns:o="urn:schemas-microsoft-com:office:office" xmlns:v="urn:schemas-microsoft-com:vml" xmlns:pvml="urn:schemas-microsoft-com:office:powerpoint" xmlns:com="http://schemas.openxmlformats.org/drawingml/2006/compatibility" xmlns:p14="http://schemas.microsoft.com/office/powerpoint/2010/main" xmlns:p15="http://schemas.microsoft.com/office/powerpoint/2012/main" xmlns:ahyp="http://schemas.microsoft.com/office/drawing/2018/hyperlinkcolor" showMasterPhAnim="0" showMasterSp="0">
+<p:notes xmlns:a="http://schemas.openxmlformats.org/drawingml/2006/main" xmlns:r="http://schemas.openxmlformats.org/officeDocument/2006/relationships" xmlns:p="http://schemas.openxmlformats.org/presentationml/2006/main" showMasterSp="0" showMasterPhAnim="0">
   <p:cSld>
     <p:spTree>
       <p:nvGrpSpPr>
-        <p:cNvPr id="78" name="Shape 78"/>
+        <p:cNvPr id="1" name="Shape 78"/>
         <p:cNvGrpSpPr/>
         <p:nvPr/>
       </p:nvGrpSpPr>
@@ -1026,9 +1056,11 @@
       <p:sp>
         <p:nvSpPr>
           <p:cNvPr id="79" name="Google Shape;79;g3e1cdc3e3b6_1_41:notes"/>
-          <p:cNvSpPr/>
+          <p:cNvSpPr>
+            <a:spLocks noGrp="1" noRot="1" noChangeAspect="1"/>
+          </p:cNvSpPr>
           <p:nvPr>
-            <p:ph idx="2" type="sldImg"/>
+            <p:ph type="sldImg" idx="2"/>
           </p:nvPr>
         </p:nvSpPr>
         <p:spPr>
@@ -1037,9 +1069,13 @@
             <a:ext cx="6096000" cy="3429000"/>
           </a:xfrm>
           <a:custGeom>
-            <a:rect b="b" l="l" r="r" t="t"/>
+            <a:avLst/>
+            <a:gdLst/>
+            <a:ahLst/>
+            <a:cxnLst/>
+            <a:rect l="l" t="t" r="r" b="b"/>
             <a:pathLst>
-              <a:path extrusionOk="0" h="120000" w="120000">
+              <a:path w="120000" h="120000" extrusionOk="0">
                 <a:moveTo>
                   <a:pt x="0" y="0"/>
                 </a:moveTo>
@@ -1061,9 +1097,11 @@
       <p:sp>
         <p:nvSpPr>
           <p:cNvPr id="80" name="Google Shape;80;g3e1cdc3e3b6_1_41:notes"/>
-          <p:cNvSpPr txBox="1"/>
+          <p:cNvSpPr txBox="1">
+            <a:spLocks noGrp="1"/>
+          </p:cNvSpPr>
           <p:nvPr>
-            <p:ph idx="1" type="body"/>
+            <p:ph type="body" idx="1"/>
           </p:nvPr>
         </p:nvSpPr>
         <p:spPr>
@@ -1076,12 +1114,12 @@
           </a:prstGeom>
         </p:spPr>
         <p:txBody>
-          <a:bodyPr anchorCtr="0" anchor="t" bIns="91425" lIns="91425" spcFirstLastPara="1" rIns="91425" wrap="square" tIns="91425">
+          <a:bodyPr spcFirstLastPara="1" wrap="square" lIns="91425" tIns="91425" rIns="91425" bIns="91425" anchor="t" anchorCtr="0">
             <a:noAutofit/>
           </a:bodyPr>
           <a:lstStyle/>
           <a:p>
-            <a:pPr indent="0" lvl="0" marL="0" rtl="0" algn="l">
+            <a:pPr marL="0" lvl="0" indent="0" algn="l" rtl="0">
               <a:spcBef>
                 <a:spcPts val="0"/>
               </a:spcBef>
@@ -1090,9 +1128,6 @@
               </a:spcAft>
               <a:buNone/>
             </a:pPr>
-            <a:r>
-              <a:t/>
-            </a:r>
             <a:endParaRPr/>
           </a:p>
         </p:txBody>
@@ -1106,11 +1141,11 @@
 </file>
 
 <file path=ppt/notesSlides/notesSlide5.xml><?xml version="1.0" encoding="utf-8"?>
-<p:notes xmlns:a="http://schemas.openxmlformats.org/drawingml/2006/main" xmlns:r="http://schemas.openxmlformats.org/officeDocument/2006/relationships" xmlns:mc="http://schemas.openxmlformats.org/markup-compatibility/2006" xmlns:mv="urn:schemas-microsoft-com:mac:vml" xmlns:p="http://schemas.openxmlformats.org/presentationml/2006/main" xmlns:c="http://schemas.openxmlformats.org/drawingml/2006/chart" xmlns:dgm="http://schemas.openxmlformats.org/drawingml/2006/diagram" xmlns:o="urn:schemas-microsoft-com:office:office" xmlns:v="urn:schemas-microsoft-com:vml" xmlns:pvml="urn:schemas-microsoft-com:office:powerpoint" xmlns:com="http://schemas.openxmlformats.org/drawingml/2006/compatibility" xmlns:p14="http://schemas.microsoft.com/office/powerpoint/2010/main" xmlns:p15="http://schemas.microsoft.com/office/powerpoint/2012/main" xmlns:ahyp="http://schemas.microsoft.com/office/drawing/2018/hyperlinkcolor" showMasterPhAnim="0" showMasterSp="0">
+<p:notes xmlns:a="http://schemas.openxmlformats.org/drawingml/2006/main" xmlns:r="http://schemas.openxmlformats.org/officeDocument/2006/relationships" xmlns:p="http://schemas.openxmlformats.org/presentationml/2006/main" showMasterSp="0" showMasterPhAnim="0">
   <p:cSld>
     <p:spTree>
       <p:nvGrpSpPr>
-        <p:cNvPr id="84" name="Shape 84"/>
+        <p:cNvPr id="1" name="Shape 84"/>
         <p:cNvGrpSpPr/>
         <p:nvPr/>
       </p:nvGrpSpPr>
@@ -1125,9 +1160,11 @@
       <p:sp>
         <p:nvSpPr>
           <p:cNvPr id="85" name="Google Shape;85;g3e1cdc3e3b6_1_27:notes"/>
-          <p:cNvSpPr/>
+          <p:cNvSpPr>
+            <a:spLocks noGrp="1" noRot="1" noChangeAspect="1"/>
+          </p:cNvSpPr>
           <p:nvPr>
-            <p:ph idx="2" type="sldImg"/>
+            <p:ph type="sldImg" idx="2"/>
           </p:nvPr>
         </p:nvSpPr>
         <p:spPr>
@@ -1136,9 +1173,13 @@
             <a:ext cx="6096000" cy="3429000"/>
           </a:xfrm>
           <a:custGeom>
-            <a:rect b="b" l="l" r="r" t="t"/>
+            <a:avLst/>
+            <a:gdLst/>
+            <a:ahLst/>
+            <a:cxnLst/>
+            <a:rect l="l" t="t" r="r" b="b"/>
             <a:pathLst>
-              <a:path extrusionOk="0" h="120000" w="120000">
+              <a:path w="120000" h="120000" extrusionOk="0">
                 <a:moveTo>
                   <a:pt x="0" y="0"/>
                 </a:moveTo>
@@ -1160,9 +1201,11 @@
       <p:sp>
         <p:nvSpPr>
           <p:cNvPr id="86" name="Google Shape;86;g3e1cdc3e3b6_1_27:notes"/>
-          <p:cNvSpPr txBox="1"/>
+          <p:cNvSpPr txBox="1">
+            <a:spLocks noGrp="1"/>
+          </p:cNvSpPr>
           <p:nvPr>
-            <p:ph idx="1" type="body"/>
+            <p:ph type="body" idx="1"/>
           </p:nvPr>
         </p:nvSpPr>
         <p:spPr>
@@ -1175,12 +1218,12 @@
           </a:prstGeom>
         </p:spPr>
         <p:txBody>
-          <a:bodyPr anchorCtr="0" anchor="t" bIns="91425" lIns="91425" spcFirstLastPara="1" rIns="91425" wrap="square" tIns="91425">
+          <a:bodyPr spcFirstLastPara="1" wrap="square" lIns="91425" tIns="91425" rIns="91425" bIns="91425" anchor="t" anchorCtr="0">
             <a:noAutofit/>
           </a:bodyPr>
           <a:lstStyle/>
           <a:p>
-            <a:pPr indent="0" lvl="0" marL="0" rtl="0" algn="l">
+            <a:pPr marL="0" lvl="0" indent="0" algn="l" rtl="0">
               <a:spcBef>
                 <a:spcPts val="0"/>
               </a:spcBef>
@@ -1189,9 +1232,6 @@
               </a:spcAft>
               <a:buNone/>
             </a:pPr>
-            <a:r>
-              <a:t/>
-            </a:r>
             <a:endParaRPr/>
           </a:p>
         </p:txBody>
@@ -1205,11 +1245,11 @@
 </file>
 
 <file path=ppt/notesSlides/notesSlide6.xml><?xml version="1.0" encoding="utf-8"?>
-<p:notes xmlns:a="http://schemas.openxmlformats.org/drawingml/2006/main" xmlns:r="http://schemas.openxmlformats.org/officeDocument/2006/relationships" xmlns:mc="http://schemas.openxmlformats.org/markup-compatibility/2006" xmlns:mv="urn:schemas-microsoft-com:mac:vml" xmlns:p="http://schemas.openxmlformats.org/presentationml/2006/main" xmlns:c="http://schemas.openxmlformats.org/drawingml/2006/chart" xmlns:dgm="http://schemas.openxmlformats.org/drawingml/2006/diagram" xmlns:o="urn:schemas-microsoft-com:office:office" xmlns:v="urn:schemas-microsoft-com:vml" xmlns:pvml="urn:schemas-microsoft-com:office:powerpoint" xmlns:com="http://schemas.openxmlformats.org/drawingml/2006/compatibility" xmlns:p14="http://schemas.microsoft.com/office/powerpoint/2010/main" xmlns:p15="http://schemas.microsoft.com/office/powerpoint/2012/main" xmlns:ahyp="http://schemas.microsoft.com/office/drawing/2018/hyperlinkcolor" showMasterPhAnim="0" showMasterSp="0">
+<p:notes xmlns:a="http://schemas.openxmlformats.org/drawingml/2006/main" xmlns:r="http://schemas.openxmlformats.org/officeDocument/2006/relationships" xmlns:p="http://schemas.openxmlformats.org/presentationml/2006/main" showMasterSp="0" showMasterPhAnim="0">
   <p:cSld>
     <p:spTree>
       <p:nvGrpSpPr>
-        <p:cNvPr id="91" name="Shape 91"/>
+        <p:cNvPr id="1" name="Shape 91"/>
         <p:cNvGrpSpPr/>
         <p:nvPr/>
       </p:nvGrpSpPr>
@@ -1224,9 +1264,11 @@
       <p:sp>
         <p:nvSpPr>
           <p:cNvPr id="92" name="Google Shape;92;g3e1cdc3e3b6_1_48:notes"/>
-          <p:cNvSpPr/>
+          <p:cNvSpPr>
+            <a:spLocks noGrp="1" noRot="1" noChangeAspect="1"/>
+          </p:cNvSpPr>
           <p:nvPr>
-            <p:ph idx="2" type="sldImg"/>
+            <p:ph type="sldImg" idx="2"/>
           </p:nvPr>
         </p:nvSpPr>
         <p:spPr>
@@ -1235,9 +1277,13 @@
             <a:ext cx="6096000" cy="3429000"/>
           </a:xfrm>
           <a:custGeom>
-            <a:rect b="b" l="l" r="r" t="t"/>
+            <a:avLst/>
+            <a:gdLst/>
+            <a:ahLst/>
+            <a:cxnLst/>
+            <a:rect l="l" t="t" r="r" b="b"/>
             <a:pathLst>
-              <a:path extrusionOk="0" h="120000" w="120000">
+              <a:path w="120000" h="120000" extrusionOk="0">
                 <a:moveTo>
                   <a:pt x="0" y="0"/>
                 </a:moveTo>
@@ -1259,9 +1305,11 @@
       <p:sp>
         <p:nvSpPr>
           <p:cNvPr id="93" name="Google Shape;93;g3e1cdc3e3b6_1_48:notes"/>
-          <p:cNvSpPr txBox="1"/>
+          <p:cNvSpPr txBox="1">
+            <a:spLocks noGrp="1"/>
+          </p:cNvSpPr>
           <p:nvPr>
-            <p:ph idx="1" type="body"/>
+            <p:ph type="body" idx="1"/>
           </p:nvPr>
         </p:nvSpPr>
         <p:spPr>
@@ -1274,12 +1322,12 @@
           </a:prstGeom>
         </p:spPr>
         <p:txBody>
-          <a:bodyPr anchorCtr="0" anchor="t" bIns="91425" lIns="91425" spcFirstLastPara="1" rIns="91425" wrap="square" tIns="91425">
+          <a:bodyPr spcFirstLastPara="1" wrap="square" lIns="91425" tIns="91425" rIns="91425" bIns="91425" anchor="t" anchorCtr="0">
             <a:noAutofit/>
           </a:bodyPr>
           <a:lstStyle/>
           <a:p>
-            <a:pPr indent="0" lvl="0" marL="0" rtl="0" algn="l">
+            <a:pPr marL="0" lvl="0" indent="0" algn="l" rtl="0">
               <a:spcBef>
                 <a:spcPts val="0"/>
               </a:spcBef>
@@ -1288,9 +1336,6 @@
               </a:spcAft>
               <a:buNone/>
             </a:pPr>
-            <a:r>
-              <a:t/>
-            </a:r>
             <a:endParaRPr/>
           </a:p>
         </p:txBody>
@@ -1304,11 +1349,11 @@
 </file>
 
 <file path=ppt/notesSlides/notesSlide7.xml><?xml version="1.0" encoding="utf-8"?>
-<p:notes xmlns:a="http://schemas.openxmlformats.org/drawingml/2006/main" xmlns:r="http://schemas.openxmlformats.org/officeDocument/2006/relationships" xmlns:mc="http://schemas.openxmlformats.org/markup-compatibility/2006" xmlns:mv="urn:schemas-microsoft-com:mac:vml" xmlns:p="http://schemas.openxmlformats.org/presentationml/2006/main" xmlns:c="http://schemas.openxmlformats.org/drawingml/2006/chart" xmlns:dgm="http://schemas.openxmlformats.org/drawingml/2006/diagram" xmlns:o="urn:schemas-microsoft-com:office:office" xmlns:v="urn:schemas-microsoft-com:vml" xmlns:pvml="urn:schemas-microsoft-com:office:powerpoint" xmlns:com="http://schemas.openxmlformats.org/drawingml/2006/compatibility" xmlns:p14="http://schemas.microsoft.com/office/powerpoint/2010/main" xmlns:p15="http://schemas.microsoft.com/office/powerpoint/2012/main" xmlns:ahyp="http://schemas.microsoft.com/office/drawing/2018/hyperlinkcolor" showMasterPhAnim="0" showMasterSp="0">
+<p:notes xmlns:a="http://schemas.openxmlformats.org/drawingml/2006/main" xmlns:r="http://schemas.openxmlformats.org/officeDocument/2006/relationships" xmlns:p="http://schemas.openxmlformats.org/presentationml/2006/main" showMasterSp="0" showMasterPhAnim="0">
   <p:cSld>
     <p:spTree>
       <p:nvGrpSpPr>
-        <p:cNvPr id="98" name="Shape 98"/>
+        <p:cNvPr id="1" name="Shape 98"/>
         <p:cNvGrpSpPr/>
         <p:nvPr/>
       </p:nvGrpSpPr>
@@ -1323,9 +1368,11 @@
       <p:sp>
         <p:nvSpPr>
           <p:cNvPr id="99" name="Google Shape;99;g3e1cdc3e3b6_1_60:notes"/>
-          <p:cNvSpPr/>
+          <p:cNvSpPr>
+            <a:spLocks noGrp="1" noRot="1" noChangeAspect="1"/>
+          </p:cNvSpPr>
           <p:nvPr>
-            <p:ph idx="2" type="sldImg"/>
+            <p:ph type="sldImg" idx="2"/>
           </p:nvPr>
         </p:nvSpPr>
         <p:spPr>
@@ -1334,9 +1381,13 @@
             <a:ext cx="6096000" cy="3429000"/>
           </a:xfrm>
           <a:custGeom>
-            <a:rect b="b" l="l" r="r" t="t"/>
+            <a:avLst/>
+            <a:gdLst/>
+            <a:ahLst/>
+            <a:cxnLst/>
+            <a:rect l="l" t="t" r="r" b="b"/>
             <a:pathLst>
-              <a:path extrusionOk="0" h="120000" w="120000">
+              <a:path w="120000" h="120000" extrusionOk="0">
                 <a:moveTo>
                   <a:pt x="0" y="0"/>
                 </a:moveTo>
@@ -1358,9 +1409,11 @@
       <p:sp>
         <p:nvSpPr>
           <p:cNvPr id="100" name="Google Shape;100;g3e1cdc3e3b6_1_60:notes"/>
-          <p:cNvSpPr txBox="1"/>
+          <p:cNvSpPr txBox="1">
+            <a:spLocks noGrp="1"/>
+          </p:cNvSpPr>
           <p:nvPr>
-            <p:ph idx="1" type="body"/>
+            <p:ph type="body" idx="1"/>
           </p:nvPr>
         </p:nvSpPr>
         <p:spPr>
@@ -1373,12 +1426,12 @@
           </a:prstGeom>
         </p:spPr>
         <p:txBody>
-          <a:bodyPr anchorCtr="0" anchor="t" bIns="91425" lIns="91425" spcFirstLastPara="1" rIns="91425" wrap="square" tIns="91425">
+          <a:bodyPr spcFirstLastPara="1" wrap="square" lIns="91425" tIns="91425" rIns="91425" bIns="91425" anchor="t" anchorCtr="0">
             <a:noAutofit/>
           </a:bodyPr>
           <a:lstStyle/>
           <a:p>
-            <a:pPr indent="0" lvl="0" marL="0" rtl="0" algn="l">
+            <a:pPr marL="0" lvl="0" indent="0" algn="l" rtl="0">
               <a:spcBef>
                 <a:spcPts val="0"/>
               </a:spcBef>
@@ -1387,9 +1440,6 @@
               </a:spcAft>
               <a:buNone/>
             </a:pPr>
-            <a:r>
-              <a:t/>
-            </a:r>
             <a:endParaRPr/>
           </a:p>
         </p:txBody>
@@ -1403,11 +1453,11 @@
 </file>
 
 <file path=ppt/notesSlides/notesSlide8.xml><?xml version="1.0" encoding="utf-8"?>
-<p:notes xmlns:a="http://schemas.openxmlformats.org/drawingml/2006/main" xmlns:r="http://schemas.openxmlformats.org/officeDocument/2006/relationships" xmlns:mc="http://schemas.openxmlformats.org/markup-compatibility/2006" xmlns:mv="urn:schemas-microsoft-com:mac:vml" xmlns:p="http://schemas.openxmlformats.org/presentationml/2006/main" xmlns:c="http://schemas.openxmlformats.org/drawingml/2006/chart" xmlns:dgm="http://schemas.openxmlformats.org/drawingml/2006/diagram" xmlns:o="urn:schemas-microsoft-com:office:office" xmlns:v="urn:schemas-microsoft-com:vml" xmlns:pvml="urn:schemas-microsoft-com:office:powerpoint" xmlns:com="http://schemas.openxmlformats.org/drawingml/2006/compatibility" xmlns:p14="http://schemas.microsoft.com/office/powerpoint/2010/main" xmlns:p15="http://schemas.microsoft.com/office/powerpoint/2012/main" xmlns:ahyp="http://schemas.microsoft.com/office/drawing/2018/hyperlinkcolor" showMasterPhAnim="0" showMasterSp="0">
+<p:notes xmlns:a="http://schemas.openxmlformats.org/drawingml/2006/main" xmlns:r="http://schemas.openxmlformats.org/officeDocument/2006/relationships" xmlns:p="http://schemas.openxmlformats.org/presentationml/2006/main" showMasterSp="0" showMasterPhAnim="0">
   <p:cSld>
     <p:spTree>
       <p:nvGrpSpPr>
-        <p:cNvPr id="104" name="Shape 104"/>
+        <p:cNvPr id="1" name="Shape 104"/>
         <p:cNvGrpSpPr/>
         <p:nvPr/>
       </p:nvGrpSpPr>
@@ -1422,20 +1472,26 @@
       <p:sp>
         <p:nvSpPr>
           <p:cNvPr id="105" name="Google Shape;105;g3e1cdc3e3b6_1_70:notes"/>
-          <p:cNvSpPr/>
+          <p:cNvSpPr>
+            <a:spLocks noGrp="1" noRot="1" noChangeAspect="1"/>
+          </p:cNvSpPr>
           <p:nvPr>
-            <p:ph idx="2" type="sldImg"/>
+            <p:ph type="sldImg" idx="2"/>
           </p:nvPr>
         </p:nvSpPr>
         <p:spPr>
           <a:xfrm>
-            <a:off x="381300" y="685800"/>
+            <a:off x="381000" y="685800"/>
             <a:ext cx="6096000" cy="3429000"/>
           </a:xfrm>
           <a:custGeom>
-            <a:rect b="b" l="l" r="r" t="t"/>
+            <a:avLst/>
+            <a:gdLst/>
+            <a:ahLst/>
+            <a:cxnLst/>
+            <a:rect l="l" t="t" r="r" b="b"/>
             <a:pathLst>
-              <a:path extrusionOk="0" h="120000" w="120000">
+              <a:path w="120000" h="120000" extrusionOk="0">
                 <a:moveTo>
                   <a:pt x="0" y="0"/>
                 </a:moveTo>
@@ -1457,9 +1513,11 @@
       <p:sp>
         <p:nvSpPr>
           <p:cNvPr id="106" name="Google Shape;106;g3e1cdc3e3b6_1_70:notes"/>
-          <p:cNvSpPr txBox="1"/>
+          <p:cNvSpPr txBox="1">
+            <a:spLocks noGrp="1"/>
+          </p:cNvSpPr>
           <p:nvPr>
-            <p:ph idx="1" type="body"/>
+            <p:ph type="body" idx="1"/>
           </p:nvPr>
         </p:nvSpPr>
         <p:spPr>
@@ -1472,12 +1530,12 @@
           </a:prstGeom>
         </p:spPr>
         <p:txBody>
-          <a:bodyPr anchorCtr="0" anchor="t" bIns="91425" lIns="91425" spcFirstLastPara="1" rIns="91425" wrap="square" tIns="91425">
+          <a:bodyPr spcFirstLastPara="1" wrap="square" lIns="91425" tIns="91425" rIns="91425" bIns="91425" anchor="t" anchorCtr="0">
             <a:noAutofit/>
           </a:bodyPr>
           <a:lstStyle/>
           <a:p>
-            <a:pPr indent="0" lvl="0" marL="0" rtl="0" algn="l">
+            <a:pPr marL="0" lvl="0" indent="0" algn="l" rtl="0">
               <a:spcBef>
                 <a:spcPts val="0"/>
               </a:spcBef>
@@ -1486,9 +1544,6 @@
               </a:spcAft>
               <a:buNone/>
             </a:pPr>
-            <a:r>
-              <a:t/>
-            </a:r>
             <a:endParaRPr/>
           </a:p>
         </p:txBody>
@@ -1502,18 +1557,19 @@
 </file>
 
 <file path=ppt/slideLayouts/slideLayout1.xml><?xml version="1.0" encoding="utf-8"?>
-<p:sldLayout xmlns:a="http://schemas.openxmlformats.org/drawingml/2006/main" xmlns:r="http://schemas.openxmlformats.org/officeDocument/2006/relationships" xmlns:mc="http://schemas.openxmlformats.org/markup-compatibility/2006" xmlns:mv="urn:schemas-microsoft-com:mac:vml" xmlns:p="http://schemas.openxmlformats.org/presentationml/2006/main" xmlns:c="http://schemas.openxmlformats.org/drawingml/2006/chart" xmlns:dgm="http://schemas.openxmlformats.org/drawingml/2006/diagram" xmlns:o="urn:schemas-microsoft-com:office:office" xmlns:v="urn:schemas-microsoft-com:vml" xmlns:pvml="urn:schemas-microsoft-com:office:powerpoint" xmlns:com="http://schemas.openxmlformats.org/drawingml/2006/compatibility" xmlns:p14="http://schemas.microsoft.com/office/powerpoint/2010/main" xmlns:p15="http://schemas.microsoft.com/office/powerpoint/2012/main" xmlns:ahyp="http://schemas.microsoft.com/office/drawing/2018/hyperlinkcolor" matchingName="Title slide" type="title">
+<p:sldLayout xmlns:a="http://schemas.openxmlformats.org/drawingml/2006/main" xmlns:r="http://schemas.openxmlformats.org/officeDocument/2006/relationships" xmlns:p="http://schemas.openxmlformats.org/presentationml/2006/main" matchingName="Title slide" type="title">
   <p:cSld name="TITLE">
     <p:bg>
       <p:bgPr>
         <a:solidFill>
           <a:schemeClr val="dk1"/>
         </a:solidFill>
+        <a:effectLst/>
       </p:bgPr>
     </p:bg>
     <p:spTree>
       <p:nvGrpSpPr>
-        <p:cNvPr id="9" name="Shape 9"/>
+        <p:cNvPr id="1" name="Shape 9"/>
         <p:cNvGrpSpPr/>
         <p:nvPr/>
       </p:nvGrpSpPr>
@@ -1537,9 +1593,13 @@
             <a:ext cx="9144250" cy="4398100"/>
           </a:xfrm>
           <a:custGeom>
-            <a:rect b="b" l="l" r="r" t="t"/>
+            <a:avLst/>
+            <a:gdLst/>
+            <a:ahLst/>
+            <a:cxnLst/>
+            <a:rect l="l" t="t" r="r" b="b"/>
             <a:pathLst>
-              <a:path extrusionOk="0" h="175924" w="365770">
+              <a:path w="365770" h="175924" extrusionOk="0">
                 <a:moveTo>
                   <a:pt x="0" y="0"/>
                 </a:moveTo>
@@ -1567,7 +1627,9 @@
       <p:sp>
         <p:nvSpPr>
           <p:cNvPr id="11" name="Google Shape;11;p2"/>
-          <p:cNvSpPr txBox="1"/>
+          <p:cNvSpPr txBox="1">
+            <a:spLocks noGrp="1"/>
+          </p:cNvSpPr>
           <p:nvPr>
             <p:ph type="ctrTitle"/>
           </p:nvPr>
@@ -1582,7 +1644,7 @@
           </a:prstGeom>
         </p:spPr>
         <p:txBody>
-          <a:bodyPr anchorCtr="0" anchor="t" bIns="91425" lIns="91425" spcFirstLastPara="1" rIns="91425" wrap="square" tIns="91425">
+          <a:bodyPr spcFirstLastPara="1" wrap="square" lIns="91425" tIns="91425" rIns="91425" bIns="91425" anchor="t" anchorCtr="0">
             <a:normAutofit/>
           </a:bodyPr>
           <a:lstStyle>
@@ -1686,15 +1748,19 @@
               <a:defRPr sz="3600"/>
             </a:lvl9pPr>
           </a:lstStyle>
-          <a:p/>
+          <a:p>
+            <a:endParaRPr/>
+          </a:p>
         </p:txBody>
       </p:sp>
       <p:sp>
         <p:nvSpPr>
           <p:cNvPr id="12" name="Google Shape;12;p2"/>
-          <p:cNvSpPr txBox="1"/>
+          <p:cNvSpPr txBox="1">
+            <a:spLocks noGrp="1"/>
+          </p:cNvSpPr>
           <p:nvPr>
-            <p:ph idx="1" type="subTitle"/>
+            <p:ph type="subTitle" idx="1"/>
           </p:nvPr>
         </p:nvSpPr>
         <p:spPr>
@@ -1707,7 +1773,7 @@
           </a:prstGeom>
         </p:spPr>
         <p:txBody>
-          <a:bodyPr anchorCtr="0" anchor="t" bIns="91425" lIns="91425" spcFirstLastPara="1" rIns="91425" wrap="square" tIns="91425">
+          <a:bodyPr spcFirstLastPara="1" wrap="square" lIns="91425" tIns="91425" rIns="91425" bIns="91425" anchor="t" anchorCtr="0">
             <a:normAutofit/>
           </a:bodyPr>
           <a:lstStyle>
@@ -1901,15 +1967,19 @@
               </a:defRPr>
             </a:lvl9pPr>
           </a:lstStyle>
-          <a:p/>
+          <a:p>
+            <a:endParaRPr/>
+          </a:p>
         </p:txBody>
       </p:sp>
       <p:sp>
         <p:nvSpPr>
           <p:cNvPr id="13" name="Google Shape;13;p2"/>
-          <p:cNvSpPr txBox="1"/>
+          <p:cNvSpPr txBox="1">
+            <a:spLocks noGrp="1"/>
+          </p:cNvSpPr>
           <p:nvPr>
-            <p:ph idx="12" type="sldNum"/>
+            <p:ph type="sldNum" idx="12"/>
           </p:nvPr>
         </p:nvSpPr>
         <p:spPr>
@@ -1922,7 +1992,7 @@
           </a:prstGeom>
         </p:spPr>
         <p:txBody>
-          <a:bodyPr anchorCtr="0" anchor="ctr" bIns="91425" lIns="91425" spcFirstLastPara="1" rIns="91425" wrap="square" tIns="91425">
+          <a:bodyPr spcFirstLastPara="1" wrap="square" lIns="91425" tIns="91425" rIns="91425" bIns="91425" anchor="ctr" anchorCtr="0">
             <a:normAutofit/>
           </a:bodyPr>
           <a:lstStyle>
@@ -2000,7 +2070,7 @@
             </a:lvl9pPr>
           </a:lstStyle>
           <a:p>
-            <a:pPr indent="0" lvl="0" marL="0" rtl="0" algn="r">
+            <a:pPr marL="0" lvl="0" indent="0" algn="r" rtl="0">
               <a:spcBef>
                 <a:spcPts val="0"/>
               </a:spcBef>
@@ -2026,18 +2096,19 @@
 </file>
 
 <file path=ppt/slideLayouts/slideLayout10.xml><?xml version="1.0" encoding="utf-8"?>
-<p:sldLayout xmlns:a="http://schemas.openxmlformats.org/drawingml/2006/main" xmlns:r="http://schemas.openxmlformats.org/officeDocument/2006/relationships" xmlns:mc="http://schemas.openxmlformats.org/markup-compatibility/2006" xmlns:mv="urn:schemas-microsoft-com:mac:vml" xmlns:p="http://schemas.openxmlformats.org/presentationml/2006/main" xmlns:c="http://schemas.openxmlformats.org/drawingml/2006/chart" xmlns:dgm="http://schemas.openxmlformats.org/drawingml/2006/diagram" xmlns:o="urn:schemas-microsoft-com:office:office" xmlns:v="urn:schemas-microsoft-com:vml" xmlns:pvml="urn:schemas-microsoft-com:office:powerpoint" xmlns:com="http://schemas.openxmlformats.org/drawingml/2006/compatibility" xmlns:p14="http://schemas.microsoft.com/office/powerpoint/2010/main" xmlns:p15="http://schemas.microsoft.com/office/powerpoint/2012/main" xmlns:ahyp="http://schemas.microsoft.com/office/drawing/2018/hyperlinkcolor" matchingName="Big number">
+<p:sldLayout xmlns:a="http://schemas.openxmlformats.org/drawingml/2006/main" xmlns:r="http://schemas.openxmlformats.org/officeDocument/2006/relationships" xmlns:p="http://schemas.openxmlformats.org/presentationml/2006/main" matchingName="Big number">
   <p:cSld name="BIG_NUMBER">
     <p:bg>
       <p:bgPr>
         <a:solidFill>
           <a:schemeClr val="dk1"/>
         </a:solidFill>
+        <a:effectLst/>
       </p:bgPr>
     </p:bg>
     <p:spTree>
       <p:nvGrpSpPr>
-        <p:cNvPr id="54" name="Shape 54"/>
+        <p:cNvPr id="1" name="Shape 54"/>
         <p:cNvGrpSpPr/>
         <p:nvPr/>
       </p:nvGrpSpPr>
@@ -2052,9 +2123,11 @@
       <p:sp>
         <p:nvSpPr>
           <p:cNvPr id="55" name="Google Shape;55;p11"/>
-          <p:cNvSpPr txBox="1"/>
+          <p:cNvSpPr txBox="1">
+            <a:spLocks noGrp="1"/>
+          </p:cNvSpPr>
           <p:nvPr>
-            <p:ph hasCustomPrompt="1" type="title"/>
+            <p:ph type="title" hasCustomPrompt="1"/>
           </p:nvPr>
         </p:nvSpPr>
         <p:spPr>
@@ -2067,7 +2140,7 @@
           </a:prstGeom>
         </p:spPr>
         <p:txBody>
-          <a:bodyPr anchorCtr="0" anchor="b" bIns="91425" lIns="91425" spcFirstLastPara="1" rIns="91425" wrap="square" tIns="91425">
+          <a:bodyPr spcFirstLastPara="1" wrap="square" lIns="91425" tIns="91425" rIns="91425" bIns="91425" anchor="b" anchorCtr="0">
             <a:normAutofit/>
           </a:bodyPr>
           <a:lstStyle>
@@ -2244,9 +2317,11 @@
       <p:sp>
         <p:nvSpPr>
           <p:cNvPr id="56" name="Google Shape;56;p11"/>
-          <p:cNvSpPr txBox="1"/>
+          <p:cNvSpPr txBox="1">
+            <a:spLocks noGrp="1"/>
+          </p:cNvSpPr>
           <p:nvPr>
-            <p:ph idx="1" type="body"/>
+            <p:ph type="body" idx="1"/>
           </p:nvPr>
         </p:nvSpPr>
         <p:spPr>
@@ -2259,11 +2334,11 @@
           </a:prstGeom>
         </p:spPr>
         <p:txBody>
-          <a:bodyPr anchorCtr="0" anchor="t" bIns="91425" lIns="91425" spcFirstLastPara="1" rIns="91425" wrap="square" tIns="91425">
+          <a:bodyPr spcFirstLastPara="1" wrap="square" lIns="91425" tIns="91425" rIns="91425" bIns="91425" anchor="t" anchorCtr="0">
             <a:normAutofit/>
           </a:bodyPr>
           <a:lstStyle>
-            <a:lvl1pPr indent="-311150" lvl="0" marL="457200">
+            <a:lvl1pPr marL="457200" lvl="0" indent="-311150">
               <a:spcBef>
                 <a:spcPts val="0"/>
               </a:spcBef>
@@ -2281,7 +2356,7 @@
                 </a:solidFill>
               </a:defRPr>
             </a:lvl1pPr>
-            <a:lvl2pPr indent="-298450" lvl="1" marL="914400">
+            <a:lvl2pPr marL="914400" lvl="1" indent="-298450">
               <a:spcBef>
                 <a:spcPts val="0"/>
               </a:spcBef>
@@ -2299,7 +2374,7 @@
                 </a:solidFill>
               </a:defRPr>
             </a:lvl2pPr>
-            <a:lvl3pPr indent="-298450" lvl="2" marL="1371600">
+            <a:lvl3pPr marL="1371600" lvl="2" indent="-298450">
               <a:spcBef>
                 <a:spcPts val="0"/>
               </a:spcBef>
@@ -2317,7 +2392,7 @@
                 </a:solidFill>
               </a:defRPr>
             </a:lvl3pPr>
-            <a:lvl4pPr indent="-298450" lvl="3" marL="1828800">
+            <a:lvl4pPr marL="1828800" lvl="3" indent="-298450">
               <a:spcBef>
                 <a:spcPts val="0"/>
               </a:spcBef>
@@ -2335,7 +2410,7 @@
                 </a:solidFill>
               </a:defRPr>
             </a:lvl4pPr>
-            <a:lvl5pPr indent="-298450" lvl="4" marL="2286000">
+            <a:lvl5pPr marL="2286000" lvl="4" indent="-298450">
               <a:spcBef>
                 <a:spcPts val="0"/>
               </a:spcBef>
@@ -2353,7 +2428,7 @@
                 </a:solidFill>
               </a:defRPr>
             </a:lvl5pPr>
-            <a:lvl6pPr indent="-298450" lvl="5" marL="2743200">
+            <a:lvl6pPr marL="2743200" lvl="5" indent="-298450">
               <a:spcBef>
                 <a:spcPts val="0"/>
               </a:spcBef>
@@ -2371,7 +2446,7 @@
                 </a:solidFill>
               </a:defRPr>
             </a:lvl6pPr>
-            <a:lvl7pPr indent="-298450" lvl="6" marL="3200400">
+            <a:lvl7pPr marL="3200400" lvl="6" indent="-298450">
               <a:spcBef>
                 <a:spcPts val="0"/>
               </a:spcBef>
@@ -2389,7 +2464,7 @@
                 </a:solidFill>
               </a:defRPr>
             </a:lvl7pPr>
-            <a:lvl8pPr indent="-298450" lvl="7" marL="3657600">
+            <a:lvl8pPr marL="3657600" lvl="7" indent="-298450">
               <a:spcBef>
                 <a:spcPts val="0"/>
               </a:spcBef>
@@ -2407,7 +2482,7 @@
                 </a:solidFill>
               </a:defRPr>
             </a:lvl8pPr>
-            <a:lvl9pPr indent="-298450" lvl="8" marL="4114800">
+            <a:lvl9pPr marL="4114800" lvl="8" indent="-298450">
               <a:spcBef>
                 <a:spcPts val="0"/>
               </a:spcBef>
@@ -2426,15 +2501,19 @@
               </a:defRPr>
             </a:lvl9pPr>
           </a:lstStyle>
-          <a:p/>
+          <a:p>
+            <a:endParaRPr/>
+          </a:p>
         </p:txBody>
       </p:sp>
       <p:sp>
         <p:nvSpPr>
           <p:cNvPr id="57" name="Google Shape;57;p11"/>
-          <p:cNvSpPr txBox="1"/>
+          <p:cNvSpPr txBox="1">
+            <a:spLocks noGrp="1"/>
+          </p:cNvSpPr>
           <p:nvPr>
-            <p:ph idx="12" type="sldNum"/>
+            <p:ph type="sldNum" idx="12"/>
           </p:nvPr>
         </p:nvSpPr>
         <p:spPr>
@@ -2447,7 +2526,7 @@
           </a:prstGeom>
         </p:spPr>
         <p:txBody>
-          <a:bodyPr anchorCtr="0" anchor="ctr" bIns="91425" lIns="91425" spcFirstLastPara="1" rIns="91425" wrap="square" tIns="91425">
+          <a:bodyPr spcFirstLastPara="1" wrap="square" lIns="91425" tIns="91425" rIns="91425" bIns="91425" anchor="ctr" anchorCtr="0">
             <a:normAutofit/>
           </a:bodyPr>
           <a:lstStyle>
@@ -2525,7 +2604,7 @@
             </a:lvl9pPr>
           </a:lstStyle>
           <a:p>
-            <a:pPr indent="0" lvl="0" marL="0" rtl="0" algn="r">
+            <a:pPr marL="0" lvl="0" indent="0" algn="r" rtl="0">
               <a:spcBef>
                 <a:spcPts val="0"/>
               </a:spcBef>
@@ -2551,11 +2630,11 @@
 </file>
 
 <file path=ppt/slideLayouts/slideLayout11.xml><?xml version="1.0" encoding="utf-8"?>
-<p:sldLayout xmlns:a="http://schemas.openxmlformats.org/drawingml/2006/main" xmlns:r="http://schemas.openxmlformats.org/officeDocument/2006/relationships" xmlns:mc="http://schemas.openxmlformats.org/markup-compatibility/2006" xmlns:mv="urn:schemas-microsoft-com:mac:vml" xmlns:p="http://schemas.openxmlformats.org/presentationml/2006/main" xmlns:c="http://schemas.openxmlformats.org/drawingml/2006/chart" xmlns:dgm="http://schemas.openxmlformats.org/drawingml/2006/diagram" xmlns:o="urn:schemas-microsoft-com:office:office" xmlns:v="urn:schemas-microsoft-com:vml" xmlns:pvml="urn:schemas-microsoft-com:office:powerpoint" xmlns:com="http://schemas.openxmlformats.org/drawingml/2006/compatibility" xmlns:p14="http://schemas.microsoft.com/office/powerpoint/2010/main" xmlns:p15="http://schemas.microsoft.com/office/powerpoint/2012/main" xmlns:ahyp="http://schemas.microsoft.com/office/drawing/2018/hyperlinkcolor" matchingName="Blank" type="blank">
+<p:sldLayout xmlns:a="http://schemas.openxmlformats.org/drawingml/2006/main" xmlns:r="http://schemas.openxmlformats.org/officeDocument/2006/relationships" xmlns:p="http://schemas.openxmlformats.org/presentationml/2006/main" matchingName="Blank" type="blank">
   <p:cSld name="BLANK">
     <p:spTree>
       <p:nvGrpSpPr>
-        <p:cNvPr id="58" name="Shape 58"/>
+        <p:cNvPr id="1" name="Shape 58"/>
         <p:cNvGrpSpPr/>
         <p:nvPr/>
       </p:nvGrpSpPr>
@@ -2570,9 +2649,11 @@
       <p:sp>
         <p:nvSpPr>
           <p:cNvPr id="59" name="Google Shape;59;p12"/>
-          <p:cNvSpPr txBox="1"/>
+          <p:cNvSpPr txBox="1">
+            <a:spLocks noGrp="1"/>
+          </p:cNvSpPr>
           <p:nvPr>
-            <p:ph idx="12" type="sldNum"/>
+            <p:ph type="sldNum" idx="12"/>
           </p:nvPr>
         </p:nvSpPr>
         <p:spPr>
@@ -2585,7 +2666,7 @@
           </a:prstGeom>
         </p:spPr>
         <p:txBody>
-          <a:bodyPr anchorCtr="0" anchor="ctr" bIns="91425" lIns="91425" spcFirstLastPara="1" rIns="91425" wrap="square" tIns="91425">
+          <a:bodyPr spcFirstLastPara="1" wrap="square" lIns="91425" tIns="91425" rIns="91425" bIns="91425" anchor="ctr" anchorCtr="0">
             <a:normAutofit/>
           </a:bodyPr>
           <a:lstStyle>
@@ -2627,7 +2708,7 @@
             </a:lvl9pPr>
           </a:lstStyle>
           <a:p>
-            <a:pPr indent="0" lvl="0" marL="0" rtl="0" algn="r">
+            <a:pPr marL="0" lvl="0" indent="0" algn="r" rtl="0">
               <a:spcBef>
                 <a:spcPts val="0"/>
               </a:spcBef>
@@ -2653,18 +2734,19 @@
 </file>
 
 <file path=ppt/slideLayouts/slideLayout2.xml><?xml version="1.0" encoding="utf-8"?>
-<p:sldLayout xmlns:a="http://schemas.openxmlformats.org/drawingml/2006/main" xmlns:r="http://schemas.openxmlformats.org/officeDocument/2006/relationships" xmlns:mc="http://schemas.openxmlformats.org/markup-compatibility/2006" xmlns:mv="urn:schemas-microsoft-com:mac:vml" xmlns:p="http://schemas.openxmlformats.org/presentationml/2006/main" xmlns:c="http://schemas.openxmlformats.org/drawingml/2006/chart" xmlns:dgm="http://schemas.openxmlformats.org/drawingml/2006/diagram" xmlns:o="urn:schemas-microsoft-com:office:office" xmlns:v="urn:schemas-microsoft-com:vml" xmlns:pvml="urn:schemas-microsoft-com:office:powerpoint" xmlns:com="http://schemas.openxmlformats.org/drawingml/2006/compatibility" xmlns:p14="http://schemas.microsoft.com/office/powerpoint/2010/main" xmlns:p15="http://schemas.microsoft.com/office/powerpoint/2012/main" xmlns:ahyp="http://schemas.microsoft.com/office/drawing/2018/hyperlinkcolor" matchingName="Section header" type="secHead">
+<p:sldLayout xmlns:a="http://schemas.openxmlformats.org/drawingml/2006/main" xmlns:r="http://schemas.openxmlformats.org/officeDocument/2006/relationships" xmlns:p="http://schemas.openxmlformats.org/presentationml/2006/main" matchingName="Section header" type="secHead">
   <p:cSld name="SECTION_HEADER">
     <p:bg>
       <p:bgPr>
         <a:solidFill>
           <a:schemeClr val="accent3"/>
         </a:solidFill>
+        <a:effectLst/>
       </p:bgPr>
     </p:bg>
     <p:spTree>
       <p:nvGrpSpPr>
-        <p:cNvPr id="14" name="Shape 14"/>
+        <p:cNvPr id="1" name="Shape 14"/>
         <p:cNvGrpSpPr/>
         <p:nvPr/>
       </p:nvGrpSpPr>
@@ -2688,9 +2770,13 @@
             <a:ext cx="9144250" cy="4398100"/>
           </a:xfrm>
           <a:custGeom>
-            <a:rect b="b" l="l" r="r" t="t"/>
+            <a:avLst/>
+            <a:gdLst/>
+            <a:ahLst/>
+            <a:cxnLst/>
+            <a:rect l="l" t="t" r="r" b="b"/>
             <a:pathLst>
-              <a:path extrusionOk="0" h="175924" w="365770">
+              <a:path w="365770" h="175924" extrusionOk="0">
                 <a:moveTo>
                   <a:pt x="0" y="0"/>
                 </a:moveTo>
@@ -2727,9 +2813,13 @@
             <a:ext cx="9144250" cy="4398100"/>
           </a:xfrm>
           <a:custGeom>
-            <a:rect b="b" l="l" r="r" t="t"/>
+            <a:avLst/>
+            <a:gdLst/>
+            <a:ahLst/>
+            <a:cxnLst/>
+            <a:rect l="l" t="t" r="r" b="b"/>
             <a:pathLst>
-              <a:path extrusionOk="0" h="175924" w="365770">
+              <a:path w="365770" h="175924" extrusionOk="0">
                 <a:moveTo>
                   <a:pt x="0" y="0"/>
                 </a:moveTo>
@@ -2757,7 +2847,9 @@
       <p:sp>
         <p:nvSpPr>
           <p:cNvPr id="17" name="Google Shape;17;p3"/>
-          <p:cNvSpPr txBox="1"/>
+          <p:cNvSpPr txBox="1">
+            <a:spLocks noGrp="1"/>
+          </p:cNvSpPr>
           <p:nvPr>
             <p:ph type="title"/>
           </p:nvPr>
@@ -2772,7 +2864,7 @@
           </a:prstGeom>
         </p:spPr>
         <p:txBody>
-          <a:bodyPr anchorCtr="0" anchor="t" bIns="91425" lIns="91425" spcFirstLastPara="1" rIns="91425" wrap="square" tIns="91425">
+          <a:bodyPr spcFirstLastPara="1" wrap="square" lIns="91425" tIns="91425" rIns="91425" bIns="91425" anchor="t" anchorCtr="0">
             <a:normAutofit/>
           </a:bodyPr>
           <a:lstStyle>
@@ -2876,15 +2968,19 @@
               <a:defRPr sz="3600"/>
             </a:lvl9pPr>
           </a:lstStyle>
-          <a:p/>
+          <a:p>
+            <a:endParaRPr/>
+          </a:p>
         </p:txBody>
       </p:sp>
       <p:sp>
         <p:nvSpPr>
           <p:cNvPr id="18" name="Google Shape;18;p3"/>
-          <p:cNvSpPr txBox="1"/>
+          <p:cNvSpPr txBox="1">
+            <a:spLocks noGrp="1"/>
+          </p:cNvSpPr>
           <p:nvPr>
-            <p:ph idx="12" type="sldNum"/>
+            <p:ph type="sldNum" idx="12"/>
           </p:nvPr>
         </p:nvSpPr>
         <p:spPr>
@@ -2897,7 +2993,7 @@
           </a:prstGeom>
         </p:spPr>
         <p:txBody>
-          <a:bodyPr anchorCtr="0" anchor="ctr" bIns="91425" lIns="91425" spcFirstLastPara="1" rIns="91425" wrap="square" tIns="91425">
+          <a:bodyPr spcFirstLastPara="1" wrap="square" lIns="91425" tIns="91425" rIns="91425" bIns="91425" anchor="ctr" anchorCtr="0">
             <a:normAutofit/>
           </a:bodyPr>
           <a:lstStyle>
@@ -2975,7 +3071,7 @@
             </a:lvl9pPr>
           </a:lstStyle>
           <a:p>
-            <a:pPr indent="0" lvl="0" marL="0" rtl="0" algn="r">
+            <a:pPr marL="0" lvl="0" indent="0" algn="r" rtl="0">
               <a:spcBef>
                 <a:spcPts val="0"/>
               </a:spcBef>
@@ -3001,11 +3097,11 @@
 </file>
 
 <file path=ppt/slideLayouts/slideLayout3.xml><?xml version="1.0" encoding="utf-8"?>
-<p:sldLayout xmlns:a="http://schemas.openxmlformats.org/drawingml/2006/main" xmlns:r="http://schemas.openxmlformats.org/officeDocument/2006/relationships" xmlns:mc="http://schemas.openxmlformats.org/markup-compatibility/2006" xmlns:mv="urn:schemas-microsoft-com:mac:vml" xmlns:p="http://schemas.openxmlformats.org/presentationml/2006/main" xmlns:c="http://schemas.openxmlformats.org/drawingml/2006/chart" xmlns:dgm="http://schemas.openxmlformats.org/drawingml/2006/diagram" xmlns:o="urn:schemas-microsoft-com:office:office" xmlns:v="urn:schemas-microsoft-com:vml" xmlns:pvml="urn:schemas-microsoft-com:office:powerpoint" xmlns:com="http://schemas.openxmlformats.org/drawingml/2006/compatibility" xmlns:p14="http://schemas.microsoft.com/office/powerpoint/2010/main" xmlns:p15="http://schemas.microsoft.com/office/powerpoint/2012/main" xmlns:ahyp="http://schemas.microsoft.com/office/drawing/2018/hyperlinkcolor" matchingName="Title and body" type="tx">
+<p:sldLayout xmlns:a="http://schemas.openxmlformats.org/drawingml/2006/main" xmlns:r="http://schemas.openxmlformats.org/officeDocument/2006/relationships" xmlns:p="http://schemas.openxmlformats.org/presentationml/2006/main" matchingName="Title and body" type="tx">
   <p:cSld name="TITLE_AND_BODY">
     <p:spTree>
       <p:nvGrpSpPr>
-        <p:cNvPr id="19" name="Shape 19"/>
+        <p:cNvPr id="1" name="Shape 19"/>
         <p:cNvGrpSpPr/>
         <p:nvPr/>
       </p:nvGrpSpPr>
@@ -3039,12 +3135,12 @@
           </a:ln>
         </p:spPr>
         <p:txBody>
-          <a:bodyPr anchorCtr="0" anchor="ctr" bIns="91425" lIns="91425" spcFirstLastPara="1" rIns="91425" wrap="square" tIns="91425">
+          <a:bodyPr spcFirstLastPara="1" wrap="square" lIns="91425" tIns="91425" rIns="91425" bIns="91425" anchor="ctr" anchorCtr="0">
             <a:noAutofit/>
           </a:bodyPr>
           <a:lstStyle/>
           <a:p>
-            <a:pPr indent="0" lvl="0" marL="0" rtl="0" algn="l">
+            <a:pPr marL="0" lvl="0" indent="0" algn="l" rtl="0">
               <a:spcBef>
                 <a:spcPts val="0"/>
               </a:spcBef>
@@ -3053,9 +3149,6 @@
               </a:spcAft>
               <a:buNone/>
             </a:pPr>
-            <a:r>
-              <a:t/>
-            </a:r>
             <a:endParaRPr/>
           </a:p>
         </p:txBody>
@@ -3072,9 +3165,13 @@
             <a:ext cx="4313625" cy="4399375"/>
           </a:xfrm>
           <a:custGeom>
-            <a:rect b="b" l="l" r="r" t="t"/>
+            <a:avLst/>
+            <a:gdLst/>
+            <a:ahLst/>
+            <a:cxnLst/>
+            <a:rect l="l" t="t" r="r" b="b"/>
             <a:pathLst>
-              <a:path extrusionOk="0" h="175975" w="172545">
+              <a:path w="172545" h="175975" extrusionOk="0">
                 <a:moveTo>
                   <a:pt x="0" y="157"/>
                 </a:moveTo>
@@ -3111,9 +3208,13 @@
             <a:ext cx="4316900" cy="4395600"/>
           </a:xfrm>
           <a:custGeom>
-            <a:rect b="b" l="l" r="r" t="t"/>
+            <a:avLst/>
+            <a:gdLst/>
+            <a:ahLst/>
+            <a:cxnLst/>
+            <a:rect l="l" t="t" r="r" b="b"/>
             <a:pathLst>
-              <a:path extrusionOk="0" h="175824" w="172676">
+              <a:path w="172676" h="175824" extrusionOk="0">
                 <a:moveTo>
                   <a:pt x="0" y="6"/>
                 </a:moveTo>
@@ -3141,7 +3242,9 @@
       <p:sp>
         <p:nvSpPr>
           <p:cNvPr id="23" name="Google Shape;23;p4"/>
-          <p:cNvSpPr txBox="1"/>
+          <p:cNvSpPr txBox="1">
+            <a:spLocks noGrp="1"/>
+          </p:cNvSpPr>
           <p:nvPr>
             <p:ph type="title"/>
           </p:nvPr>
@@ -3156,7 +3259,7 @@
           </a:prstGeom>
         </p:spPr>
         <p:txBody>
-          <a:bodyPr anchorCtr="0" anchor="t" bIns="91425" lIns="91425" spcFirstLastPara="1" rIns="91425" wrap="square" tIns="91425">
+          <a:bodyPr spcFirstLastPara="1" wrap="square" lIns="91425" tIns="91425" rIns="91425" bIns="91425" anchor="t" anchorCtr="0">
             <a:normAutofit/>
           </a:bodyPr>
           <a:lstStyle>
@@ -3323,15 +3426,19 @@
               </a:defRPr>
             </a:lvl9pPr>
           </a:lstStyle>
-          <a:p/>
+          <a:p>
+            <a:endParaRPr/>
+          </a:p>
         </p:txBody>
       </p:sp>
       <p:sp>
         <p:nvSpPr>
           <p:cNvPr id="24" name="Google Shape;24;p4"/>
-          <p:cNvSpPr txBox="1"/>
+          <p:cNvSpPr txBox="1">
+            <a:spLocks noGrp="1"/>
+          </p:cNvSpPr>
           <p:nvPr>
-            <p:ph idx="1" type="body"/>
+            <p:ph type="body" idx="1"/>
           </p:nvPr>
         </p:nvSpPr>
         <p:spPr>
@@ -3344,11 +3451,11 @@
           </a:prstGeom>
         </p:spPr>
         <p:txBody>
-          <a:bodyPr anchorCtr="0" anchor="t" bIns="91425" lIns="91425" spcFirstLastPara="1" rIns="91425" wrap="square" tIns="91425">
+          <a:bodyPr spcFirstLastPara="1" wrap="square" lIns="91425" tIns="91425" rIns="91425" bIns="91425" anchor="t" anchorCtr="0">
             <a:normAutofit/>
           </a:bodyPr>
           <a:lstStyle>
-            <a:lvl1pPr indent="-311150" lvl="0" marL="457200">
+            <a:lvl1pPr marL="457200" lvl="0" indent="-311150">
               <a:spcBef>
                 <a:spcPts val="0"/>
               </a:spcBef>
@@ -3359,7 +3466,7 @@
               <a:buChar char="●"/>
               <a:defRPr/>
             </a:lvl1pPr>
-            <a:lvl2pPr indent="-298450" lvl="1" marL="914400">
+            <a:lvl2pPr marL="914400" lvl="1" indent="-298450">
               <a:spcBef>
                 <a:spcPts val="0"/>
               </a:spcBef>
@@ -3370,7 +3477,7 @@
               <a:buChar char="○"/>
               <a:defRPr/>
             </a:lvl2pPr>
-            <a:lvl3pPr indent="-298450" lvl="2" marL="1371600">
+            <a:lvl3pPr marL="1371600" lvl="2" indent="-298450">
               <a:spcBef>
                 <a:spcPts val="0"/>
               </a:spcBef>
@@ -3381,7 +3488,7 @@
               <a:buChar char="■"/>
               <a:defRPr/>
             </a:lvl3pPr>
-            <a:lvl4pPr indent="-298450" lvl="3" marL="1828800">
+            <a:lvl4pPr marL="1828800" lvl="3" indent="-298450">
               <a:spcBef>
                 <a:spcPts val="0"/>
               </a:spcBef>
@@ -3392,7 +3499,7 @@
               <a:buChar char="●"/>
               <a:defRPr/>
             </a:lvl4pPr>
-            <a:lvl5pPr indent="-298450" lvl="4" marL="2286000">
+            <a:lvl5pPr marL="2286000" lvl="4" indent="-298450">
               <a:spcBef>
                 <a:spcPts val="0"/>
               </a:spcBef>
@@ -3403,7 +3510,7 @@
               <a:buChar char="○"/>
               <a:defRPr/>
             </a:lvl5pPr>
-            <a:lvl6pPr indent="-298450" lvl="5" marL="2743200">
+            <a:lvl6pPr marL="2743200" lvl="5" indent="-298450">
               <a:spcBef>
                 <a:spcPts val="0"/>
               </a:spcBef>
@@ -3414,7 +3521,7 @@
               <a:buChar char="■"/>
               <a:defRPr/>
             </a:lvl6pPr>
-            <a:lvl7pPr indent="-298450" lvl="6" marL="3200400">
+            <a:lvl7pPr marL="3200400" lvl="6" indent="-298450">
               <a:spcBef>
                 <a:spcPts val="0"/>
               </a:spcBef>
@@ -3425,7 +3532,7 @@
               <a:buChar char="●"/>
               <a:defRPr/>
             </a:lvl7pPr>
-            <a:lvl8pPr indent="-298450" lvl="7" marL="3657600">
+            <a:lvl8pPr marL="3657600" lvl="7" indent="-298450">
               <a:spcBef>
                 <a:spcPts val="0"/>
               </a:spcBef>
@@ -3436,7 +3543,7 @@
               <a:buChar char="○"/>
               <a:defRPr/>
             </a:lvl8pPr>
-            <a:lvl9pPr indent="-298450" lvl="8" marL="4114800">
+            <a:lvl9pPr marL="4114800" lvl="8" indent="-298450">
               <a:spcBef>
                 <a:spcPts val="0"/>
               </a:spcBef>
@@ -3448,15 +3555,19 @@
               <a:defRPr/>
             </a:lvl9pPr>
           </a:lstStyle>
-          <a:p/>
+          <a:p>
+            <a:endParaRPr/>
+          </a:p>
         </p:txBody>
       </p:sp>
       <p:sp>
         <p:nvSpPr>
           <p:cNvPr id="25" name="Google Shape;25;p4"/>
-          <p:cNvSpPr txBox="1"/>
+          <p:cNvSpPr txBox="1">
+            <a:spLocks noGrp="1"/>
+          </p:cNvSpPr>
           <p:nvPr>
-            <p:ph idx="12" type="sldNum"/>
+            <p:ph type="sldNum" idx="12"/>
           </p:nvPr>
         </p:nvSpPr>
         <p:spPr>
@@ -3469,7 +3580,7 @@
           </a:prstGeom>
         </p:spPr>
         <p:txBody>
-          <a:bodyPr anchorCtr="0" anchor="ctr" bIns="91425" lIns="91425" spcFirstLastPara="1" rIns="91425" wrap="square" tIns="91425">
+          <a:bodyPr spcFirstLastPara="1" wrap="square" lIns="91425" tIns="91425" rIns="91425" bIns="91425" anchor="ctr" anchorCtr="0">
             <a:normAutofit/>
           </a:bodyPr>
           <a:lstStyle>
@@ -3511,7 +3622,7 @@
             </a:lvl9pPr>
           </a:lstStyle>
           <a:p>
-            <a:pPr indent="0" lvl="0" marL="0" rtl="0" algn="r">
+            <a:pPr marL="0" lvl="0" indent="0" algn="r" rtl="0">
               <a:spcBef>
                 <a:spcPts val="0"/>
               </a:spcBef>
@@ -3537,11 +3648,11 @@
 </file>
 
 <file path=ppt/slideLayouts/slideLayout4.xml><?xml version="1.0" encoding="utf-8"?>
-<p:sldLayout xmlns:a="http://schemas.openxmlformats.org/drawingml/2006/main" xmlns:r="http://schemas.openxmlformats.org/officeDocument/2006/relationships" xmlns:mc="http://schemas.openxmlformats.org/markup-compatibility/2006" xmlns:mv="urn:schemas-microsoft-com:mac:vml" xmlns:p="http://schemas.openxmlformats.org/presentationml/2006/main" xmlns:c="http://schemas.openxmlformats.org/drawingml/2006/chart" xmlns:dgm="http://schemas.openxmlformats.org/drawingml/2006/diagram" xmlns:o="urn:schemas-microsoft-com:office:office" xmlns:v="urn:schemas-microsoft-com:vml" xmlns:pvml="urn:schemas-microsoft-com:office:powerpoint" xmlns:com="http://schemas.openxmlformats.org/drawingml/2006/compatibility" xmlns:p14="http://schemas.microsoft.com/office/powerpoint/2010/main" xmlns:p15="http://schemas.microsoft.com/office/powerpoint/2012/main" xmlns:ahyp="http://schemas.microsoft.com/office/drawing/2018/hyperlinkcolor" matchingName="Title and two columns" type="twoColTx">
+<p:sldLayout xmlns:a="http://schemas.openxmlformats.org/drawingml/2006/main" xmlns:r="http://schemas.openxmlformats.org/officeDocument/2006/relationships" xmlns:p="http://schemas.openxmlformats.org/presentationml/2006/main" matchingName="Title and two columns" type="twoColTx">
   <p:cSld name="TITLE_AND_TWO_COLUMNS">
     <p:spTree>
       <p:nvGrpSpPr>
-        <p:cNvPr id="26" name="Shape 26"/>
+        <p:cNvPr id="1" name="Shape 26"/>
         <p:cNvGrpSpPr/>
         <p:nvPr/>
       </p:nvGrpSpPr>
@@ -3575,12 +3686,12 @@
           </a:ln>
         </p:spPr>
         <p:txBody>
-          <a:bodyPr anchorCtr="0" anchor="ctr" bIns="91425" lIns="91425" spcFirstLastPara="1" rIns="91425" wrap="square" tIns="91425">
+          <a:bodyPr spcFirstLastPara="1" wrap="square" lIns="91425" tIns="91425" rIns="91425" bIns="91425" anchor="ctr" anchorCtr="0">
             <a:noAutofit/>
           </a:bodyPr>
           <a:lstStyle/>
           <a:p>
-            <a:pPr indent="0" lvl="0" marL="0" rtl="0" algn="l">
+            <a:pPr marL="0" lvl="0" indent="0" algn="l" rtl="0">
               <a:spcBef>
                 <a:spcPts val="0"/>
               </a:spcBef>
@@ -3589,9 +3700,6 @@
               </a:spcAft>
               <a:buNone/>
             </a:pPr>
-            <a:r>
-              <a:t/>
-            </a:r>
             <a:endParaRPr/>
           </a:p>
         </p:txBody>
@@ -3599,7 +3707,9 @@
       <p:sp>
         <p:nvSpPr>
           <p:cNvPr id="28" name="Google Shape;28;p5"/>
-          <p:cNvSpPr txBox="1"/>
+          <p:cNvSpPr txBox="1">
+            <a:spLocks noGrp="1"/>
+          </p:cNvSpPr>
           <p:nvPr>
             <p:ph type="title"/>
           </p:nvPr>
@@ -3614,7 +3724,7 @@
           </a:prstGeom>
         </p:spPr>
         <p:txBody>
-          <a:bodyPr anchorCtr="0" anchor="t" bIns="91425" lIns="91425" spcFirstLastPara="1" rIns="91425" wrap="square" tIns="91425">
+          <a:bodyPr spcFirstLastPara="1" wrap="square" lIns="91425" tIns="91425" rIns="91425" bIns="91425" anchor="t" anchorCtr="0">
             <a:normAutofit/>
           </a:bodyPr>
           <a:lstStyle>
@@ -3781,15 +3891,19 @@
               </a:defRPr>
             </a:lvl9pPr>
           </a:lstStyle>
-          <a:p/>
+          <a:p>
+            <a:endParaRPr/>
+          </a:p>
         </p:txBody>
       </p:sp>
       <p:sp>
         <p:nvSpPr>
           <p:cNvPr id="29" name="Google Shape;29;p5"/>
-          <p:cNvSpPr txBox="1"/>
+          <p:cNvSpPr txBox="1">
+            <a:spLocks noGrp="1"/>
+          </p:cNvSpPr>
           <p:nvPr>
-            <p:ph idx="1" type="body"/>
+            <p:ph type="body" idx="1"/>
           </p:nvPr>
         </p:nvSpPr>
         <p:spPr>
@@ -3802,11 +3916,11 @@
           </a:prstGeom>
         </p:spPr>
         <p:txBody>
-          <a:bodyPr anchorCtr="0" anchor="t" bIns="91425" lIns="91425" spcFirstLastPara="1" rIns="91425" wrap="square" tIns="91425">
+          <a:bodyPr spcFirstLastPara="1" wrap="square" lIns="91425" tIns="91425" rIns="91425" bIns="91425" anchor="t" anchorCtr="0">
             <a:normAutofit/>
           </a:bodyPr>
           <a:lstStyle>
-            <a:lvl1pPr indent="-311150" lvl="0" marL="457200">
+            <a:lvl1pPr marL="457200" lvl="0" indent="-311150">
               <a:spcBef>
                 <a:spcPts val="0"/>
               </a:spcBef>
@@ -3817,7 +3931,7 @@
               <a:buChar char="●"/>
               <a:defRPr/>
             </a:lvl1pPr>
-            <a:lvl2pPr indent="-298450" lvl="1" marL="914400">
+            <a:lvl2pPr marL="914400" lvl="1" indent="-298450">
               <a:spcBef>
                 <a:spcPts val="0"/>
               </a:spcBef>
@@ -3828,7 +3942,7 @@
               <a:buChar char="○"/>
               <a:defRPr/>
             </a:lvl2pPr>
-            <a:lvl3pPr indent="-298450" lvl="2" marL="1371600">
+            <a:lvl3pPr marL="1371600" lvl="2" indent="-298450">
               <a:spcBef>
                 <a:spcPts val="0"/>
               </a:spcBef>
@@ -3839,7 +3953,7 @@
               <a:buChar char="■"/>
               <a:defRPr/>
             </a:lvl3pPr>
-            <a:lvl4pPr indent="-298450" lvl="3" marL="1828800">
+            <a:lvl4pPr marL="1828800" lvl="3" indent="-298450">
               <a:spcBef>
                 <a:spcPts val="0"/>
               </a:spcBef>
@@ -3850,7 +3964,7 @@
               <a:buChar char="●"/>
               <a:defRPr/>
             </a:lvl4pPr>
-            <a:lvl5pPr indent="-298450" lvl="4" marL="2286000">
+            <a:lvl5pPr marL="2286000" lvl="4" indent="-298450">
               <a:spcBef>
                 <a:spcPts val="0"/>
               </a:spcBef>
@@ -3861,7 +3975,7 @@
               <a:buChar char="○"/>
               <a:defRPr/>
             </a:lvl5pPr>
-            <a:lvl6pPr indent="-298450" lvl="5" marL="2743200">
+            <a:lvl6pPr marL="2743200" lvl="5" indent="-298450">
               <a:spcBef>
                 <a:spcPts val="0"/>
               </a:spcBef>
@@ -3872,7 +3986,7 @@
               <a:buChar char="■"/>
               <a:defRPr/>
             </a:lvl6pPr>
-            <a:lvl7pPr indent="-298450" lvl="6" marL="3200400">
+            <a:lvl7pPr marL="3200400" lvl="6" indent="-298450">
               <a:spcBef>
                 <a:spcPts val="0"/>
               </a:spcBef>
@@ -3883,7 +3997,7 @@
               <a:buChar char="●"/>
               <a:defRPr/>
             </a:lvl7pPr>
-            <a:lvl8pPr indent="-298450" lvl="7" marL="3657600">
+            <a:lvl8pPr marL="3657600" lvl="7" indent="-298450">
               <a:spcBef>
                 <a:spcPts val="0"/>
               </a:spcBef>
@@ -3894,7 +4008,7 @@
               <a:buChar char="○"/>
               <a:defRPr/>
             </a:lvl8pPr>
-            <a:lvl9pPr indent="-298450" lvl="8" marL="4114800">
+            <a:lvl9pPr marL="4114800" lvl="8" indent="-298450">
               <a:spcBef>
                 <a:spcPts val="0"/>
               </a:spcBef>
@@ -3906,15 +4020,19 @@
               <a:defRPr/>
             </a:lvl9pPr>
           </a:lstStyle>
-          <a:p/>
+          <a:p>
+            <a:endParaRPr/>
+          </a:p>
         </p:txBody>
       </p:sp>
       <p:sp>
         <p:nvSpPr>
           <p:cNvPr id="30" name="Google Shape;30;p5"/>
-          <p:cNvSpPr txBox="1"/>
+          <p:cNvSpPr txBox="1">
+            <a:spLocks noGrp="1"/>
+          </p:cNvSpPr>
           <p:nvPr>
-            <p:ph idx="2" type="body"/>
+            <p:ph type="body" idx="2"/>
           </p:nvPr>
         </p:nvSpPr>
         <p:spPr>
@@ -3927,11 +4045,11 @@
           </a:prstGeom>
         </p:spPr>
         <p:txBody>
-          <a:bodyPr anchorCtr="0" anchor="t" bIns="91425" lIns="91425" spcFirstLastPara="1" rIns="91425" wrap="square" tIns="91425">
+          <a:bodyPr spcFirstLastPara="1" wrap="square" lIns="91425" tIns="91425" rIns="91425" bIns="91425" anchor="t" anchorCtr="0">
             <a:normAutofit/>
           </a:bodyPr>
           <a:lstStyle>
-            <a:lvl1pPr indent="-311150" lvl="0" marL="457200">
+            <a:lvl1pPr marL="457200" lvl="0" indent="-311150">
               <a:spcBef>
                 <a:spcPts val="0"/>
               </a:spcBef>
@@ -3942,7 +4060,7 @@
               <a:buChar char="●"/>
               <a:defRPr/>
             </a:lvl1pPr>
-            <a:lvl2pPr indent="-298450" lvl="1" marL="914400">
+            <a:lvl2pPr marL="914400" lvl="1" indent="-298450">
               <a:spcBef>
                 <a:spcPts val="0"/>
               </a:spcBef>
@@ -3953,7 +4071,7 @@
               <a:buChar char="○"/>
               <a:defRPr/>
             </a:lvl2pPr>
-            <a:lvl3pPr indent="-298450" lvl="2" marL="1371600">
+            <a:lvl3pPr marL="1371600" lvl="2" indent="-298450">
               <a:spcBef>
                 <a:spcPts val="0"/>
               </a:spcBef>
@@ -3964,7 +4082,7 @@
               <a:buChar char="■"/>
               <a:defRPr/>
             </a:lvl3pPr>
-            <a:lvl4pPr indent="-298450" lvl="3" marL="1828800">
+            <a:lvl4pPr marL="1828800" lvl="3" indent="-298450">
               <a:spcBef>
                 <a:spcPts val="0"/>
               </a:spcBef>
@@ -3975,7 +4093,7 @@
               <a:buChar char="●"/>
               <a:defRPr/>
             </a:lvl4pPr>
-            <a:lvl5pPr indent="-298450" lvl="4" marL="2286000">
+            <a:lvl5pPr marL="2286000" lvl="4" indent="-298450">
               <a:spcBef>
                 <a:spcPts val="0"/>
               </a:spcBef>
@@ -3986,7 +4104,7 @@
               <a:buChar char="○"/>
               <a:defRPr/>
             </a:lvl5pPr>
-            <a:lvl6pPr indent="-298450" lvl="5" marL="2743200">
+            <a:lvl6pPr marL="2743200" lvl="5" indent="-298450">
               <a:spcBef>
                 <a:spcPts val="0"/>
               </a:spcBef>
@@ -3997,7 +4115,7 @@
               <a:buChar char="■"/>
               <a:defRPr/>
             </a:lvl6pPr>
-            <a:lvl7pPr indent="-298450" lvl="6" marL="3200400">
+            <a:lvl7pPr marL="3200400" lvl="6" indent="-298450">
               <a:spcBef>
                 <a:spcPts val="0"/>
               </a:spcBef>
@@ -4008,7 +4126,7 @@
               <a:buChar char="●"/>
               <a:defRPr/>
             </a:lvl7pPr>
-            <a:lvl8pPr indent="-298450" lvl="7" marL="3657600">
+            <a:lvl8pPr marL="3657600" lvl="7" indent="-298450">
               <a:spcBef>
                 <a:spcPts val="0"/>
               </a:spcBef>
@@ -4019,7 +4137,7 @@
               <a:buChar char="○"/>
               <a:defRPr/>
             </a:lvl8pPr>
-            <a:lvl9pPr indent="-298450" lvl="8" marL="4114800">
+            <a:lvl9pPr marL="4114800" lvl="8" indent="-298450">
               <a:spcBef>
                 <a:spcPts val="0"/>
               </a:spcBef>
@@ -4031,15 +4149,19 @@
               <a:defRPr/>
             </a:lvl9pPr>
           </a:lstStyle>
-          <a:p/>
+          <a:p>
+            <a:endParaRPr/>
+          </a:p>
         </p:txBody>
       </p:sp>
       <p:sp>
         <p:nvSpPr>
           <p:cNvPr id="31" name="Google Shape;31;p5"/>
-          <p:cNvSpPr txBox="1"/>
+          <p:cNvSpPr txBox="1">
+            <a:spLocks noGrp="1"/>
+          </p:cNvSpPr>
           <p:nvPr>
-            <p:ph idx="12" type="sldNum"/>
+            <p:ph type="sldNum" idx="12"/>
           </p:nvPr>
         </p:nvSpPr>
         <p:spPr>
@@ -4052,7 +4174,7 @@
           </a:prstGeom>
         </p:spPr>
         <p:txBody>
-          <a:bodyPr anchorCtr="0" anchor="ctr" bIns="91425" lIns="91425" spcFirstLastPara="1" rIns="91425" wrap="square" tIns="91425">
+          <a:bodyPr spcFirstLastPara="1" wrap="square" lIns="91425" tIns="91425" rIns="91425" bIns="91425" anchor="ctr" anchorCtr="0">
             <a:normAutofit/>
           </a:bodyPr>
           <a:lstStyle>
@@ -4094,7 +4216,7 @@
             </a:lvl9pPr>
           </a:lstStyle>
           <a:p>
-            <a:pPr indent="0" lvl="0" marL="0" rtl="0" algn="r">
+            <a:pPr marL="0" lvl="0" indent="0" algn="r" rtl="0">
               <a:spcBef>
                 <a:spcPts val="0"/>
               </a:spcBef>
@@ -4120,11 +4242,11 @@
 </file>
 
 <file path=ppt/slideLayouts/slideLayout5.xml><?xml version="1.0" encoding="utf-8"?>
-<p:sldLayout xmlns:a="http://schemas.openxmlformats.org/drawingml/2006/main" xmlns:r="http://schemas.openxmlformats.org/officeDocument/2006/relationships" xmlns:mc="http://schemas.openxmlformats.org/markup-compatibility/2006" xmlns:mv="urn:schemas-microsoft-com:mac:vml" xmlns:p="http://schemas.openxmlformats.org/presentationml/2006/main" xmlns:c="http://schemas.openxmlformats.org/drawingml/2006/chart" xmlns:dgm="http://schemas.openxmlformats.org/drawingml/2006/diagram" xmlns:o="urn:schemas-microsoft-com:office:office" xmlns:v="urn:schemas-microsoft-com:vml" xmlns:pvml="urn:schemas-microsoft-com:office:powerpoint" xmlns:com="http://schemas.openxmlformats.org/drawingml/2006/compatibility" xmlns:p14="http://schemas.microsoft.com/office/powerpoint/2010/main" xmlns:p15="http://schemas.microsoft.com/office/powerpoint/2012/main" xmlns:ahyp="http://schemas.microsoft.com/office/drawing/2018/hyperlinkcolor" matchingName="Title only" type="titleOnly">
+<p:sldLayout xmlns:a="http://schemas.openxmlformats.org/drawingml/2006/main" xmlns:r="http://schemas.openxmlformats.org/officeDocument/2006/relationships" xmlns:p="http://schemas.openxmlformats.org/presentationml/2006/main" matchingName="Title only" type="titleOnly">
   <p:cSld name="TITLE_ONLY">
     <p:spTree>
       <p:nvGrpSpPr>
-        <p:cNvPr id="32" name="Shape 32"/>
+        <p:cNvPr id="1" name="Shape 32"/>
         <p:cNvGrpSpPr/>
         <p:nvPr/>
       </p:nvGrpSpPr>
@@ -4158,12 +4280,12 @@
           </a:ln>
         </p:spPr>
         <p:txBody>
-          <a:bodyPr anchorCtr="0" anchor="ctr" bIns="91425" lIns="91425" spcFirstLastPara="1" rIns="91425" wrap="square" tIns="91425">
+          <a:bodyPr spcFirstLastPara="1" wrap="square" lIns="91425" tIns="91425" rIns="91425" bIns="91425" anchor="ctr" anchorCtr="0">
             <a:noAutofit/>
           </a:bodyPr>
           <a:lstStyle/>
           <a:p>
-            <a:pPr indent="0" lvl="0" marL="0" rtl="0" algn="l">
+            <a:pPr marL="0" lvl="0" indent="0" algn="l" rtl="0">
               <a:spcBef>
                 <a:spcPts val="0"/>
               </a:spcBef>
@@ -4172,9 +4294,6 @@
               </a:spcAft>
               <a:buNone/>
             </a:pPr>
-            <a:r>
-              <a:t/>
-            </a:r>
             <a:endParaRPr/>
           </a:p>
         </p:txBody>
@@ -4182,7 +4301,9 @@
       <p:sp>
         <p:nvSpPr>
           <p:cNvPr id="34" name="Google Shape;34;p6"/>
-          <p:cNvSpPr txBox="1"/>
+          <p:cNvSpPr txBox="1">
+            <a:spLocks noGrp="1"/>
+          </p:cNvSpPr>
           <p:nvPr>
             <p:ph type="title"/>
           </p:nvPr>
@@ -4197,7 +4318,7 @@
           </a:prstGeom>
         </p:spPr>
         <p:txBody>
-          <a:bodyPr anchorCtr="0" anchor="t" bIns="91425" lIns="91425" spcFirstLastPara="1" rIns="91425" wrap="square" tIns="91425">
+          <a:bodyPr spcFirstLastPara="1" wrap="square" lIns="91425" tIns="91425" rIns="91425" bIns="91425" anchor="t" anchorCtr="0">
             <a:normAutofit/>
           </a:bodyPr>
           <a:lstStyle>
@@ -4364,15 +4485,19 @@
               </a:defRPr>
             </a:lvl9pPr>
           </a:lstStyle>
-          <a:p/>
+          <a:p>
+            <a:endParaRPr/>
+          </a:p>
         </p:txBody>
       </p:sp>
       <p:sp>
         <p:nvSpPr>
           <p:cNvPr id="35" name="Google Shape;35;p6"/>
-          <p:cNvSpPr txBox="1"/>
+          <p:cNvSpPr txBox="1">
+            <a:spLocks noGrp="1"/>
+          </p:cNvSpPr>
           <p:nvPr>
-            <p:ph idx="12" type="sldNum"/>
+            <p:ph type="sldNum" idx="12"/>
           </p:nvPr>
         </p:nvSpPr>
         <p:spPr>
@@ -4385,7 +4510,7 @@
           </a:prstGeom>
         </p:spPr>
         <p:txBody>
-          <a:bodyPr anchorCtr="0" anchor="ctr" bIns="91425" lIns="91425" spcFirstLastPara="1" rIns="91425" wrap="square" tIns="91425">
+          <a:bodyPr spcFirstLastPara="1" wrap="square" lIns="91425" tIns="91425" rIns="91425" bIns="91425" anchor="ctr" anchorCtr="0">
             <a:normAutofit/>
           </a:bodyPr>
           <a:lstStyle>
@@ -4427,7 +4552,7 @@
             </a:lvl9pPr>
           </a:lstStyle>
           <a:p>
-            <a:pPr indent="0" lvl="0" marL="0" rtl="0" algn="r">
+            <a:pPr marL="0" lvl="0" indent="0" algn="r" rtl="0">
               <a:spcBef>
                 <a:spcPts val="0"/>
               </a:spcBef>
@@ -4453,11 +4578,11 @@
 </file>
 
 <file path=ppt/slideLayouts/slideLayout6.xml><?xml version="1.0" encoding="utf-8"?>
-<p:sldLayout xmlns:a="http://schemas.openxmlformats.org/drawingml/2006/main" xmlns:r="http://schemas.openxmlformats.org/officeDocument/2006/relationships" xmlns:mc="http://schemas.openxmlformats.org/markup-compatibility/2006" xmlns:mv="urn:schemas-microsoft-com:mac:vml" xmlns:p="http://schemas.openxmlformats.org/presentationml/2006/main" xmlns:c="http://schemas.openxmlformats.org/drawingml/2006/chart" xmlns:dgm="http://schemas.openxmlformats.org/drawingml/2006/diagram" xmlns:o="urn:schemas-microsoft-com:office:office" xmlns:v="urn:schemas-microsoft-com:vml" xmlns:pvml="urn:schemas-microsoft-com:office:powerpoint" xmlns:com="http://schemas.openxmlformats.org/drawingml/2006/compatibility" xmlns:p14="http://schemas.microsoft.com/office/powerpoint/2010/main" xmlns:p15="http://schemas.microsoft.com/office/powerpoint/2012/main" xmlns:ahyp="http://schemas.microsoft.com/office/drawing/2018/hyperlinkcolor" matchingName="One column text">
+<p:sldLayout xmlns:a="http://schemas.openxmlformats.org/drawingml/2006/main" xmlns:r="http://schemas.openxmlformats.org/officeDocument/2006/relationships" xmlns:p="http://schemas.openxmlformats.org/presentationml/2006/main" matchingName="One column text">
   <p:cSld name="ONE_COLUMN_TEXT">
     <p:spTree>
       <p:nvGrpSpPr>
-        <p:cNvPr id="36" name="Shape 36"/>
+        <p:cNvPr id="1" name="Shape 36"/>
         <p:cNvGrpSpPr/>
         <p:nvPr/>
       </p:nvGrpSpPr>
@@ -4491,12 +4616,12 @@
           </a:ln>
         </p:spPr>
         <p:txBody>
-          <a:bodyPr anchorCtr="0" anchor="ctr" bIns="91425" lIns="91425" spcFirstLastPara="1" rIns="91425" wrap="square" tIns="91425">
+          <a:bodyPr spcFirstLastPara="1" wrap="square" lIns="91425" tIns="91425" rIns="91425" bIns="91425" anchor="ctr" anchorCtr="0">
             <a:noAutofit/>
           </a:bodyPr>
           <a:lstStyle/>
           <a:p>
-            <a:pPr indent="0" lvl="0" marL="0" rtl="0" algn="l">
+            <a:pPr marL="0" lvl="0" indent="0" algn="l" rtl="0">
               <a:spcBef>
                 <a:spcPts val="0"/>
               </a:spcBef>
@@ -4505,9 +4630,6 @@
               </a:spcAft>
               <a:buNone/>
             </a:pPr>
-            <a:r>
-              <a:t/>
-            </a:r>
             <a:endParaRPr/>
           </a:p>
         </p:txBody>
@@ -4515,7 +4637,9 @@
       <p:sp>
         <p:nvSpPr>
           <p:cNvPr id="38" name="Google Shape;38;p7"/>
-          <p:cNvSpPr txBox="1"/>
+          <p:cNvSpPr txBox="1">
+            <a:spLocks noGrp="1"/>
+          </p:cNvSpPr>
           <p:nvPr>
             <p:ph type="title"/>
           </p:nvPr>
@@ -4530,7 +4654,7 @@
           </a:prstGeom>
         </p:spPr>
         <p:txBody>
-          <a:bodyPr anchorCtr="0" anchor="t" bIns="91425" lIns="91425" spcFirstLastPara="1" rIns="91425" wrap="square" tIns="91425">
+          <a:bodyPr spcFirstLastPara="1" wrap="square" lIns="91425" tIns="91425" rIns="91425" bIns="91425" anchor="t" anchorCtr="0">
             <a:normAutofit/>
           </a:bodyPr>
           <a:lstStyle>
@@ -4697,15 +4821,19 @@
               </a:defRPr>
             </a:lvl9pPr>
           </a:lstStyle>
-          <a:p/>
+          <a:p>
+            <a:endParaRPr/>
+          </a:p>
         </p:txBody>
       </p:sp>
       <p:sp>
         <p:nvSpPr>
           <p:cNvPr id="39" name="Google Shape;39;p7"/>
-          <p:cNvSpPr txBox="1"/>
+          <p:cNvSpPr txBox="1">
+            <a:spLocks noGrp="1"/>
+          </p:cNvSpPr>
           <p:nvPr>
-            <p:ph idx="1" type="body"/>
+            <p:ph type="body" idx="1"/>
           </p:nvPr>
         </p:nvSpPr>
         <p:spPr>
@@ -4718,11 +4846,11 @@
           </a:prstGeom>
         </p:spPr>
         <p:txBody>
-          <a:bodyPr anchorCtr="0" anchor="t" bIns="91425" lIns="91425" spcFirstLastPara="1" rIns="91425" wrap="square" tIns="91425">
+          <a:bodyPr spcFirstLastPara="1" wrap="square" lIns="91425" tIns="91425" rIns="91425" bIns="91425" anchor="t" anchorCtr="0">
             <a:normAutofit/>
           </a:bodyPr>
           <a:lstStyle>
-            <a:lvl1pPr indent="-311150" lvl="0" marL="457200">
+            <a:lvl1pPr marL="457200" lvl="0" indent="-311150">
               <a:spcBef>
                 <a:spcPts val="0"/>
               </a:spcBef>
@@ -4740,7 +4868,7 @@
                 </a:solidFill>
               </a:defRPr>
             </a:lvl1pPr>
-            <a:lvl2pPr indent="-298450" lvl="1" marL="914400">
+            <a:lvl2pPr marL="914400" lvl="1" indent="-298450">
               <a:spcBef>
                 <a:spcPts val="0"/>
               </a:spcBef>
@@ -4758,7 +4886,7 @@
                 </a:solidFill>
               </a:defRPr>
             </a:lvl2pPr>
-            <a:lvl3pPr indent="-298450" lvl="2" marL="1371600">
+            <a:lvl3pPr marL="1371600" lvl="2" indent="-298450">
               <a:spcBef>
                 <a:spcPts val="0"/>
               </a:spcBef>
@@ -4776,7 +4904,7 @@
                 </a:solidFill>
               </a:defRPr>
             </a:lvl3pPr>
-            <a:lvl4pPr indent="-298450" lvl="3" marL="1828800">
+            <a:lvl4pPr marL="1828800" lvl="3" indent="-298450">
               <a:spcBef>
                 <a:spcPts val="0"/>
               </a:spcBef>
@@ -4794,7 +4922,7 @@
                 </a:solidFill>
               </a:defRPr>
             </a:lvl4pPr>
-            <a:lvl5pPr indent="-298450" lvl="4" marL="2286000">
+            <a:lvl5pPr marL="2286000" lvl="4" indent="-298450">
               <a:spcBef>
                 <a:spcPts val="0"/>
               </a:spcBef>
@@ -4812,7 +4940,7 @@
                 </a:solidFill>
               </a:defRPr>
             </a:lvl5pPr>
-            <a:lvl6pPr indent="-298450" lvl="5" marL="2743200">
+            <a:lvl6pPr marL="2743200" lvl="5" indent="-298450">
               <a:spcBef>
                 <a:spcPts val="0"/>
               </a:spcBef>
@@ -4830,7 +4958,7 @@
                 </a:solidFill>
               </a:defRPr>
             </a:lvl6pPr>
-            <a:lvl7pPr indent="-298450" lvl="6" marL="3200400">
+            <a:lvl7pPr marL="3200400" lvl="6" indent="-298450">
               <a:spcBef>
                 <a:spcPts val="0"/>
               </a:spcBef>
@@ -4848,7 +4976,7 @@
                 </a:solidFill>
               </a:defRPr>
             </a:lvl7pPr>
-            <a:lvl8pPr indent="-298450" lvl="7" marL="3657600">
+            <a:lvl8pPr marL="3657600" lvl="7" indent="-298450">
               <a:spcBef>
                 <a:spcPts val="0"/>
               </a:spcBef>
@@ -4866,7 +4994,7 @@
                 </a:solidFill>
               </a:defRPr>
             </a:lvl8pPr>
-            <a:lvl9pPr indent="-298450" lvl="8" marL="4114800">
+            <a:lvl9pPr marL="4114800" lvl="8" indent="-298450">
               <a:spcBef>
                 <a:spcPts val="0"/>
               </a:spcBef>
@@ -4885,15 +5013,19 @@
               </a:defRPr>
             </a:lvl9pPr>
           </a:lstStyle>
-          <a:p/>
+          <a:p>
+            <a:endParaRPr/>
+          </a:p>
         </p:txBody>
       </p:sp>
       <p:sp>
         <p:nvSpPr>
           <p:cNvPr id="40" name="Google Shape;40;p7"/>
-          <p:cNvSpPr txBox="1"/>
+          <p:cNvSpPr txBox="1">
+            <a:spLocks noGrp="1"/>
+          </p:cNvSpPr>
           <p:nvPr>
-            <p:ph idx="12" type="sldNum"/>
+            <p:ph type="sldNum" idx="12"/>
           </p:nvPr>
         </p:nvSpPr>
         <p:spPr>
@@ -4906,7 +5038,7 @@
           </a:prstGeom>
         </p:spPr>
         <p:txBody>
-          <a:bodyPr anchorCtr="0" anchor="ctr" bIns="91425" lIns="91425" spcFirstLastPara="1" rIns="91425" wrap="square" tIns="91425">
+          <a:bodyPr spcFirstLastPara="1" wrap="square" lIns="91425" tIns="91425" rIns="91425" bIns="91425" anchor="ctr" anchorCtr="0">
             <a:normAutofit/>
           </a:bodyPr>
           <a:lstStyle>
@@ -4948,7 +5080,7 @@
             </a:lvl9pPr>
           </a:lstStyle>
           <a:p>
-            <a:pPr indent="0" lvl="0" marL="0" rtl="0" algn="r">
+            <a:pPr marL="0" lvl="0" indent="0" algn="r" rtl="0">
               <a:spcBef>
                 <a:spcPts val="0"/>
               </a:spcBef>
@@ -4974,18 +5106,19 @@
 </file>
 
 <file path=ppt/slideLayouts/slideLayout7.xml><?xml version="1.0" encoding="utf-8"?>
-<p:sldLayout xmlns:a="http://schemas.openxmlformats.org/drawingml/2006/main" xmlns:r="http://schemas.openxmlformats.org/officeDocument/2006/relationships" xmlns:mc="http://schemas.openxmlformats.org/markup-compatibility/2006" xmlns:mv="urn:schemas-microsoft-com:mac:vml" xmlns:p="http://schemas.openxmlformats.org/presentationml/2006/main" xmlns:c="http://schemas.openxmlformats.org/drawingml/2006/chart" xmlns:dgm="http://schemas.openxmlformats.org/drawingml/2006/diagram" xmlns:o="urn:schemas-microsoft-com:office:office" xmlns:v="urn:schemas-microsoft-com:vml" xmlns:pvml="urn:schemas-microsoft-com:office:powerpoint" xmlns:com="http://schemas.openxmlformats.org/drawingml/2006/compatibility" xmlns:p14="http://schemas.microsoft.com/office/powerpoint/2010/main" xmlns:p15="http://schemas.microsoft.com/office/powerpoint/2012/main" xmlns:ahyp="http://schemas.microsoft.com/office/drawing/2018/hyperlinkcolor" matchingName="Main point">
+<p:sldLayout xmlns:a="http://schemas.openxmlformats.org/drawingml/2006/main" xmlns:r="http://schemas.openxmlformats.org/officeDocument/2006/relationships" xmlns:p="http://schemas.openxmlformats.org/presentationml/2006/main" matchingName="Main point">
   <p:cSld name="MAIN_POINT">
     <p:bg>
       <p:bgPr>
         <a:solidFill>
           <a:schemeClr val="accent3"/>
         </a:solidFill>
+        <a:effectLst/>
       </p:bgPr>
     </p:bg>
     <p:spTree>
       <p:nvGrpSpPr>
-        <p:cNvPr id="41" name="Shape 41"/>
+        <p:cNvPr id="1" name="Shape 41"/>
         <p:cNvGrpSpPr/>
         <p:nvPr/>
       </p:nvGrpSpPr>
@@ -5000,7 +5133,9 @@
       <p:sp>
         <p:nvSpPr>
           <p:cNvPr id="42" name="Google Shape;42;p8"/>
-          <p:cNvSpPr txBox="1"/>
+          <p:cNvSpPr txBox="1">
+            <a:spLocks noGrp="1"/>
+          </p:cNvSpPr>
           <p:nvPr>
             <p:ph type="title"/>
           </p:nvPr>
@@ -5015,7 +5150,7 @@
           </a:prstGeom>
         </p:spPr>
         <p:txBody>
-          <a:bodyPr anchorCtr="0" anchor="ctr" bIns="91425" lIns="91425" spcFirstLastPara="1" rIns="91425" wrap="square" tIns="91425">
+          <a:bodyPr spcFirstLastPara="1" wrap="square" lIns="91425" tIns="91425" rIns="91425" bIns="91425" anchor="ctr" anchorCtr="0">
             <a:normAutofit/>
           </a:bodyPr>
           <a:lstStyle>
@@ -5119,15 +5254,19 @@
               <a:defRPr sz="3600"/>
             </a:lvl9pPr>
           </a:lstStyle>
-          <a:p/>
+          <a:p>
+            <a:endParaRPr/>
+          </a:p>
         </p:txBody>
       </p:sp>
       <p:sp>
         <p:nvSpPr>
           <p:cNvPr id="43" name="Google Shape;43;p8"/>
-          <p:cNvSpPr txBox="1"/>
+          <p:cNvSpPr txBox="1">
+            <a:spLocks noGrp="1"/>
+          </p:cNvSpPr>
           <p:nvPr>
-            <p:ph idx="12" type="sldNum"/>
+            <p:ph type="sldNum" idx="12"/>
           </p:nvPr>
         </p:nvSpPr>
         <p:spPr>
@@ -5140,7 +5279,7 @@
           </a:prstGeom>
         </p:spPr>
         <p:txBody>
-          <a:bodyPr anchorCtr="0" anchor="ctr" bIns="91425" lIns="91425" spcFirstLastPara="1" rIns="91425" wrap="square" tIns="91425">
+          <a:bodyPr spcFirstLastPara="1" wrap="square" lIns="91425" tIns="91425" rIns="91425" bIns="91425" anchor="ctr" anchorCtr="0">
             <a:normAutofit/>
           </a:bodyPr>
           <a:lstStyle>
@@ -5218,7 +5357,7 @@
             </a:lvl9pPr>
           </a:lstStyle>
           <a:p>
-            <a:pPr indent="0" lvl="0" marL="0" rtl="0" algn="r">
+            <a:pPr marL="0" lvl="0" indent="0" algn="r" rtl="0">
               <a:spcBef>
                 <a:spcPts val="0"/>
               </a:spcBef>
@@ -5244,11 +5383,11 @@
 </file>
 
 <file path=ppt/slideLayouts/slideLayout8.xml><?xml version="1.0" encoding="utf-8"?>
-<p:sldLayout xmlns:a="http://schemas.openxmlformats.org/drawingml/2006/main" xmlns:r="http://schemas.openxmlformats.org/officeDocument/2006/relationships" xmlns:mc="http://schemas.openxmlformats.org/markup-compatibility/2006" xmlns:mv="urn:schemas-microsoft-com:mac:vml" xmlns:p="http://schemas.openxmlformats.org/presentationml/2006/main" xmlns:c="http://schemas.openxmlformats.org/drawingml/2006/chart" xmlns:dgm="http://schemas.openxmlformats.org/drawingml/2006/diagram" xmlns:o="urn:schemas-microsoft-com:office:office" xmlns:v="urn:schemas-microsoft-com:vml" xmlns:pvml="urn:schemas-microsoft-com:office:powerpoint" xmlns:com="http://schemas.openxmlformats.org/drawingml/2006/compatibility" xmlns:p14="http://schemas.microsoft.com/office/powerpoint/2010/main" xmlns:p15="http://schemas.microsoft.com/office/powerpoint/2012/main" xmlns:ahyp="http://schemas.microsoft.com/office/drawing/2018/hyperlinkcolor" matchingName="Section title and description">
+<p:sldLayout xmlns:a="http://schemas.openxmlformats.org/drawingml/2006/main" xmlns:r="http://schemas.openxmlformats.org/officeDocument/2006/relationships" xmlns:p="http://schemas.openxmlformats.org/presentationml/2006/main" matchingName="Section title and description">
   <p:cSld name="SECTION_TITLE_AND_DESCRIPTION">
     <p:spTree>
       <p:nvGrpSpPr>
-        <p:cNvPr id="44" name="Shape 44"/>
+        <p:cNvPr id="1" name="Shape 44"/>
         <p:cNvGrpSpPr/>
         <p:nvPr/>
       </p:nvGrpSpPr>
@@ -5282,12 +5421,12 @@
           </a:ln>
         </p:spPr>
         <p:txBody>
-          <a:bodyPr anchorCtr="0" anchor="ctr" bIns="91425" lIns="91425" spcFirstLastPara="1" rIns="91425" wrap="square" tIns="91425">
+          <a:bodyPr spcFirstLastPara="1" wrap="square" lIns="91425" tIns="91425" rIns="91425" bIns="91425" anchor="ctr" anchorCtr="0">
             <a:noAutofit/>
           </a:bodyPr>
           <a:lstStyle/>
           <a:p>
-            <a:pPr indent="0" lvl="0" marL="0" rtl="0" algn="l">
+            <a:pPr marL="0" lvl="0" indent="0" algn="l" rtl="0">
               <a:spcBef>
                 <a:spcPts val="0"/>
               </a:spcBef>
@@ -5296,9 +5435,6 @@
               </a:spcAft>
               <a:buNone/>
             </a:pPr>
-            <a:r>
-              <a:t/>
-            </a:r>
             <a:endParaRPr/>
           </a:p>
         </p:txBody>
@@ -5306,7 +5442,9 @@
       <p:sp>
         <p:nvSpPr>
           <p:cNvPr id="46" name="Google Shape;46;p9"/>
-          <p:cNvSpPr txBox="1"/>
+          <p:cNvSpPr txBox="1">
+            <a:spLocks noGrp="1"/>
+          </p:cNvSpPr>
           <p:nvPr>
             <p:ph type="title"/>
           </p:nvPr>
@@ -5321,7 +5459,7 @@
           </a:prstGeom>
         </p:spPr>
         <p:txBody>
-          <a:bodyPr anchorCtr="0" anchor="t" bIns="91425" lIns="91425" spcFirstLastPara="1" rIns="91425" wrap="square" tIns="91425">
+          <a:bodyPr spcFirstLastPara="1" wrap="square" lIns="91425" tIns="91425" rIns="91425" bIns="91425" anchor="t" anchorCtr="0">
             <a:normAutofit/>
           </a:bodyPr>
           <a:lstStyle>
@@ -5488,15 +5626,19 @@
               </a:defRPr>
             </a:lvl9pPr>
           </a:lstStyle>
-          <a:p/>
+          <a:p>
+            <a:endParaRPr/>
+          </a:p>
         </p:txBody>
       </p:sp>
       <p:sp>
         <p:nvSpPr>
           <p:cNvPr id="47" name="Google Shape;47;p9"/>
-          <p:cNvSpPr txBox="1"/>
+          <p:cNvSpPr txBox="1">
+            <a:spLocks noGrp="1"/>
+          </p:cNvSpPr>
           <p:nvPr>
-            <p:ph idx="1" type="subTitle"/>
+            <p:ph type="subTitle" idx="1"/>
           </p:nvPr>
         </p:nvSpPr>
         <p:spPr>
@@ -5509,7 +5651,7 @@
           </a:prstGeom>
         </p:spPr>
         <p:txBody>
-          <a:bodyPr anchorCtr="0" anchor="t" bIns="91425" lIns="91425" spcFirstLastPara="1" rIns="91425" wrap="square" tIns="91425">
+          <a:bodyPr spcFirstLastPara="1" wrap="square" lIns="91425" tIns="91425" rIns="91425" bIns="91425" anchor="t" anchorCtr="0">
             <a:normAutofit/>
           </a:bodyPr>
           <a:lstStyle>
@@ -5703,15 +5845,19 @@
               </a:defRPr>
             </a:lvl9pPr>
           </a:lstStyle>
-          <a:p/>
+          <a:p>
+            <a:endParaRPr/>
+          </a:p>
         </p:txBody>
       </p:sp>
       <p:sp>
         <p:nvSpPr>
           <p:cNvPr id="48" name="Google Shape;48;p9"/>
-          <p:cNvSpPr txBox="1"/>
+          <p:cNvSpPr txBox="1">
+            <a:spLocks noGrp="1"/>
+          </p:cNvSpPr>
           <p:nvPr>
-            <p:ph idx="2" type="body"/>
+            <p:ph type="body" idx="2"/>
           </p:nvPr>
         </p:nvSpPr>
         <p:spPr>
@@ -5724,11 +5870,11 @@
           </a:prstGeom>
         </p:spPr>
         <p:txBody>
-          <a:bodyPr anchorCtr="0" anchor="t" bIns="91425" lIns="91425" spcFirstLastPara="1" rIns="91425" wrap="square" tIns="91425">
+          <a:bodyPr spcFirstLastPara="1" wrap="square" lIns="91425" tIns="91425" rIns="91425" bIns="91425" anchor="t" anchorCtr="0">
             <a:normAutofit/>
           </a:bodyPr>
           <a:lstStyle>
-            <a:lvl1pPr indent="-311150" lvl="0" marL="457200">
+            <a:lvl1pPr marL="457200" lvl="0" indent="-311150">
               <a:spcBef>
                 <a:spcPts val="0"/>
               </a:spcBef>
@@ -5739,7 +5885,7 @@
               <a:buChar char="●"/>
               <a:defRPr/>
             </a:lvl1pPr>
-            <a:lvl2pPr indent="-298450" lvl="1" marL="914400">
+            <a:lvl2pPr marL="914400" lvl="1" indent="-298450">
               <a:spcBef>
                 <a:spcPts val="0"/>
               </a:spcBef>
@@ -5750,7 +5896,7 @@
               <a:buChar char="○"/>
               <a:defRPr/>
             </a:lvl2pPr>
-            <a:lvl3pPr indent="-298450" lvl="2" marL="1371600">
+            <a:lvl3pPr marL="1371600" lvl="2" indent="-298450">
               <a:spcBef>
                 <a:spcPts val="0"/>
               </a:spcBef>
@@ -5761,7 +5907,7 @@
               <a:buChar char="■"/>
               <a:defRPr/>
             </a:lvl3pPr>
-            <a:lvl4pPr indent="-298450" lvl="3" marL="1828800">
+            <a:lvl4pPr marL="1828800" lvl="3" indent="-298450">
               <a:spcBef>
                 <a:spcPts val="0"/>
               </a:spcBef>
@@ -5772,7 +5918,7 @@
               <a:buChar char="●"/>
               <a:defRPr/>
             </a:lvl4pPr>
-            <a:lvl5pPr indent="-298450" lvl="4" marL="2286000">
+            <a:lvl5pPr marL="2286000" lvl="4" indent="-298450">
               <a:spcBef>
                 <a:spcPts val="0"/>
               </a:spcBef>
@@ -5783,7 +5929,7 @@
               <a:buChar char="○"/>
               <a:defRPr/>
             </a:lvl5pPr>
-            <a:lvl6pPr indent="-298450" lvl="5" marL="2743200">
+            <a:lvl6pPr marL="2743200" lvl="5" indent="-298450">
               <a:spcBef>
                 <a:spcPts val="0"/>
               </a:spcBef>
@@ -5794,7 +5940,7 @@
               <a:buChar char="■"/>
               <a:defRPr/>
             </a:lvl6pPr>
-            <a:lvl7pPr indent="-298450" lvl="6" marL="3200400">
+            <a:lvl7pPr marL="3200400" lvl="6" indent="-298450">
               <a:spcBef>
                 <a:spcPts val="0"/>
               </a:spcBef>
@@ -5805,7 +5951,7 @@
               <a:buChar char="●"/>
               <a:defRPr/>
             </a:lvl7pPr>
-            <a:lvl8pPr indent="-298450" lvl="7" marL="3657600">
+            <a:lvl8pPr marL="3657600" lvl="7" indent="-298450">
               <a:spcBef>
                 <a:spcPts val="0"/>
               </a:spcBef>
@@ -5816,7 +5962,7 @@
               <a:buChar char="○"/>
               <a:defRPr/>
             </a:lvl8pPr>
-            <a:lvl9pPr indent="-298450" lvl="8" marL="4114800">
+            <a:lvl9pPr marL="4114800" lvl="8" indent="-298450">
               <a:spcBef>
                 <a:spcPts val="0"/>
               </a:spcBef>
@@ -5828,15 +5974,19 @@
               <a:defRPr/>
             </a:lvl9pPr>
           </a:lstStyle>
-          <a:p/>
+          <a:p>
+            <a:endParaRPr/>
+          </a:p>
         </p:txBody>
       </p:sp>
       <p:sp>
         <p:nvSpPr>
           <p:cNvPr id="49" name="Google Shape;49;p9"/>
-          <p:cNvSpPr txBox="1"/>
+          <p:cNvSpPr txBox="1">
+            <a:spLocks noGrp="1"/>
+          </p:cNvSpPr>
           <p:nvPr>
-            <p:ph idx="12" type="sldNum"/>
+            <p:ph type="sldNum" idx="12"/>
           </p:nvPr>
         </p:nvSpPr>
         <p:spPr>
@@ -5849,7 +5999,7 @@
           </a:prstGeom>
         </p:spPr>
         <p:txBody>
-          <a:bodyPr anchorCtr="0" anchor="ctr" bIns="91425" lIns="91425" spcFirstLastPara="1" rIns="91425" wrap="square" tIns="91425">
+          <a:bodyPr spcFirstLastPara="1" wrap="square" lIns="91425" tIns="91425" rIns="91425" bIns="91425" anchor="ctr" anchorCtr="0">
             <a:normAutofit/>
           </a:bodyPr>
           <a:lstStyle>
@@ -5891,7 +6041,7 @@
             </a:lvl9pPr>
           </a:lstStyle>
           <a:p>
-            <a:pPr indent="0" lvl="0" marL="0" rtl="0" algn="r">
+            <a:pPr marL="0" lvl="0" indent="0" algn="r" rtl="0">
               <a:spcBef>
                 <a:spcPts val="0"/>
               </a:spcBef>
@@ -5917,11 +6067,11 @@
 </file>
 
 <file path=ppt/slideLayouts/slideLayout9.xml><?xml version="1.0" encoding="utf-8"?>
-<p:sldLayout xmlns:a="http://schemas.openxmlformats.org/drawingml/2006/main" xmlns:r="http://schemas.openxmlformats.org/officeDocument/2006/relationships" xmlns:mc="http://schemas.openxmlformats.org/markup-compatibility/2006" xmlns:mv="urn:schemas-microsoft-com:mac:vml" xmlns:p="http://schemas.openxmlformats.org/presentationml/2006/main" xmlns:c="http://schemas.openxmlformats.org/drawingml/2006/chart" xmlns:dgm="http://schemas.openxmlformats.org/drawingml/2006/diagram" xmlns:o="urn:schemas-microsoft-com:office:office" xmlns:v="urn:schemas-microsoft-com:vml" xmlns:pvml="urn:schemas-microsoft-com:office:powerpoint" xmlns:com="http://schemas.openxmlformats.org/drawingml/2006/compatibility" xmlns:p14="http://schemas.microsoft.com/office/powerpoint/2010/main" xmlns:p15="http://schemas.microsoft.com/office/powerpoint/2012/main" xmlns:ahyp="http://schemas.microsoft.com/office/drawing/2018/hyperlinkcolor" matchingName="Caption">
+<p:sldLayout xmlns:a="http://schemas.openxmlformats.org/drawingml/2006/main" xmlns:r="http://schemas.openxmlformats.org/officeDocument/2006/relationships" xmlns:p="http://schemas.openxmlformats.org/presentationml/2006/main" matchingName="Caption">
   <p:cSld name="CAPTION_ONLY">
     <p:spTree>
       <p:nvGrpSpPr>
-        <p:cNvPr id="50" name="Shape 50"/>
+        <p:cNvPr id="1" name="Shape 50"/>
         <p:cNvGrpSpPr/>
         <p:nvPr/>
       </p:nvGrpSpPr>
@@ -5955,12 +6105,12 @@
           </a:ln>
         </p:spPr>
         <p:txBody>
-          <a:bodyPr anchorCtr="0" anchor="ctr" bIns="91425" lIns="91425" spcFirstLastPara="1" rIns="91425" wrap="square" tIns="91425">
+          <a:bodyPr spcFirstLastPara="1" wrap="square" lIns="91425" tIns="91425" rIns="91425" bIns="91425" anchor="ctr" anchorCtr="0">
             <a:noAutofit/>
           </a:bodyPr>
           <a:lstStyle/>
           <a:p>
-            <a:pPr indent="0" lvl="0" marL="0" rtl="0" algn="l">
+            <a:pPr marL="0" lvl="0" indent="0" algn="l" rtl="0">
               <a:spcBef>
                 <a:spcPts val="0"/>
               </a:spcBef>
@@ -5969,9 +6119,6 @@
               </a:spcAft>
               <a:buNone/>
             </a:pPr>
-            <a:r>
-              <a:t/>
-            </a:r>
             <a:endParaRPr/>
           </a:p>
         </p:txBody>
@@ -5979,9 +6126,11 @@
       <p:sp>
         <p:nvSpPr>
           <p:cNvPr id="52" name="Google Shape;52;p10"/>
-          <p:cNvSpPr txBox="1"/>
+          <p:cNvSpPr txBox="1">
+            <a:spLocks noGrp="1"/>
+          </p:cNvSpPr>
           <p:nvPr>
-            <p:ph idx="1" type="body"/>
+            <p:ph type="body" idx="1"/>
           </p:nvPr>
         </p:nvSpPr>
         <p:spPr>
@@ -5994,11 +6143,11 @@
           </a:prstGeom>
         </p:spPr>
         <p:txBody>
-          <a:bodyPr anchorCtr="0" anchor="ctr" bIns="91425" lIns="91425" spcFirstLastPara="1" rIns="91425" wrap="square" tIns="91425">
+          <a:bodyPr spcFirstLastPara="1" wrap="square" lIns="91425" tIns="91425" rIns="91425" bIns="91425" anchor="ctr" anchorCtr="0">
             <a:normAutofit/>
           </a:bodyPr>
           <a:lstStyle>
-            <a:lvl1pPr indent="-228600" lvl="0" marL="457200">
+            <a:lvl1pPr marL="457200" lvl="0" indent="-228600">
               <a:lnSpc>
                 <a:spcPct val="100000"/>
               </a:lnSpc>
@@ -6025,15 +6174,19 @@
               </a:defRPr>
             </a:lvl1pPr>
           </a:lstStyle>
-          <a:p/>
+          <a:p>
+            <a:endParaRPr/>
+          </a:p>
         </p:txBody>
       </p:sp>
       <p:sp>
         <p:nvSpPr>
           <p:cNvPr id="53" name="Google Shape;53;p10"/>
-          <p:cNvSpPr txBox="1"/>
+          <p:cNvSpPr txBox="1">
+            <a:spLocks noGrp="1"/>
+          </p:cNvSpPr>
           <p:nvPr>
-            <p:ph idx="12" type="sldNum"/>
+            <p:ph type="sldNum" idx="12"/>
           </p:nvPr>
         </p:nvSpPr>
         <p:spPr>
@@ -6046,7 +6199,7 @@
           </a:prstGeom>
         </p:spPr>
         <p:txBody>
-          <a:bodyPr anchorCtr="0" anchor="ctr" bIns="91425" lIns="91425" spcFirstLastPara="1" rIns="91425" wrap="square" tIns="91425">
+          <a:bodyPr spcFirstLastPara="1" wrap="square" lIns="91425" tIns="91425" rIns="91425" bIns="91425" anchor="ctr" anchorCtr="0">
             <a:normAutofit/>
           </a:bodyPr>
           <a:lstStyle>
@@ -6124,7 +6277,7 @@
             </a:lvl9pPr>
           </a:lstStyle>
           <a:p>
-            <a:pPr indent="0" lvl="0" marL="0" rtl="0" algn="r">
+            <a:pPr marL="0" lvl="0" indent="0" algn="r" rtl="0">
               <a:spcBef>
                 <a:spcPts val="0"/>
               </a:spcBef>
@@ -6150,18 +6303,19 @@
 </file>
 
 <file path=ppt/slideMasters/slideMaster1.xml><?xml version="1.0" encoding="utf-8"?>
-<p:sldMaster xmlns:a="http://schemas.openxmlformats.org/drawingml/2006/main" xmlns:r="http://schemas.openxmlformats.org/officeDocument/2006/relationships" xmlns:mc="http://schemas.openxmlformats.org/markup-compatibility/2006" xmlns:mv="urn:schemas-microsoft-com:mac:vml" xmlns:p="http://schemas.openxmlformats.org/presentationml/2006/main" xmlns:c="http://schemas.openxmlformats.org/drawingml/2006/chart" xmlns:dgm="http://schemas.openxmlformats.org/drawingml/2006/diagram" xmlns:o="urn:schemas-microsoft-com:office:office" xmlns:v="urn:schemas-microsoft-com:vml" xmlns:pvml="urn:schemas-microsoft-com:office:powerpoint" xmlns:com="http://schemas.openxmlformats.org/drawingml/2006/compatibility" xmlns:p14="http://schemas.microsoft.com/office/powerpoint/2010/main" xmlns:p15="http://schemas.microsoft.com/office/powerpoint/2012/main" xmlns:ahyp="http://schemas.microsoft.com/office/drawing/2018/hyperlinkcolor">
+<p:sldMaster xmlns:a="http://schemas.openxmlformats.org/drawingml/2006/main" xmlns:r="http://schemas.openxmlformats.org/officeDocument/2006/relationships" xmlns:p="http://schemas.openxmlformats.org/presentationml/2006/main">
   <p:cSld name="paradigm">
     <p:bg>
       <p:bgPr>
         <a:solidFill>
           <a:schemeClr val="lt1"/>
         </a:solidFill>
+        <a:effectLst/>
       </p:bgPr>
     </p:bg>
     <p:spTree>
       <p:nvGrpSpPr>
-        <p:cNvPr id="5" name="Shape 5"/>
+        <p:cNvPr id="1" name="Shape 5"/>
         <p:cNvGrpSpPr/>
         <p:nvPr/>
       </p:nvGrpSpPr>
@@ -6176,7 +6330,9 @@
       <p:sp>
         <p:nvSpPr>
           <p:cNvPr id="6" name="Google Shape;6;p1"/>
-          <p:cNvSpPr txBox="1"/>
+          <p:cNvSpPr txBox="1">
+            <a:spLocks noGrp="1"/>
+          </p:cNvSpPr>
           <p:nvPr>
             <p:ph type="title"/>
           </p:nvPr>
@@ -6195,7 +6351,7 @@
           </a:ln>
         </p:spPr>
         <p:txBody>
-          <a:bodyPr anchorCtr="0" anchor="t" bIns="91425" lIns="91425" spcFirstLastPara="1" rIns="91425" wrap="square" tIns="91425">
+          <a:bodyPr spcFirstLastPara="1" wrap="square" lIns="91425" tIns="91425" rIns="91425" bIns="91425" anchor="t" anchorCtr="0">
             <a:normAutofit/>
           </a:bodyPr>
           <a:lstStyle>
@@ -6407,15 +6563,19 @@
               </a:defRPr>
             </a:lvl9pPr>
           </a:lstStyle>
-          <a:p/>
+          <a:p>
+            <a:endParaRPr/>
+          </a:p>
         </p:txBody>
       </p:sp>
       <p:sp>
         <p:nvSpPr>
           <p:cNvPr id="7" name="Google Shape;7;p1"/>
-          <p:cNvSpPr txBox="1"/>
+          <p:cNvSpPr txBox="1">
+            <a:spLocks noGrp="1"/>
+          </p:cNvSpPr>
           <p:nvPr>
-            <p:ph idx="1" type="body"/>
+            <p:ph type="body" idx="1"/>
           </p:nvPr>
         </p:nvSpPr>
         <p:spPr>
@@ -6432,11 +6592,11 @@
           </a:ln>
         </p:spPr>
         <p:txBody>
-          <a:bodyPr anchorCtr="0" anchor="t" bIns="91425" lIns="91425" spcFirstLastPara="1" rIns="91425" wrap="square" tIns="91425">
+          <a:bodyPr spcFirstLastPara="1" wrap="square" lIns="91425" tIns="91425" rIns="91425" bIns="91425" anchor="t" anchorCtr="0">
             <a:normAutofit/>
           </a:bodyPr>
           <a:lstStyle>
-            <a:lvl1pPr indent="-311150" lvl="0" marL="457200">
+            <a:lvl1pPr marL="457200" lvl="0" indent="-311150">
               <a:lnSpc>
                 <a:spcPct val="115000"/>
               </a:lnSpc>
@@ -6462,7 +6622,7 @@
                 <a:sym typeface="Roboto"/>
               </a:defRPr>
             </a:lvl1pPr>
-            <a:lvl2pPr indent="-298450" lvl="1" marL="914400">
+            <a:lvl2pPr marL="914400" lvl="1" indent="-298450">
               <a:lnSpc>
                 <a:spcPct val="115000"/>
               </a:lnSpc>
@@ -6488,7 +6648,7 @@
                 <a:sym typeface="Roboto"/>
               </a:defRPr>
             </a:lvl2pPr>
-            <a:lvl3pPr indent="-298450" lvl="2" marL="1371600">
+            <a:lvl3pPr marL="1371600" lvl="2" indent="-298450">
               <a:lnSpc>
                 <a:spcPct val="115000"/>
               </a:lnSpc>
@@ -6514,7 +6674,7 @@
                 <a:sym typeface="Roboto"/>
               </a:defRPr>
             </a:lvl3pPr>
-            <a:lvl4pPr indent="-298450" lvl="3" marL="1828800">
+            <a:lvl4pPr marL="1828800" lvl="3" indent="-298450">
               <a:lnSpc>
                 <a:spcPct val="115000"/>
               </a:lnSpc>
@@ -6540,7 +6700,7 @@
                 <a:sym typeface="Roboto"/>
               </a:defRPr>
             </a:lvl4pPr>
-            <a:lvl5pPr indent="-298450" lvl="4" marL="2286000">
+            <a:lvl5pPr marL="2286000" lvl="4" indent="-298450">
               <a:lnSpc>
                 <a:spcPct val="115000"/>
               </a:lnSpc>
@@ -6566,7 +6726,7 @@
                 <a:sym typeface="Roboto"/>
               </a:defRPr>
             </a:lvl5pPr>
-            <a:lvl6pPr indent="-298450" lvl="5" marL="2743200">
+            <a:lvl6pPr marL="2743200" lvl="5" indent="-298450">
               <a:lnSpc>
                 <a:spcPct val="115000"/>
               </a:lnSpc>
@@ -6592,7 +6752,7 @@
                 <a:sym typeface="Roboto"/>
               </a:defRPr>
             </a:lvl6pPr>
-            <a:lvl7pPr indent="-298450" lvl="6" marL="3200400">
+            <a:lvl7pPr marL="3200400" lvl="6" indent="-298450">
               <a:lnSpc>
                 <a:spcPct val="115000"/>
               </a:lnSpc>
@@ -6618,7 +6778,7 @@
                 <a:sym typeface="Roboto"/>
               </a:defRPr>
             </a:lvl7pPr>
-            <a:lvl8pPr indent="-298450" lvl="7" marL="3657600">
+            <a:lvl8pPr marL="3657600" lvl="7" indent="-298450">
               <a:lnSpc>
                 <a:spcPct val="115000"/>
               </a:lnSpc>
@@ -6644,7 +6804,7 @@
                 <a:sym typeface="Roboto"/>
               </a:defRPr>
             </a:lvl8pPr>
-            <a:lvl9pPr indent="-298450" lvl="8" marL="4114800">
+            <a:lvl9pPr marL="4114800" lvl="8" indent="-298450">
               <a:lnSpc>
                 <a:spcPct val="115000"/>
               </a:lnSpc>
@@ -6671,15 +6831,19 @@
               </a:defRPr>
             </a:lvl9pPr>
           </a:lstStyle>
-          <a:p/>
+          <a:p>
+            <a:endParaRPr/>
+          </a:p>
         </p:txBody>
       </p:sp>
       <p:sp>
         <p:nvSpPr>
           <p:cNvPr id="8" name="Google Shape;8;p1"/>
-          <p:cNvSpPr txBox="1"/>
+          <p:cNvSpPr txBox="1">
+            <a:spLocks noGrp="1"/>
+          </p:cNvSpPr>
           <p:nvPr>
-            <p:ph idx="12" type="sldNum"/>
+            <p:ph type="sldNum" idx="12"/>
           </p:nvPr>
         </p:nvSpPr>
         <p:spPr>
@@ -6696,7 +6860,7 @@
           </a:ln>
         </p:spPr>
         <p:txBody>
-          <a:bodyPr anchorCtr="0" anchor="ctr" bIns="91425" lIns="91425" spcFirstLastPara="1" rIns="91425" wrap="square" tIns="91425">
+          <a:bodyPr spcFirstLastPara="1" wrap="square" lIns="91425" tIns="91425" rIns="91425" bIns="91425" anchor="ctr" anchorCtr="0">
             <a:normAutofit/>
           </a:bodyPr>
           <a:lstStyle>
@@ -6810,7 +6974,7 @@
             </a:lvl9pPr>
           </a:lstStyle>
           <a:p>
-            <a:pPr indent="0" lvl="0" marL="0" rtl="0" algn="r">
+            <a:pPr marL="0" lvl="0" indent="0" algn="r" rtl="0">
               <a:spcBef>
                 <a:spcPts val="0"/>
               </a:spcBef>
@@ -6829,7 +6993,7 @@
       </p:sp>
     </p:spTree>
   </p:cSld>
-  <p:clrMap accent1="accent1" accent2="accent2" accent3="accent3" accent4="accent4" accent5="accent5" accent6="accent6" bg1="lt1" bg2="dk2" tx1="dk1" tx2="lt2" folHlink="folHlink" hlink="hlink"/>
+  <p:clrMap bg1="lt1" tx1="dk1" bg2="dk2" tx2="lt2" accent1="accent1" accent2="accent2" accent3="accent3" accent4="accent4" accent5="accent5" accent6="accent6" hlink="hlink" folHlink="folHlink"/>
   <p:sldLayoutIdLst>
     <p:sldLayoutId id="2147483648" r:id="rId1"/>
     <p:sldLayoutId id="2147483649" r:id="rId2"/>
@@ -6843,10 +7007,10 @@
     <p:sldLayoutId id="2147483657" r:id="rId10"/>
     <p:sldLayoutId id="2147483658" r:id="rId11"/>
   </p:sldLayoutIdLst>
-  <p:hf dt="0" ftr="0" hdr="0" sldNum="0"/>
+  <p:hf sldNum="0" hdr="0" ftr="0" dt="0"/>
   <p:txStyles>
     <p:titleStyle>
-      <a:defPPr lvl="0" marR="0" rtl="0" algn="l">
+      <a:defPPr marR="0" lvl="0" algn="l" rtl="0">
         <a:lnSpc>
           <a:spcPct val="100000"/>
         </a:lnSpc>
@@ -6857,7 +7021,7 @@
           <a:spcPts val="0"/>
         </a:spcAft>
       </a:defPPr>
-      <a:lvl1pPr lvl="0" marR="0" rtl="0" algn="l">
+      <a:lvl1pPr marR="0" lvl="0" algn="l" rtl="0">
         <a:lnSpc>
           <a:spcPct val="100000"/>
         </a:lnSpc>
@@ -6871,7 +7035,7 @@
           <a:srgbClr val="000000"/>
         </a:buClr>
         <a:buFont typeface="Arial"/>
-        <a:defRPr b="0" i="0" sz="1400" u="none" cap="none" strike="noStrike">
+        <a:defRPr sz="1400" b="0" i="0" u="none" strike="noStrike" cap="none">
           <a:solidFill>
             <a:srgbClr val="000000"/>
           </a:solidFill>
@@ -6881,7 +7045,7 @@
           <a:sym typeface="Arial"/>
         </a:defRPr>
       </a:lvl1pPr>
-      <a:lvl2pPr lvl="1" marR="0" rtl="0" algn="l">
+      <a:lvl2pPr marR="0" lvl="1" algn="l" rtl="0">
         <a:lnSpc>
           <a:spcPct val="100000"/>
         </a:lnSpc>
@@ -6895,7 +7059,7 @@
           <a:srgbClr val="000000"/>
         </a:buClr>
         <a:buFont typeface="Arial"/>
-        <a:defRPr b="0" i="0" sz="1400" u="none" cap="none" strike="noStrike">
+        <a:defRPr sz="1400" b="0" i="0" u="none" strike="noStrike" cap="none">
           <a:solidFill>
             <a:srgbClr val="000000"/>
           </a:solidFill>
@@ -6905,7 +7069,7 @@
           <a:sym typeface="Arial"/>
         </a:defRPr>
       </a:lvl2pPr>
-      <a:lvl3pPr lvl="2" marR="0" rtl="0" algn="l">
+      <a:lvl3pPr marR="0" lvl="2" algn="l" rtl="0">
         <a:lnSpc>
           <a:spcPct val="100000"/>
         </a:lnSpc>
@@ -6919,7 +7083,7 @@
           <a:srgbClr val="000000"/>
         </a:buClr>
         <a:buFont typeface="Arial"/>
-        <a:defRPr b="0" i="0" sz="1400" u="none" cap="none" strike="noStrike">
+        <a:defRPr sz="1400" b="0" i="0" u="none" strike="noStrike" cap="none">
           <a:solidFill>
             <a:srgbClr val="000000"/>
           </a:solidFill>
@@ -6929,7 +7093,7 @@
           <a:sym typeface="Arial"/>
         </a:defRPr>
       </a:lvl3pPr>
-      <a:lvl4pPr lvl="3" marR="0" rtl="0" algn="l">
+      <a:lvl4pPr marR="0" lvl="3" algn="l" rtl="0">
         <a:lnSpc>
           <a:spcPct val="100000"/>
         </a:lnSpc>
@@ -6943,7 +7107,7 @@
           <a:srgbClr val="000000"/>
         </a:buClr>
         <a:buFont typeface="Arial"/>
-        <a:defRPr b="0" i="0" sz="1400" u="none" cap="none" strike="noStrike">
+        <a:defRPr sz="1400" b="0" i="0" u="none" strike="noStrike" cap="none">
           <a:solidFill>
             <a:srgbClr val="000000"/>
           </a:solidFill>
@@ -6953,7 +7117,7 @@
           <a:sym typeface="Arial"/>
         </a:defRPr>
       </a:lvl4pPr>
-      <a:lvl5pPr lvl="4" marR="0" rtl="0" algn="l">
+      <a:lvl5pPr marR="0" lvl="4" algn="l" rtl="0">
         <a:lnSpc>
           <a:spcPct val="100000"/>
         </a:lnSpc>
@@ -6967,7 +7131,7 @@
           <a:srgbClr val="000000"/>
         </a:buClr>
         <a:buFont typeface="Arial"/>
-        <a:defRPr b="0" i="0" sz="1400" u="none" cap="none" strike="noStrike">
+        <a:defRPr sz="1400" b="0" i="0" u="none" strike="noStrike" cap="none">
           <a:solidFill>
             <a:srgbClr val="000000"/>
           </a:solidFill>
@@ -6977,7 +7141,7 @@
           <a:sym typeface="Arial"/>
         </a:defRPr>
       </a:lvl5pPr>
-      <a:lvl6pPr lvl="5" marR="0" rtl="0" algn="l">
+      <a:lvl6pPr marR="0" lvl="5" algn="l" rtl="0">
         <a:lnSpc>
           <a:spcPct val="100000"/>
         </a:lnSpc>
@@ -6991,7 +7155,7 @@
           <a:srgbClr val="000000"/>
         </a:buClr>
         <a:buFont typeface="Arial"/>
-        <a:defRPr b="0" i="0" sz="1400" u="none" cap="none" strike="noStrike">
+        <a:defRPr sz="1400" b="0" i="0" u="none" strike="noStrike" cap="none">
           <a:solidFill>
             <a:srgbClr val="000000"/>
           </a:solidFill>
@@ -7001,7 +7165,7 @@
           <a:sym typeface="Arial"/>
         </a:defRPr>
       </a:lvl6pPr>
-      <a:lvl7pPr lvl="6" marR="0" rtl="0" algn="l">
+      <a:lvl7pPr marR="0" lvl="6" algn="l" rtl="0">
         <a:lnSpc>
           <a:spcPct val="100000"/>
         </a:lnSpc>
@@ -7015,7 +7179,7 @@
           <a:srgbClr val="000000"/>
         </a:buClr>
         <a:buFont typeface="Arial"/>
-        <a:defRPr b="0" i="0" sz="1400" u="none" cap="none" strike="noStrike">
+        <a:defRPr sz="1400" b="0" i="0" u="none" strike="noStrike" cap="none">
           <a:solidFill>
             <a:srgbClr val="000000"/>
           </a:solidFill>
@@ -7025,7 +7189,7 @@
           <a:sym typeface="Arial"/>
         </a:defRPr>
       </a:lvl7pPr>
-      <a:lvl8pPr lvl="7" marR="0" rtl="0" algn="l">
+      <a:lvl8pPr marR="0" lvl="7" algn="l" rtl="0">
         <a:lnSpc>
           <a:spcPct val="100000"/>
         </a:lnSpc>
@@ -7039,7 +7203,7 @@
           <a:srgbClr val="000000"/>
         </a:buClr>
         <a:buFont typeface="Arial"/>
-        <a:defRPr b="0" i="0" sz="1400" u="none" cap="none" strike="noStrike">
+        <a:defRPr sz="1400" b="0" i="0" u="none" strike="noStrike" cap="none">
           <a:solidFill>
             <a:srgbClr val="000000"/>
           </a:solidFill>
@@ -7049,7 +7213,7 @@
           <a:sym typeface="Arial"/>
         </a:defRPr>
       </a:lvl8pPr>
-      <a:lvl9pPr lvl="8" marR="0" rtl="0" algn="l">
+      <a:lvl9pPr marR="0" lvl="8" algn="l" rtl="0">
         <a:lnSpc>
           <a:spcPct val="100000"/>
         </a:lnSpc>
@@ -7063,7 +7227,7 @@
           <a:srgbClr val="000000"/>
         </a:buClr>
         <a:buFont typeface="Arial"/>
-        <a:defRPr b="0" i="0" sz="1400" u="none" cap="none" strike="noStrike">
+        <a:defRPr sz="1400" b="0" i="0" u="none" strike="noStrike" cap="none">
           <a:solidFill>
             <a:srgbClr val="000000"/>
           </a:solidFill>
@@ -7075,7 +7239,7 @@
       </a:lvl9pPr>
     </p:titleStyle>
     <p:bodyStyle>
-      <a:defPPr lvl="0" marR="0" rtl="0" algn="l">
+      <a:defPPr marR="0" lvl="0" algn="l" rtl="0">
         <a:lnSpc>
           <a:spcPct val="100000"/>
         </a:lnSpc>
@@ -7086,7 +7250,7 @@
           <a:spcPts val="0"/>
         </a:spcAft>
       </a:defPPr>
-      <a:lvl1pPr lvl="0" marR="0" rtl="0" algn="l">
+      <a:lvl1pPr marR="0" lvl="0" algn="l" rtl="0">
         <a:lnSpc>
           <a:spcPct val="100000"/>
         </a:lnSpc>
@@ -7100,7 +7264,7 @@
           <a:srgbClr val="000000"/>
         </a:buClr>
         <a:buFont typeface="Arial"/>
-        <a:defRPr b="0" i="0" sz="1400" u="none" cap="none" strike="noStrike">
+        <a:defRPr sz="1400" b="0" i="0" u="none" strike="noStrike" cap="none">
           <a:solidFill>
             <a:srgbClr val="000000"/>
           </a:solidFill>
@@ -7110,7 +7274,7 @@
           <a:sym typeface="Arial"/>
         </a:defRPr>
       </a:lvl1pPr>
-      <a:lvl2pPr lvl="1" marR="0" rtl="0" algn="l">
+      <a:lvl2pPr marR="0" lvl="1" algn="l" rtl="0">
         <a:lnSpc>
           <a:spcPct val="100000"/>
         </a:lnSpc>
@@ -7124,7 +7288,7 @@
           <a:srgbClr val="000000"/>
         </a:buClr>
         <a:buFont typeface="Arial"/>
-        <a:defRPr b="0" i="0" sz="1400" u="none" cap="none" strike="noStrike">
+        <a:defRPr sz="1400" b="0" i="0" u="none" strike="noStrike" cap="none">
           <a:solidFill>
             <a:srgbClr val="000000"/>
           </a:solidFill>
@@ -7134,7 +7298,7 @@
           <a:sym typeface="Arial"/>
         </a:defRPr>
       </a:lvl2pPr>
-      <a:lvl3pPr lvl="2" marR="0" rtl="0" algn="l">
+      <a:lvl3pPr marR="0" lvl="2" algn="l" rtl="0">
         <a:lnSpc>
           <a:spcPct val="100000"/>
         </a:lnSpc>
@@ -7148,7 +7312,7 @@
           <a:srgbClr val="000000"/>
         </a:buClr>
         <a:buFont typeface="Arial"/>
-        <a:defRPr b="0" i="0" sz="1400" u="none" cap="none" strike="noStrike">
+        <a:defRPr sz="1400" b="0" i="0" u="none" strike="noStrike" cap="none">
           <a:solidFill>
             <a:srgbClr val="000000"/>
           </a:solidFill>
@@ -7158,7 +7322,7 @@
           <a:sym typeface="Arial"/>
         </a:defRPr>
       </a:lvl3pPr>
-      <a:lvl4pPr lvl="3" marR="0" rtl="0" algn="l">
+      <a:lvl4pPr marR="0" lvl="3" algn="l" rtl="0">
         <a:lnSpc>
           <a:spcPct val="100000"/>
         </a:lnSpc>
@@ -7172,7 +7336,7 @@
           <a:srgbClr val="000000"/>
         </a:buClr>
         <a:buFont typeface="Arial"/>
-        <a:defRPr b="0" i="0" sz="1400" u="none" cap="none" strike="noStrike">
+        <a:defRPr sz="1400" b="0" i="0" u="none" strike="noStrike" cap="none">
           <a:solidFill>
             <a:srgbClr val="000000"/>
           </a:solidFill>
@@ -7182,7 +7346,7 @@
           <a:sym typeface="Arial"/>
         </a:defRPr>
       </a:lvl4pPr>
-      <a:lvl5pPr lvl="4" marR="0" rtl="0" algn="l">
+      <a:lvl5pPr marR="0" lvl="4" algn="l" rtl="0">
         <a:lnSpc>
           <a:spcPct val="100000"/>
         </a:lnSpc>
@@ -7196,7 +7360,7 @@
           <a:srgbClr val="000000"/>
         </a:buClr>
         <a:buFont typeface="Arial"/>
-        <a:defRPr b="0" i="0" sz="1400" u="none" cap="none" strike="noStrike">
+        <a:defRPr sz="1400" b="0" i="0" u="none" strike="noStrike" cap="none">
           <a:solidFill>
             <a:srgbClr val="000000"/>
           </a:solidFill>
@@ -7206,7 +7370,7 @@
           <a:sym typeface="Arial"/>
         </a:defRPr>
       </a:lvl5pPr>
-      <a:lvl6pPr lvl="5" marR="0" rtl="0" algn="l">
+      <a:lvl6pPr marR="0" lvl="5" algn="l" rtl="0">
         <a:lnSpc>
           <a:spcPct val="100000"/>
         </a:lnSpc>
@@ -7220,7 +7384,7 @@
           <a:srgbClr val="000000"/>
         </a:buClr>
         <a:buFont typeface="Arial"/>
-        <a:defRPr b="0" i="0" sz="1400" u="none" cap="none" strike="noStrike">
+        <a:defRPr sz="1400" b="0" i="0" u="none" strike="noStrike" cap="none">
           <a:solidFill>
             <a:srgbClr val="000000"/>
           </a:solidFill>
@@ -7230,7 +7394,7 @@
           <a:sym typeface="Arial"/>
         </a:defRPr>
       </a:lvl6pPr>
-      <a:lvl7pPr lvl="6" marR="0" rtl="0" algn="l">
+      <a:lvl7pPr marR="0" lvl="6" algn="l" rtl="0">
         <a:lnSpc>
           <a:spcPct val="100000"/>
         </a:lnSpc>
@@ -7244,7 +7408,7 @@
           <a:srgbClr val="000000"/>
         </a:buClr>
         <a:buFont typeface="Arial"/>
-        <a:defRPr b="0" i="0" sz="1400" u="none" cap="none" strike="noStrike">
+        <a:defRPr sz="1400" b="0" i="0" u="none" strike="noStrike" cap="none">
           <a:solidFill>
             <a:srgbClr val="000000"/>
           </a:solidFill>
@@ -7254,7 +7418,7 @@
           <a:sym typeface="Arial"/>
         </a:defRPr>
       </a:lvl7pPr>
-      <a:lvl8pPr lvl="7" marR="0" rtl="0" algn="l">
+      <a:lvl8pPr marR="0" lvl="7" algn="l" rtl="0">
         <a:lnSpc>
           <a:spcPct val="100000"/>
         </a:lnSpc>
@@ -7268,7 +7432,7 @@
           <a:srgbClr val="000000"/>
         </a:buClr>
         <a:buFont typeface="Arial"/>
-        <a:defRPr b="0" i="0" sz="1400" u="none" cap="none" strike="noStrike">
+        <a:defRPr sz="1400" b="0" i="0" u="none" strike="noStrike" cap="none">
           <a:solidFill>
             <a:srgbClr val="000000"/>
           </a:solidFill>
@@ -7278,7 +7442,7 @@
           <a:sym typeface="Arial"/>
         </a:defRPr>
       </a:lvl8pPr>
-      <a:lvl9pPr lvl="8" marR="0" rtl="0" algn="l">
+      <a:lvl9pPr marR="0" lvl="8" algn="l" rtl="0">
         <a:lnSpc>
           <a:spcPct val="100000"/>
         </a:lnSpc>
@@ -7292,7 +7456,7 @@
           <a:srgbClr val="000000"/>
         </a:buClr>
         <a:buFont typeface="Arial"/>
-        <a:defRPr b="0" i="0" sz="1400" u="none" cap="none" strike="noStrike">
+        <a:defRPr sz="1400" b="0" i="0" u="none" strike="noStrike" cap="none">
           <a:solidFill>
             <a:srgbClr val="000000"/>
           </a:solidFill>
@@ -7304,7 +7468,7 @@
       </a:lvl9pPr>
     </p:bodyStyle>
     <p:otherStyle>
-      <a:defPPr lvl="0" marR="0" rtl="0" algn="l">
+      <a:defPPr marR="0" lvl="0" algn="l" rtl="0">
         <a:lnSpc>
           <a:spcPct val="100000"/>
         </a:lnSpc>
@@ -7315,7 +7479,7 @@
           <a:spcPts val="0"/>
         </a:spcAft>
       </a:defPPr>
-      <a:lvl1pPr lvl="0" marR="0" rtl="0" algn="l">
+      <a:lvl1pPr marR="0" lvl="0" algn="l" rtl="0">
         <a:lnSpc>
           <a:spcPct val="100000"/>
         </a:lnSpc>
@@ -7329,7 +7493,7 @@
           <a:srgbClr val="000000"/>
         </a:buClr>
         <a:buFont typeface="Arial"/>
-        <a:defRPr b="0" i="0" sz="1400" u="none" cap="none" strike="noStrike">
+        <a:defRPr sz="1400" b="0" i="0" u="none" strike="noStrike" cap="none">
           <a:solidFill>
             <a:srgbClr val="000000"/>
           </a:solidFill>
@@ -7339,7 +7503,7 @@
           <a:sym typeface="Arial"/>
         </a:defRPr>
       </a:lvl1pPr>
-      <a:lvl2pPr lvl="1" marR="0" rtl="0" algn="l">
+      <a:lvl2pPr marR="0" lvl="1" algn="l" rtl="0">
         <a:lnSpc>
           <a:spcPct val="100000"/>
         </a:lnSpc>
@@ -7353,7 +7517,7 @@
           <a:srgbClr val="000000"/>
         </a:buClr>
         <a:buFont typeface="Arial"/>
-        <a:defRPr b="0" i="0" sz="1400" u="none" cap="none" strike="noStrike">
+        <a:defRPr sz="1400" b="0" i="0" u="none" strike="noStrike" cap="none">
           <a:solidFill>
             <a:srgbClr val="000000"/>
           </a:solidFill>
@@ -7363,7 +7527,7 @@
           <a:sym typeface="Arial"/>
         </a:defRPr>
       </a:lvl2pPr>
-      <a:lvl3pPr lvl="2" marR="0" rtl="0" algn="l">
+      <a:lvl3pPr marR="0" lvl="2" algn="l" rtl="0">
         <a:lnSpc>
           <a:spcPct val="100000"/>
         </a:lnSpc>
@@ -7377,7 +7541,7 @@
           <a:srgbClr val="000000"/>
         </a:buClr>
         <a:buFont typeface="Arial"/>
-        <a:defRPr b="0" i="0" sz="1400" u="none" cap="none" strike="noStrike">
+        <a:defRPr sz="1400" b="0" i="0" u="none" strike="noStrike" cap="none">
           <a:solidFill>
             <a:srgbClr val="000000"/>
           </a:solidFill>
@@ -7387,7 +7551,7 @@
           <a:sym typeface="Arial"/>
         </a:defRPr>
       </a:lvl3pPr>
-      <a:lvl4pPr lvl="3" marR="0" rtl="0" algn="l">
+      <a:lvl4pPr marR="0" lvl="3" algn="l" rtl="0">
         <a:lnSpc>
           <a:spcPct val="100000"/>
         </a:lnSpc>
@@ -7401,7 +7565,7 @@
           <a:srgbClr val="000000"/>
         </a:buClr>
         <a:buFont typeface="Arial"/>
-        <a:defRPr b="0" i="0" sz="1400" u="none" cap="none" strike="noStrike">
+        <a:defRPr sz="1400" b="0" i="0" u="none" strike="noStrike" cap="none">
           <a:solidFill>
             <a:srgbClr val="000000"/>
           </a:solidFill>
@@ -7411,7 +7575,7 @@
           <a:sym typeface="Arial"/>
         </a:defRPr>
       </a:lvl4pPr>
-      <a:lvl5pPr lvl="4" marR="0" rtl="0" algn="l">
+      <a:lvl5pPr marR="0" lvl="4" algn="l" rtl="0">
         <a:lnSpc>
           <a:spcPct val="100000"/>
         </a:lnSpc>
@@ -7425,7 +7589,7 @@
           <a:srgbClr val="000000"/>
         </a:buClr>
         <a:buFont typeface="Arial"/>
-        <a:defRPr b="0" i="0" sz="1400" u="none" cap="none" strike="noStrike">
+        <a:defRPr sz="1400" b="0" i="0" u="none" strike="noStrike" cap="none">
           <a:solidFill>
             <a:srgbClr val="000000"/>
           </a:solidFill>
@@ -7435,7 +7599,7 @@
           <a:sym typeface="Arial"/>
         </a:defRPr>
       </a:lvl5pPr>
-      <a:lvl6pPr lvl="5" marR="0" rtl="0" algn="l">
+      <a:lvl6pPr marR="0" lvl="5" algn="l" rtl="0">
         <a:lnSpc>
           <a:spcPct val="100000"/>
         </a:lnSpc>
@@ -7449,7 +7613,7 @@
           <a:srgbClr val="000000"/>
         </a:buClr>
         <a:buFont typeface="Arial"/>
-        <a:defRPr b="0" i="0" sz="1400" u="none" cap="none" strike="noStrike">
+        <a:defRPr sz="1400" b="0" i="0" u="none" strike="noStrike" cap="none">
           <a:solidFill>
             <a:srgbClr val="000000"/>
           </a:solidFill>
@@ -7459,7 +7623,7 @@
           <a:sym typeface="Arial"/>
         </a:defRPr>
       </a:lvl6pPr>
-      <a:lvl7pPr lvl="6" marR="0" rtl="0" algn="l">
+      <a:lvl7pPr marR="0" lvl="6" algn="l" rtl="0">
         <a:lnSpc>
           <a:spcPct val="100000"/>
         </a:lnSpc>
@@ -7473,7 +7637,7 @@
           <a:srgbClr val="000000"/>
         </a:buClr>
         <a:buFont typeface="Arial"/>
-        <a:defRPr b="0" i="0" sz="1400" u="none" cap="none" strike="noStrike">
+        <a:defRPr sz="1400" b="0" i="0" u="none" strike="noStrike" cap="none">
           <a:solidFill>
             <a:srgbClr val="000000"/>
           </a:solidFill>
@@ -7483,7 +7647,7 @@
           <a:sym typeface="Arial"/>
         </a:defRPr>
       </a:lvl7pPr>
-      <a:lvl8pPr lvl="7" marR="0" rtl="0" algn="l">
+      <a:lvl8pPr marR="0" lvl="7" algn="l" rtl="0">
         <a:lnSpc>
           <a:spcPct val="100000"/>
         </a:lnSpc>
@@ -7497,7 +7661,7 @@
           <a:srgbClr val="000000"/>
         </a:buClr>
         <a:buFont typeface="Arial"/>
-        <a:defRPr b="0" i="0" sz="1400" u="none" cap="none" strike="noStrike">
+        <a:defRPr sz="1400" b="0" i="0" u="none" strike="noStrike" cap="none">
           <a:solidFill>
             <a:srgbClr val="000000"/>
           </a:solidFill>
@@ -7507,7 +7671,7 @@
           <a:sym typeface="Arial"/>
         </a:defRPr>
       </a:lvl8pPr>
-      <a:lvl9pPr lvl="8" marR="0" rtl="0" algn="l">
+      <a:lvl9pPr marR="0" lvl="8" algn="l" rtl="0">
         <a:lnSpc>
           <a:spcPct val="100000"/>
         </a:lnSpc>
@@ -7521,7 +7685,7 @@
           <a:srgbClr val="000000"/>
         </a:buClr>
         <a:buFont typeface="Arial"/>
-        <a:defRPr b="0" i="0" sz="1400" u="none" cap="none" strike="noStrike">
+        <a:defRPr sz="1400" b="0" i="0" u="none" strike="noStrike" cap="none">
           <a:solidFill>
             <a:srgbClr val="000000"/>
           </a:solidFill>
@@ -7537,11 +7701,11 @@
 </file>
 
 <file path=ppt/slides/slide1.xml><?xml version="1.0" encoding="utf-8"?>
-<p:sld xmlns:a="http://schemas.openxmlformats.org/drawingml/2006/main" xmlns:r="http://schemas.openxmlformats.org/officeDocument/2006/relationships" xmlns:mc="http://schemas.openxmlformats.org/markup-compatibility/2006" xmlns:mv="urn:schemas-microsoft-com:mac:vml" xmlns:p="http://schemas.openxmlformats.org/presentationml/2006/main" xmlns:c="http://schemas.openxmlformats.org/drawingml/2006/chart" xmlns:dgm="http://schemas.openxmlformats.org/drawingml/2006/diagram" xmlns:o="urn:schemas-microsoft-com:office:office" xmlns:v="urn:schemas-microsoft-com:vml" xmlns:pvml="urn:schemas-microsoft-com:office:powerpoint" xmlns:com="http://schemas.openxmlformats.org/drawingml/2006/compatibility" xmlns:p14="http://schemas.microsoft.com/office/powerpoint/2010/main" xmlns:p15="http://schemas.microsoft.com/office/powerpoint/2012/main" xmlns:ahyp="http://schemas.microsoft.com/office/drawing/2018/hyperlinkcolor">
+<p:sld xmlns:a="http://schemas.openxmlformats.org/drawingml/2006/main" xmlns:r="http://schemas.openxmlformats.org/officeDocument/2006/relationships" xmlns:p="http://schemas.openxmlformats.org/presentationml/2006/main">
   <p:cSld>
     <p:spTree>
       <p:nvGrpSpPr>
-        <p:cNvPr id="63" name="Shape 63"/>
+        <p:cNvPr id="1" name="Shape 63"/>
         <p:cNvGrpSpPr/>
         <p:nvPr/>
       </p:nvGrpSpPr>
@@ -7556,7 +7720,9 @@
       <p:sp>
         <p:nvSpPr>
           <p:cNvPr id="64" name="Google Shape;64;p13"/>
-          <p:cNvSpPr txBox="1"/>
+          <p:cNvSpPr txBox="1">
+            <a:spLocks noGrp="1"/>
+          </p:cNvSpPr>
           <p:nvPr>
             <p:ph type="ctrTitle"/>
           </p:nvPr>
@@ -7571,12 +7737,12 @@
           </a:prstGeom>
         </p:spPr>
         <p:txBody>
-          <a:bodyPr anchorCtr="0" anchor="t" bIns="91425" lIns="91425" spcFirstLastPara="1" rIns="91425" wrap="square" tIns="91425">
+          <a:bodyPr spcFirstLastPara="1" wrap="square" lIns="91425" tIns="91425" rIns="91425" bIns="91425" anchor="t" anchorCtr="0">
             <a:normAutofit/>
           </a:bodyPr>
           <a:lstStyle/>
           <a:p>
-            <a:pPr indent="0" lvl="0" marL="0" rtl="0" algn="l">
+            <a:pPr marL="0" lvl="0" indent="0" algn="l" rtl="0">
               <a:spcBef>
                 <a:spcPts val="0"/>
               </a:spcBef>
@@ -7596,9 +7762,11 @@
       <p:sp>
         <p:nvSpPr>
           <p:cNvPr id="65" name="Google Shape;65;p13"/>
-          <p:cNvSpPr txBox="1"/>
+          <p:cNvSpPr txBox="1">
+            <a:spLocks noGrp="1"/>
+          </p:cNvSpPr>
           <p:nvPr>
-            <p:ph idx="1" type="subTitle"/>
+            <p:ph type="subTitle" idx="1"/>
           </p:nvPr>
         </p:nvSpPr>
         <p:spPr>
@@ -7611,12 +7779,12 @@
           </a:prstGeom>
         </p:spPr>
         <p:txBody>
-          <a:bodyPr anchorCtr="0" anchor="t" bIns="91425" lIns="91425" spcFirstLastPara="1" rIns="91425" wrap="square" tIns="91425">
+          <a:bodyPr spcFirstLastPara="1" wrap="square" lIns="91425" tIns="91425" rIns="91425" bIns="91425" anchor="t" anchorCtr="0">
             <a:normAutofit/>
           </a:bodyPr>
           <a:lstStyle/>
           <a:p>
-            <a:pPr indent="0" lvl="0" marL="0" rtl="0" algn="l">
+            <a:pPr marL="0" lvl="0" indent="0" algn="l" rtl="0">
               <a:spcBef>
                 <a:spcPts val="0"/>
               </a:spcBef>
@@ -7642,11 +7810,11 @@
 </file>
 
 <file path=ppt/slides/slide2.xml><?xml version="1.0" encoding="utf-8"?>
-<p:sld xmlns:a="http://schemas.openxmlformats.org/drawingml/2006/main" xmlns:r="http://schemas.openxmlformats.org/officeDocument/2006/relationships" xmlns:mc="http://schemas.openxmlformats.org/markup-compatibility/2006" xmlns:mv="urn:schemas-microsoft-com:mac:vml" xmlns:p="http://schemas.openxmlformats.org/presentationml/2006/main" xmlns:c="http://schemas.openxmlformats.org/drawingml/2006/chart" xmlns:dgm="http://schemas.openxmlformats.org/drawingml/2006/diagram" xmlns:o="urn:schemas-microsoft-com:office:office" xmlns:v="urn:schemas-microsoft-com:vml" xmlns:pvml="urn:schemas-microsoft-com:office:powerpoint" xmlns:com="http://schemas.openxmlformats.org/drawingml/2006/compatibility" xmlns:p14="http://schemas.microsoft.com/office/powerpoint/2010/main" xmlns:p15="http://schemas.microsoft.com/office/powerpoint/2012/main" xmlns:ahyp="http://schemas.microsoft.com/office/drawing/2018/hyperlinkcolor">
+<p:sld xmlns:a="http://schemas.openxmlformats.org/drawingml/2006/main" xmlns:r="http://schemas.openxmlformats.org/officeDocument/2006/relationships" xmlns:p="http://schemas.openxmlformats.org/presentationml/2006/main">
   <p:cSld>
     <p:spTree>
       <p:nvGrpSpPr>
-        <p:cNvPr id="69" name="Shape 69"/>
+        <p:cNvPr id="1" name="Shape 69"/>
         <p:cNvGrpSpPr/>
         <p:nvPr/>
       </p:nvGrpSpPr>
@@ -7661,7 +7829,9 @@
       <p:sp>
         <p:nvSpPr>
           <p:cNvPr id="70" name="Google Shape;70;p14"/>
-          <p:cNvSpPr txBox="1"/>
+          <p:cNvSpPr txBox="1">
+            <a:spLocks noGrp="1"/>
+          </p:cNvSpPr>
           <p:nvPr>
             <p:ph type="title"/>
           </p:nvPr>
@@ -7676,12 +7846,12 @@
           </a:prstGeom>
         </p:spPr>
         <p:txBody>
-          <a:bodyPr anchorCtr="0" anchor="t" bIns="91425" lIns="91425" spcFirstLastPara="1" rIns="91425" wrap="square" tIns="91425">
+          <a:bodyPr spcFirstLastPara="1" wrap="square" lIns="91425" tIns="91425" rIns="91425" bIns="91425" anchor="t" anchorCtr="0">
             <a:normAutofit/>
           </a:bodyPr>
           <a:lstStyle/>
           <a:p>
-            <a:pPr indent="0" lvl="0" marL="0" rtl="0" algn="l">
+            <a:pPr marL="0" lvl="0" indent="0" algn="l" rtl="0">
               <a:spcBef>
                 <a:spcPts val="0"/>
               </a:spcBef>
@@ -7718,12 +7888,12 @@
           </a:ln>
         </p:spPr>
         <p:txBody>
-          <a:bodyPr anchorCtr="0" anchor="t" bIns="91425" lIns="91425" spcFirstLastPara="1" rIns="91425" wrap="square" tIns="91425">
+          <a:bodyPr spcFirstLastPara="1" wrap="square" lIns="91425" tIns="91425" rIns="91425" bIns="91425" anchor="t" anchorCtr="0">
             <a:spAutoFit/>
           </a:bodyPr>
           <a:lstStyle/>
           <a:p>
-            <a:pPr indent="0" lvl="0" marL="0" rtl="0" algn="l">
+            <a:pPr marL="0" lvl="0" indent="0" algn="l" rtl="0">
               <a:spcBef>
                 <a:spcPts val="0"/>
               </a:spcBef>
@@ -7755,7 +7925,7 @@
             </a:endParaRPr>
           </a:p>
           <a:p>
-            <a:pPr indent="0" lvl="0" marL="0" rtl="0" algn="l">
+            <a:pPr marL="0" lvl="0" indent="0" algn="l" rtl="0">
               <a:spcBef>
                 <a:spcPts val="0"/>
               </a:spcBef>
@@ -7764,9 +7934,6 @@
               </a:spcAft>
               <a:buNone/>
             </a:pPr>
-            <a:r>
-              <a:t/>
-            </a:r>
             <a:endParaRPr sz="1600">
               <a:solidFill>
                 <a:schemeClr val="dk2"/>
@@ -7778,7 +7945,7 @@
             </a:endParaRPr>
           </a:p>
           <a:p>
-            <a:pPr indent="0" lvl="0" marL="0" rtl="0" algn="l">
+            <a:pPr marL="0" lvl="0" indent="0" algn="l" rtl="0">
               <a:spcBef>
                 <a:spcPts val="0"/>
               </a:spcBef>
@@ -7810,7 +7977,7 @@
             </a:endParaRPr>
           </a:p>
           <a:p>
-            <a:pPr indent="0" lvl="0" marL="0" rtl="0" algn="l">
+            <a:pPr marL="0" lvl="0" indent="0" algn="l" rtl="0">
               <a:spcBef>
                 <a:spcPts val="0"/>
               </a:spcBef>
@@ -7819,9 +7986,6 @@
               </a:spcAft>
               <a:buNone/>
             </a:pPr>
-            <a:r>
-              <a:t/>
-            </a:r>
             <a:endParaRPr sz="1600">
               <a:solidFill>
                 <a:schemeClr val="dk2"/>
@@ -7843,11 +8007,11 @@
 </file>
 
 <file path=ppt/slides/slide3.xml><?xml version="1.0" encoding="utf-8"?>
-<p:sld xmlns:a="http://schemas.openxmlformats.org/drawingml/2006/main" xmlns:r="http://schemas.openxmlformats.org/officeDocument/2006/relationships" xmlns:mc="http://schemas.openxmlformats.org/markup-compatibility/2006" xmlns:mv="urn:schemas-microsoft-com:mac:vml" xmlns:p="http://schemas.openxmlformats.org/presentationml/2006/main" xmlns:c="http://schemas.openxmlformats.org/drawingml/2006/chart" xmlns:dgm="http://schemas.openxmlformats.org/drawingml/2006/diagram" xmlns:o="urn:schemas-microsoft-com:office:office" xmlns:v="urn:schemas-microsoft-com:vml" xmlns:pvml="urn:schemas-microsoft-com:office:powerpoint" xmlns:com="http://schemas.openxmlformats.org/drawingml/2006/compatibility" xmlns:p14="http://schemas.microsoft.com/office/powerpoint/2010/main" xmlns:p15="http://schemas.microsoft.com/office/powerpoint/2012/main" xmlns:ahyp="http://schemas.microsoft.com/office/drawing/2018/hyperlinkcolor">
+<p:sld xmlns:a="http://schemas.openxmlformats.org/drawingml/2006/main" xmlns:r="http://schemas.openxmlformats.org/officeDocument/2006/relationships" xmlns:p="http://schemas.openxmlformats.org/presentationml/2006/main">
   <p:cSld>
     <p:spTree>
       <p:nvGrpSpPr>
-        <p:cNvPr id="75" name="Shape 75"/>
+        <p:cNvPr id="1" name="Shape 75"/>
         <p:cNvGrpSpPr/>
         <p:nvPr/>
       </p:nvGrpSpPr>
@@ -7862,7 +8026,9 @@
       <p:sp>
         <p:nvSpPr>
           <p:cNvPr id="76" name="Google Shape;76;p15"/>
-          <p:cNvSpPr txBox="1"/>
+          <p:cNvSpPr txBox="1">
+            <a:spLocks noGrp="1"/>
+          </p:cNvSpPr>
           <p:nvPr>
             <p:ph type="title"/>
           </p:nvPr>
@@ -7877,12 +8043,12 @@
           </a:prstGeom>
         </p:spPr>
         <p:txBody>
-          <a:bodyPr anchorCtr="0" anchor="t" bIns="91425" lIns="91425" spcFirstLastPara="1" rIns="91425" wrap="square" tIns="91425">
+          <a:bodyPr spcFirstLastPara="1" wrap="square" lIns="91425" tIns="91425" rIns="91425" bIns="91425" anchor="t" anchorCtr="0">
             <a:normAutofit/>
           </a:bodyPr>
           <a:lstStyle/>
           <a:p>
-            <a:pPr indent="0" lvl="0" marL="0" rtl="0" algn="l">
+            <a:pPr marL="0" lvl="0" indent="0" algn="l" rtl="0">
               <a:spcBef>
                 <a:spcPts val="0"/>
               </a:spcBef>
@@ -7919,12 +8085,12 @@
           </a:ln>
         </p:spPr>
         <p:txBody>
-          <a:bodyPr anchorCtr="0" anchor="t" bIns="91425" lIns="91425" spcFirstLastPara="1" rIns="91425" wrap="square" tIns="91425">
+          <a:bodyPr spcFirstLastPara="1" wrap="square" lIns="91425" tIns="91425" rIns="91425" bIns="91425" anchor="t" anchorCtr="0">
             <a:spAutoFit/>
           </a:bodyPr>
           <a:lstStyle/>
           <a:p>
-            <a:pPr indent="-330200" lvl="0" marL="457200" rtl="0" algn="l">
+            <a:pPr marL="457200" lvl="0" indent="-330200" algn="l" rtl="0">
               <a:lnSpc>
                 <a:spcPct val="115000"/>
               </a:lnSpc>
@@ -7964,7 +8130,7 @@
             </a:endParaRPr>
           </a:p>
           <a:p>
-            <a:pPr indent="-330200" lvl="0" marL="457200" rtl="0" algn="l">
+            <a:pPr marL="457200" lvl="0" indent="-330200" algn="l" rtl="0">
               <a:lnSpc>
                 <a:spcPct val="115000"/>
               </a:lnSpc>
@@ -8004,7 +8170,7 @@
             </a:endParaRPr>
           </a:p>
           <a:p>
-            <a:pPr indent="-330200" lvl="0" marL="457200" rtl="0" algn="l">
+            <a:pPr marL="457200" lvl="0" indent="-330200" algn="l" rtl="0">
               <a:lnSpc>
                 <a:spcPct val="115000"/>
               </a:lnSpc>
@@ -8044,7 +8210,7 @@
             </a:endParaRPr>
           </a:p>
           <a:p>
-            <a:pPr indent="-330200" lvl="0" marL="457200" rtl="0" algn="l">
+            <a:pPr marL="457200" lvl="0" indent="-330200" algn="l" rtl="0">
               <a:lnSpc>
                 <a:spcPct val="115000"/>
               </a:lnSpc>
@@ -8084,7 +8250,7 @@
             </a:endParaRPr>
           </a:p>
           <a:p>
-            <a:pPr indent="-330200" lvl="0" marL="457200" rtl="0" algn="l">
+            <a:pPr marL="457200" lvl="0" indent="-330200" algn="l" rtl="0">
               <a:lnSpc>
                 <a:spcPct val="115000"/>
               </a:lnSpc>
@@ -8124,7 +8290,7 @@
             </a:endParaRPr>
           </a:p>
           <a:p>
-            <a:pPr indent="-330200" lvl="0" marL="457200" rtl="0" algn="l">
+            <a:pPr marL="457200" lvl="0" indent="-330200" algn="l" rtl="0">
               <a:lnSpc>
                 <a:spcPct val="115000"/>
               </a:lnSpc>
@@ -8164,7 +8330,7 @@
             </a:endParaRPr>
           </a:p>
           <a:p>
-            <a:pPr indent="0" lvl="0" marL="0" rtl="0" algn="l">
+            <a:pPr marL="0" lvl="0" indent="0" algn="l" rtl="0">
               <a:spcBef>
                 <a:spcPts val="0"/>
               </a:spcBef>
@@ -8173,9 +8339,6 @@
               </a:spcAft>
               <a:buNone/>
             </a:pPr>
-            <a:r>
-              <a:t/>
-            </a:r>
             <a:endParaRPr sz="1300">
               <a:solidFill>
                 <a:schemeClr val="dk2"/>
@@ -8197,11 +8360,11 @@
 </file>
 
 <file path=ppt/slides/slide4.xml><?xml version="1.0" encoding="utf-8"?>
-<p:sld xmlns:a="http://schemas.openxmlformats.org/drawingml/2006/main" xmlns:r="http://schemas.openxmlformats.org/officeDocument/2006/relationships" xmlns:mc="http://schemas.openxmlformats.org/markup-compatibility/2006" xmlns:mv="urn:schemas-microsoft-com:mac:vml" xmlns:p="http://schemas.openxmlformats.org/presentationml/2006/main" xmlns:c="http://schemas.openxmlformats.org/drawingml/2006/chart" xmlns:dgm="http://schemas.openxmlformats.org/drawingml/2006/diagram" xmlns:o="urn:schemas-microsoft-com:office:office" xmlns:v="urn:schemas-microsoft-com:vml" xmlns:pvml="urn:schemas-microsoft-com:office:powerpoint" xmlns:com="http://schemas.openxmlformats.org/drawingml/2006/compatibility" xmlns:p14="http://schemas.microsoft.com/office/powerpoint/2010/main" xmlns:p15="http://schemas.microsoft.com/office/powerpoint/2012/main" xmlns:ahyp="http://schemas.microsoft.com/office/drawing/2018/hyperlinkcolor">
+<p:sld xmlns:a="http://schemas.openxmlformats.org/drawingml/2006/main" xmlns:r="http://schemas.openxmlformats.org/officeDocument/2006/relationships" xmlns:p="http://schemas.openxmlformats.org/presentationml/2006/main">
   <p:cSld>
     <p:spTree>
       <p:nvGrpSpPr>
-        <p:cNvPr id="81" name="Shape 81"/>
+        <p:cNvPr id="1" name="Shape 81"/>
         <p:cNvGrpSpPr/>
         <p:nvPr/>
       </p:nvGrpSpPr>
@@ -8216,9 +8379,11 @@
       <p:sp>
         <p:nvSpPr>
           <p:cNvPr id="82" name="Google Shape;82;p16"/>
-          <p:cNvSpPr txBox="1"/>
+          <p:cNvSpPr txBox="1">
+            <a:spLocks noGrp="1"/>
+          </p:cNvSpPr>
           <p:nvPr>
-            <p:ph idx="1" type="body"/>
+            <p:ph type="body" idx="1"/>
           </p:nvPr>
         </p:nvSpPr>
         <p:spPr>
@@ -8231,12 +8396,12 @@
           </a:prstGeom>
         </p:spPr>
         <p:txBody>
-          <a:bodyPr anchorCtr="0" anchor="ctr" bIns="91425" lIns="91425" spcFirstLastPara="1" rIns="91425" wrap="square" tIns="91425">
+          <a:bodyPr spcFirstLastPara="1" wrap="square" lIns="91425" tIns="91425" rIns="91425" bIns="91425" anchor="ctr" anchorCtr="0">
             <a:normAutofit/>
           </a:bodyPr>
           <a:lstStyle/>
           <a:p>
-            <a:pPr indent="0" lvl="0" marL="0" rtl="0" algn="l">
+            <a:pPr marL="0" lvl="0" indent="0" algn="l" rtl="0">
               <a:spcBef>
                 <a:spcPts val="0"/>
               </a:spcBef>
@@ -8290,11 +8455,11 @@
 </file>
 
 <file path=ppt/slides/slide5.xml><?xml version="1.0" encoding="utf-8"?>
-<p:sld xmlns:a="http://schemas.openxmlformats.org/drawingml/2006/main" xmlns:r="http://schemas.openxmlformats.org/officeDocument/2006/relationships" xmlns:mc="http://schemas.openxmlformats.org/markup-compatibility/2006" xmlns:mv="urn:schemas-microsoft-com:mac:vml" xmlns:p="http://schemas.openxmlformats.org/presentationml/2006/main" xmlns:c="http://schemas.openxmlformats.org/drawingml/2006/chart" xmlns:dgm="http://schemas.openxmlformats.org/drawingml/2006/diagram" xmlns:o="urn:schemas-microsoft-com:office:office" xmlns:v="urn:schemas-microsoft-com:vml" xmlns:pvml="urn:schemas-microsoft-com:office:powerpoint" xmlns:com="http://schemas.openxmlformats.org/drawingml/2006/compatibility" xmlns:p14="http://schemas.microsoft.com/office/powerpoint/2010/main" xmlns:p15="http://schemas.microsoft.com/office/powerpoint/2012/main" xmlns:ahyp="http://schemas.microsoft.com/office/drawing/2018/hyperlinkcolor">
+<p:sld xmlns:a="http://schemas.openxmlformats.org/drawingml/2006/main" xmlns:r="http://schemas.openxmlformats.org/officeDocument/2006/relationships" xmlns:p="http://schemas.openxmlformats.org/presentationml/2006/main">
   <p:cSld>
     <p:spTree>
       <p:nvGrpSpPr>
-        <p:cNvPr id="87" name="Shape 87"/>
+        <p:cNvPr id="1" name="Shape 87"/>
         <p:cNvGrpSpPr/>
         <p:nvPr/>
       </p:nvGrpSpPr>
@@ -8309,9 +8474,11 @@
       <p:sp>
         <p:nvSpPr>
           <p:cNvPr id="88" name="Google Shape;88;p17"/>
-          <p:cNvSpPr txBox="1"/>
+          <p:cNvSpPr txBox="1">
+            <a:spLocks noGrp="1"/>
+          </p:cNvSpPr>
           <p:nvPr>
-            <p:ph idx="1" type="body"/>
+            <p:ph type="body" idx="1"/>
           </p:nvPr>
         </p:nvSpPr>
         <p:spPr>
@@ -8324,12 +8491,12 @@
           </a:prstGeom>
         </p:spPr>
         <p:txBody>
-          <a:bodyPr anchorCtr="0" anchor="ctr" bIns="91425" lIns="91425" spcFirstLastPara="1" rIns="91425" wrap="square" tIns="91425">
+          <a:bodyPr spcFirstLastPara="1" wrap="square" lIns="91425" tIns="91425" rIns="91425" bIns="91425" anchor="ctr" anchorCtr="0">
             <a:normAutofit/>
           </a:bodyPr>
           <a:lstStyle/>
           <a:p>
-            <a:pPr indent="0" lvl="0" marL="0" rtl="0" algn="l">
+            <a:pPr marL="0" lvl="0" indent="0" algn="l" rtl="0">
               <a:spcBef>
                 <a:spcPts val="0"/>
               </a:spcBef>
@@ -8411,11 +8578,11 @@
 </file>
 
 <file path=ppt/slides/slide6.xml><?xml version="1.0" encoding="utf-8"?>
-<p:sld xmlns:a="http://schemas.openxmlformats.org/drawingml/2006/main" xmlns:r="http://schemas.openxmlformats.org/officeDocument/2006/relationships" xmlns:mc="http://schemas.openxmlformats.org/markup-compatibility/2006" xmlns:mv="urn:schemas-microsoft-com:mac:vml" xmlns:p="http://schemas.openxmlformats.org/presentationml/2006/main" xmlns:c="http://schemas.openxmlformats.org/drawingml/2006/chart" xmlns:dgm="http://schemas.openxmlformats.org/drawingml/2006/diagram" xmlns:o="urn:schemas-microsoft-com:office:office" xmlns:v="urn:schemas-microsoft-com:vml" xmlns:pvml="urn:schemas-microsoft-com:office:powerpoint" xmlns:com="http://schemas.openxmlformats.org/drawingml/2006/compatibility" xmlns:p14="http://schemas.microsoft.com/office/powerpoint/2010/main" xmlns:p15="http://schemas.microsoft.com/office/powerpoint/2012/main" xmlns:ahyp="http://schemas.microsoft.com/office/drawing/2018/hyperlinkcolor">
+<p:sld xmlns:a="http://schemas.openxmlformats.org/drawingml/2006/main" xmlns:r="http://schemas.openxmlformats.org/officeDocument/2006/relationships" xmlns:p="http://schemas.openxmlformats.org/presentationml/2006/main">
   <p:cSld>
     <p:spTree>
       <p:nvGrpSpPr>
-        <p:cNvPr id="94" name="Shape 94"/>
+        <p:cNvPr id="1" name="Shape 94"/>
         <p:cNvGrpSpPr/>
         <p:nvPr/>
       </p:nvGrpSpPr>
@@ -8430,9 +8597,11 @@
       <p:sp>
         <p:nvSpPr>
           <p:cNvPr id="95" name="Google Shape;95;p18"/>
-          <p:cNvSpPr txBox="1"/>
+          <p:cNvSpPr txBox="1">
+            <a:spLocks noGrp="1"/>
+          </p:cNvSpPr>
           <p:nvPr>
-            <p:ph idx="1" type="body"/>
+            <p:ph type="body" idx="1"/>
           </p:nvPr>
         </p:nvSpPr>
         <p:spPr>
@@ -8445,12 +8614,12 @@
           </a:prstGeom>
         </p:spPr>
         <p:txBody>
-          <a:bodyPr anchorCtr="0" anchor="ctr" bIns="91425" lIns="91425" spcFirstLastPara="1" rIns="91425" wrap="square" tIns="91425">
+          <a:bodyPr spcFirstLastPara="1" wrap="square" lIns="91425" tIns="91425" rIns="91425" bIns="91425" anchor="ctr" anchorCtr="0">
             <a:normAutofit/>
           </a:bodyPr>
           <a:lstStyle/>
           <a:p>
-            <a:pPr indent="0" lvl="0" marL="0" rtl="0" algn="l">
+            <a:pPr marL="0" lvl="0" indent="0" algn="l" rtl="0">
               <a:spcBef>
                 <a:spcPts val="0"/>
               </a:spcBef>
@@ -8532,11 +8701,11 @@
 </file>
 
 <file path=ppt/slides/slide7.xml><?xml version="1.0" encoding="utf-8"?>
-<p:sld xmlns:a="http://schemas.openxmlformats.org/drawingml/2006/main" xmlns:r="http://schemas.openxmlformats.org/officeDocument/2006/relationships" xmlns:mc="http://schemas.openxmlformats.org/markup-compatibility/2006" xmlns:mv="urn:schemas-microsoft-com:mac:vml" xmlns:p="http://schemas.openxmlformats.org/presentationml/2006/main" xmlns:c="http://schemas.openxmlformats.org/drawingml/2006/chart" xmlns:dgm="http://schemas.openxmlformats.org/drawingml/2006/diagram" xmlns:o="urn:schemas-microsoft-com:office:office" xmlns:v="urn:schemas-microsoft-com:vml" xmlns:pvml="urn:schemas-microsoft-com:office:powerpoint" xmlns:com="http://schemas.openxmlformats.org/drawingml/2006/compatibility" xmlns:p14="http://schemas.microsoft.com/office/powerpoint/2010/main" xmlns:p15="http://schemas.microsoft.com/office/powerpoint/2012/main" xmlns:ahyp="http://schemas.microsoft.com/office/drawing/2018/hyperlinkcolor">
+<p:sld xmlns:a="http://schemas.openxmlformats.org/drawingml/2006/main" xmlns:r="http://schemas.openxmlformats.org/officeDocument/2006/relationships" xmlns:p="http://schemas.openxmlformats.org/presentationml/2006/main">
   <p:cSld>
     <p:spTree>
       <p:nvGrpSpPr>
-        <p:cNvPr id="101" name="Shape 101"/>
+        <p:cNvPr id="1" name="Shape 101"/>
         <p:cNvGrpSpPr/>
         <p:nvPr/>
       </p:nvGrpSpPr>
@@ -8551,7 +8720,9 @@
       <p:sp>
         <p:nvSpPr>
           <p:cNvPr id="102" name="Google Shape;102;p19"/>
-          <p:cNvSpPr txBox="1"/>
+          <p:cNvSpPr txBox="1">
+            <a:spLocks noGrp="1"/>
+          </p:cNvSpPr>
           <p:nvPr>
             <p:ph type="title"/>
           </p:nvPr>
@@ -8566,12 +8737,12 @@
           </a:prstGeom>
         </p:spPr>
         <p:txBody>
-          <a:bodyPr anchorCtr="0" anchor="t" bIns="91425" lIns="91425" spcFirstLastPara="1" rIns="91425" wrap="square" tIns="91425">
+          <a:bodyPr spcFirstLastPara="1" wrap="square" lIns="91425" tIns="91425" rIns="91425" bIns="91425" anchor="t" anchorCtr="0">
             <a:normAutofit/>
           </a:bodyPr>
           <a:lstStyle/>
           <a:p>
-            <a:pPr indent="0" lvl="0" marL="0" rtl="0" algn="l">
+            <a:pPr marL="0" lvl="0" indent="0" algn="l" rtl="0">
               <a:spcBef>
                 <a:spcPts val="0"/>
               </a:spcBef>
@@ -8608,12 +8779,12 @@
           </a:ln>
         </p:spPr>
         <p:txBody>
-          <a:bodyPr anchorCtr="0" anchor="t" bIns="91425" lIns="91425" spcFirstLastPara="1" rIns="91425" wrap="square" tIns="91425">
+          <a:bodyPr spcFirstLastPara="1" wrap="square" lIns="91425" tIns="91425" rIns="91425" bIns="91425" anchor="t" anchorCtr="0">
             <a:spAutoFit/>
           </a:bodyPr>
           <a:lstStyle/>
           <a:p>
-            <a:pPr indent="-342900" lvl="0" marL="457200" rtl="0" algn="l">
+            <a:pPr marL="457200" lvl="0" indent="-342900" algn="l" rtl="0">
               <a:spcBef>
                 <a:spcPts val="0"/>
               </a:spcBef>
@@ -8650,7 +8821,7 @@
             </a:endParaRPr>
           </a:p>
           <a:p>
-            <a:pPr indent="-342900" lvl="0" marL="457200" rtl="0" algn="l">
+            <a:pPr marL="457200" lvl="0" indent="-342900" algn="l" rtl="0">
               <a:spcBef>
                 <a:spcPts val="0"/>
               </a:spcBef>
@@ -8687,7 +8858,7 @@
             </a:endParaRPr>
           </a:p>
           <a:p>
-            <a:pPr indent="-342900" lvl="0" marL="457200" rtl="0" algn="l">
+            <a:pPr marL="457200" lvl="0" indent="-342900" algn="l" rtl="0">
               <a:spcBef>
                 <a:spcPts val="0"/>
               </a:spcBef>
@@ -8724,7 +8895,7 @@
             </a:endParaRPr>
           </a:p>
           <a:p>
-            <a:pPr indent="0" lvl="0" marL="0" rtl="0" algn="l">
+            <a:pPr marL="0" lvl="0" indent="0" algn="l" rtl="0">
               <a:spcBef>
                 <a:spcPts val="0"/>
               </a:spcBef>
@@ -8733,9 +8904,6 @@
               </a:spcAft>
               <a:buNone/>
             </a:pPr>
-            <a:r>
-              <a:t/>
-            </a:r>
             <a:endParaRPr sz="1300">
               <a:solidFill>
                 <a:schemeClr val="dk2"/>
@@ -8757,11 +8925,11 @@
 </file>
 
 <file path=ppt/slides/slide8.xml><?xml version="1.0" encoding="utf-8"?>
-<p:sld xmlns:a="http://schemas.openxmlformats.org/drawingml/2006/main" xmlns:r="http://schemas.openxmlformats.org/officeDocument/2006/relationships" xmlns:mc="http://schemas.openxmlformats.org/markup-compatibility/2006" xmlns:mv="urn:schemas-microsoft-com:mac:vml" xmlns:p="http://schemas.openxmlformats.org/presentationml/2006/main" xmlns:c="http://schemas.openxmlformats.org/drawingml/2006/chart" xmlns:dgm="http://schemas.openxmlformats.org/drawingml/2006/diagram" xmlns:o="urn:schemas-microsoft-com:office:office" xmlns:v="urn:schemas-microsoft-com:vml" xmlns:pvml="urn:schemas-microsoft-com:office:powerpoint" xmlns:com="http://schemas.openxmlformats.org/drawingml/2006/compatibility" xmlns:p14="http://schemas.microsoft.com/office/powerpoint/2010/main" xmlns:p15="http://schemas.microsoft.com/office/powerpoint/2012/main" xmlns:ahyp="http://schemas.microsoft.com/office/drawing/2018/hyperlinkcolor">
+<p:sld xmlns:a="http://schemas.openxmlformats.org/drawingml/2006/main" xmlns:r="http://schemas.openxmlformats.org/officeDocument/2006/relationships" xmlns:p="http://schemas.openxmlformats.org/presentationml/2006/main">
   <p:cSld>
     <p:spTree>
       <p:nvGrpSpPr>
-        <p:cNvPr id="107" name="Shape 107"/>
+        <p:cNvPr id="1" name="Shape 107"/>
         <p:cNvGrpSpPr/>
         <p:nvPr/>
       </p:nvGrpSpPr>
@@ -8782,7 +8950,7 @@
         <p:spPr>
           <a:xfrm>
             <a:off x="0" y="2186850"/>
-            <a:ext cx="9144000" cy="923400"/>
+            <a:ext cx="9144000" cy="923299"/>
           </a:xfrm>
           <a:prstGeom prst="rect">
             <a:avLst/>
@@ -8793,12 +8961,12 @@
           </a:ln>
         </p:spPr>
         <p:txBody>
-          <a:bodyPr anchorCtr="0" anchor="t" bIns="91425" lIns="91425" spcFirstLastPara="1" rIns="91425" wrap="square" tIns="91425">
+          <a:bodyPr spcFirstLastPara="1" wrap="square" lIns="91425" tIns="91425" rIns="91425" bIns="91425" anchor="t" anchorCtr="0">
             <a:spAutoFit/>
           </a:bodyPr>
           <a:lstStyle/>
           <a:p>
-            <a:pPr indent="0" lvl="0" marL="0" rtl="0" algn="ctr">
+            <a:pPr marL="0" lvl="0" indent="0" algn="ctr" rtl="0">
               <a:spcBef>
                 <a:spcPts val="0"/>
               </a:spcBef>
@@ -8808,7 +8976,7 @@
               <a:buNone/>
             </a:pPr>
             <a:r>
-              <a:rPr lang="ru" sz="4800">
+              <a:rPr lang="ru" sz="4800" dirty="0">
                 <a:solidFill>
                   <a:schemeClr val="dk2"/>
                 </a:solidFill>
@@ -8819,7 +8987,19 @@
               </a:rPr>
               <a:t>ВСЁ</a:t>
             </a:r>
-            <a:endParaRPr sz="4800">
+            <a:r>
+              <a:rPr lang="ru-RU" sz="4800" dirty="0">
+                <a:solidFill>
+                  <a:schemeClr val="dk2"/>
+                </a:solidFill>
+                <a:latin typeface="Roboto"/>
+                <a:ea typeface="Roboto"/>
+                <a:cs typeface="Roboto"/>
+                <a:sym typeface="Roboto"/>
+              </a:rPr>
+              <a:t>!</a:t>
+            </a:r>
+            <a:endParaRPr lang="en-US" sz="4800" dirty="0">
               <a:solidFill>
                 <a:schemeClr val="dk2"/>
               </a:solidFill>
@@ -8840,7 +9020,7 @@
 </file>
 
 <file path=ppt/theme/theme1.xml><?xml version="1.0" encoding="utf-8"?>
-<a:theme xmlns:a="http://schemas.openxmlformats.org/drawingml/2006/main" xmlns:r="http://schemas.openxmlformats.org/officeDocument/2006/relationships" name="Paradigm">
+<a:theme xmlns:a="http://schemas.openxmlformats.org/drawingml/2006/main" name="Paradigm">
   <a:themeElements>
     <a:clrScheme name="Paradigm">
       <a:dk1>
@@ -9115,11 +9295,13 @@
       </a:bgFillStyleLst>
     </a:fmtScheme>
   </a:themeElements>
+  <a:objectDefaults/>
+  <a:extraClrSchemeLst/>
 </a:theme>
 </file>
 
 <file path=ppt/theme/theme2.xml><?xml version="1.0" encoding="utf-8"?>
-<a:theme xmlns:a="http://schemas.openxmlformats.org/drawingml/2006/main" xmlns:r="http://schemas.openxmlformats.org/officeDocument/2006/relationships">
+<a:theme xmlns:a="http://schemas.openxmlformats.org/drawingml/2006/main">
   <a:themeElements>
     <a:clrScheme name="Default">
       <a:dk1>
@@ -9394,5 +9576,7 @@
       </a:bgFillStyleLst>
     </a:fmtScheme>
   </a:themeElements>
+  <a:objectDefaults/>
+  <a:extraClrSchemeLst/>
 </a:theme>
 </file>
--- a/VoteSite.pptx
+++ b/VoteSite.pptx
@@ -753,8 +753,8 @@
         </p:nvSpPr>
         <p:spPr>
           <a:xfrm>
-            <a:off x="381300" y="685800"/>
-            <a:ext cx="6096075" cy="3429000"/>
+            <a:off x="381000" y="685800"/>
+            <a:ext cx="6096000" cy="3429000"/>
           </a:xfrm>
           <a:custGeom>
             <a:avLst/>
@@ -7752,10 +7752,14 @@
               <a:buNone/>
             </a:pPr>
             <a:r>
-              <a:rPr lang="ru"/>
-              <a:t>VoteSite</a:t>
+              <a:rPr lang="ru" dirty="0"/>
+              <a:t>О</a:t>
             </a:r>
-            <a:endParaRPr/>
+            <a:r>
+              <a:rPr lang="ru-RU" dirty="0" err="1"/>
+              <a:t>просы</a:t>
+            </a:r>
+            <a:endParaRPr dirty="0"/>
           </a:p>
         </p:txBody>
       </p:sp>
